--- a/content/decks/media-studies/media-studies-s1-lesson-16-a4-section-a-in-authentic-format.pptx
+++ b/content/decks/media-studies/media-studies-s1-lesson-16-a4-section-a-in-authentic-format.pptx
@@ -16,9 +16,12 @@
     <p:sldId id="264" r:id="rId10"/>
     <p:sldId id="265" r:id="rId11"/>
     <p:sldId id="266" r:id="rId12"/>
+    <p:sldId id="267" r:id="rId13"/>
+    <p:sldId id="268" r:id="rId14"/>
+    <p:sldId id="269" r:id="rId15"/>
   </p:sldIdLst>
   <p:notesMasterIdLst>
-    <p:notesMasterId r:id="rId13"/>
+    <p:notesMasterId r:id="rId16"/>
   </p:notesMasterIdLst>
   <p:sldSz cx="12192000" cy="6858000"/>
   <p:notesSz cx="6858000" cy="12192000"/>
@@ -600,7 +603,7 @@
           <a:p>
             <a:r>
               <a:rPr lang="en-US" dirty="0"/>
-              <a:t/>
+              <a:t>The drills run on a trailer, ninety seconds each, notes straight into the four families. Capture, do not compose.</a:t>
             </a:r>
             <a:endParaRPr lang="en-US" dirty="0"/>
           </a:p>
@@ -688,7 +691,7 @@
           <a:p>
             <a:r>
               <a:rPr lang="en-US" dirty="0"/>
-              <a:t/>
+              <a:t>The booklet's Section A is a June 2021 extract, not a held text, so it is safe to project. The high script (a wide range of media terminology, in the same booklet) is the counter-example; both pages are in img/ as ecr-narration and ecr-high.</a:t>
             </a:r>
             <a:endParaRPr lang="en-US" dirty="0"/>
           </a:p>
@@ -712,6 +715,270 @@
             <a:fld id="{F7021451-1387-4CA6-816F-3879F97B5CBC}" type="slidenum">
               <a:rPr lang="en-US"/>
               <a:t>11</a:t>
+            </a:fld>
+            <a:endParaRPr lang="en-US"/>
+          </a:p>
+        </p:txBody>
+      </p:sp>
+    </p:spTree>
+    <p:extLst>
+      <p:ext uri="{BB962C8B-B14F-4D97-AF65-F5344CB8AC3E}">
+        <p14:creationId xmlns:p14="http://schemas.microsoft.com/office/powerpoint/2010/main" val="1024086991"/>
+      </p:ext>
+    </p:extLst>
+  </p:cSld>
+  <p:clrMapOvr>
+    <a:masterClrMapping/>
+  </p:clrMapOvr>
+</p:notes>
+</file>
+
+<file path=ppt/notesSlides/notesSlide12.xml><?xml version="1.0" encoding="utf-8"?>
+<p:notes xmlns:a="http://schemas.openxmlformats.org/drawingml/2006/main" xmlns:r="http://schemas.openxmlformats.org/officeDocument/2006/relationships" xmlns:p="http://schemas.openxmlformats.org/presentationml/2006/main">
+  <p:cSld>
+    <p:spTree>
+      <p:nvGrpSpPr>
+        <p:cNvPr id="1" name=""/>
+        <p:cNvGrpSpPr/>
+        <p:nvPr/>
+      </p:nvGrpSpPr>
+      <p:grpSpPr>
+        <a:xfrm>
+          <a:off x="0" y="0"/>
+          <a:ext cx="0" cy="0"/>
+          <a:chOff x="0" y="0"/>
+          <a:chExt cx="0" cy="0"/>
+        </a:xfrm>
+      </p:grpSpPr>
+      <p:sp>
+        <p:nvSpPr>
+          <p:cNvPr id="2" name="Slide Image Placeholder 1"/>
+          <p:cNvSpPr>
+            <a:spLocks noGrp="1" noRot="1" noChangeAspect="1"/>
+          </p:cNvSpPr>
+          <p:nvPr>
+            <p:ph type="sldImg"/>
+          </p:nvPr>
+        </p:nvSpPr>
+        <p:spPr/>
+      </p:sp>
+      <p:sp>
+        <p:nvSpPr>
+          <p:cNvPr id="3" name="Notes Placeholder 2"/>
+          <p:cNvSpPr>
+            <a:spLocks noGrp="1"/>
+          </p:cNvSpPr>
+          <p:nvPr>
+            <p:ph type="body" idx="1"/>
+          </p:nvPr>
+        </p:nvSpPr>
+        <p:spPr/>
+        <p:txBody>
+          <a:bodyPr/>
+          <a:lstStyle/>
+          <a:p>
+            <a:r>
+              <a:rPr lang="en-US" dirty="0"/>
+              <a:t>NRTA stays a spoken aside per the exam-example rule; the taught regulators are the case-study institutions' own.</a:t>
+            </a:r>
+            <a:endParaRPr lang="en-US" dirty="0"/>
+          </a:p>
+        </p:txBody>
+      </p:sp>
+      <p:sp>
+        <p:nvSpPr>
+          <p:cNvPr id="4" name="Slide Number Placeholder 3"/>
+          <p:cNvSpPr>
+            <a:spLocks noGrp="1"/>
+          </p:cNvSpPr>
+          <p:nvPr>
+            <p:ph type="sldNum" sz="quarter" idx="10"/>
+          </p:nvPr>
+        </p:nvSpPr>
+        <p:spPr/>
+        <p:txBody>
+          <a:bodyPr/>
+          <a:lstStyle/>
+          <a:p>
+            <a:fld id="{F7021451-1387-4CA6-816F-3879F97B5CBC}" type="slidenum">
+              <a:rPr lang="en-US"/>
+              <a:t>12</a:t>
+            </a:fld>
+            <a:endParaRPr lang="en-US"/>
+          </a:p>
+        </p:txBody>
+      </p:sp>
+    </p:spTree>
+    <p:extLst>
+      <p:ext uri="{BB962C8B-B14F-4D97-AF65-F5344CB8AC3E}">
+        <p14:creationId xmlns:p14="http://schemas.microsoft.com/office/powerpoint/2010/main" val="1024086991"/>
+      </p:ext>
+    </p:extLst>
+  </p:cSld>
+  <p:clrMapOvr>
+    <a:masterClrMapping/>
+  </p:clrMapOvr>
+</p:notes>
+</file>
+
+<file path=ppt/notesSlides/notesSlide13.xml><?xml version="1.0" encoding="utf-8"?>
+<p:notes xmlns:a="http://schemas.openxmlformats.org/drawingml/2006/main" xmlns:r="http://schemas.openxmlformats.org/officeDocument/2006/relationships" xmlns:p="http://schemas.openxmlformats.org/presentationml/2006/main">
+  <p:cSld>
+    <p:spTree>
+      <p:nvGrpSpPr>
+        <p:cNvPr id="1" name=""/>
+        <p:cNvGrpSpPr/>
+        <p:nvPr/>
+      </p:nvGrpSpPr>
+      <p:grpSpPr>
+        <a:xfrm>
+          <a:off x="0" y="0"/>
+          <a:ext cx="0" cy="0"/>
+          <a:chOff x="0" y="0"/>
+          <a:chExt cx="0" cy="0"/>
+        </a:xfrm>
+      </p:grpSpPr>
+      <p:sp>
+        <p:nvSpPr>
+          <p:cNvPr id="2" name="Slide Image Placeholder 1"/>
+          <p:cNvSpPr>
+            <a:spLocks noGrp="1" noRot="1" noChangeAspect="1"/>
+          </p:cNvSpPr>
+          <p:nvPr>
+            <p:ph type="sldImg"/>
+          </p:nvPr>
+        </p:nvSpPr>
+        <p:spPr/>
+      </p:sp>
+      <p:sp>
+        <p:nvSpPr>
+          <p:cNvPr id="3" name="Notes Placeholder 2"/>
+          <p:cNvSpPr>
+            <a:spLocks noGrp="1"/>
+          </p:cNvSpPr>
+          <p:nvPr>
+            <p:ph type="body" idx="1"/>
+          </p:nvPr>
+        </p:nvSpPr>
+        <p:spPr/>
+        <p:txBody>
+          <a:bodyPr/>
+          <a:lstStyle/>
+          <a:p>
+            <a:r>
+              <a:rPr lang="en-US" dirty="0"/>
+              <a:t>The extract shortlist is sealed until the sit; no still of any candidate text appears in this deck on purpose. Screening protocol on the day: four screenings, no notes on the first, notes crossed out.</a:t>
+            </a:r>
+            <a:endParaRPr lang="en-US" dirty="0"/>
+          </a:p>
+        </p:txBody>
+      </p:sp>
+      <p:sp>
+        <p:nvSpPr>
+          <p:cNvPr id="4" name="Slide Number Placeholder 3"/>
+          <p:cNvSpPr>
+            <a:spLocks noGrp="1"/>
+          </p:cNvSpPr>
+          <p:nvPr>
+            <p:ph type="sldNum" sz="quarter" idx="10"/>
+          </p:nvPr>
+        </p:nvSpPr>
+        <p:spPr/>
+        <p:txBody>
+          <a:bodyPr/>
+          <a:lstStyle/>
+          <a:p>
+            <a:fld id="{F7021451-1387-4CA6-816F-3879F97B5CBC}" type="slidenum">
+              <a:rPr lang="en-US"/>
+              <a:t>13</a:t>
+            </a:fld>
+            <a:endParaRPr lang="en-US"/>
+          </a:p>
+        </p:txBody>
+      </p:sp>
+    </p:spTree>
+    <p:extLst>
+      <p:ext uri="{BB962C8B-B14F-4D97-AF65-F5344CB8AC3E}">
+        <p14:creationId xmlns:p14="http://schemas.microsoft.com/office/powerpoint/2010/main" val="1024086991"/>
+      </p:ext>
+    </p:extLst>
+  </p:cSld>
+  <p:clrMapOvr>
+    <a:masterClrMapping/>
+  </p:clrMapOvr>
+</p:notes>
+</file>
+
+<file path=ppt/notesSlides/notesSlide14.xml><?xml version="1.0" encoding="utf-8"?>
+<p:notes xmlns:a="http://schemas.openxmlformats.org/drawingml/2006/main" xmlns:r="http://schemas.openxmlformats.org/officeDocument/2006/relationships" xmlns:p="http://schemas.openxmlformats.org/presentationml/2006/main">
+  <p:cSld>
+    <p:spTree>
+      <p:nvGrpSpPr>
+        <p:cNvPr id="1" name=""/>
+        <p:cNvGrpSpPr/>
+        <p:nvPr/>
+      </p:nvGrpSpPr>
+      <p:grpSpPr>
+        <a:xfrm>
+          <a:off x="0" y="0"/>
+          <a:ext cx="0" cy="0"/>
+          <a:chOff x="0" y="0"/>
+          <a:chExt cx="0" cy="0"/>
+        </a:xfrm>
+      </p:grpSpPr>
+      <p:sp>
+        <p:nvSpPr>
+          <p:cNvPr id="2" name="Slide Image Placeholder 1"/>
+          <p:cNvSpPr>
+            <a:spLocks noGrp="1" noRot="1" noChangeAspect="1"/>
+          </p:cNvSpPr>
+          <p:nvPr>
+            <p:ph type="sldImg"/>
+          </p:nvPr>
+        </p:nvSpPr>
+        <p:spPr/>
+      </p:sp>
+      <p:sp>
+        <p:nvSpPr>
+          <p:cNvPr id="3" name="Notes Placeholder 2"/>
+          <p:cNvSpPr>
+            <a:spLocks noGrp="1"/>
+          </p:cNvSpPr>
+          <p:nvPr>
+            <p:ph type="body" idx="1"/>
+          </p:nvPr>
+        </p:nvSpPr>
+        <p:spPr/>
+        <p:txBody>
+          <a:bodyPr/>
+          <a:lstStyle/>
+          <a:p>
+            <a:r>
+              <a:rPr lang="en-US" dirty="0"/>
+              <a:t/>
+            </a:r>
+            <a:endParaRPr lang="en-US" dirty="0"/>
+          </a:p>
+        </p:txBody>
+      </p:sp>
+      <p:sp>
+        <p:nvSpPr>
+          <p:cNvPr id="4" name="Slide Number Placeholder 3"/>
+          <p:cNvSpPr>
+            <a:spLocks noGrp="1"/>
+          </p:cNvSpPr>
+          <p:nvPr>
+            <p:ph type="sldNum" sz="quarter" idx="10"/>
+          </p:nvPr>
+        </p:nvSpPr>
+        <p:spPr/>
+        <p:txBody>
+          <a:bodyPr/>
+          <a:lstStyle/>
+          <a:p>
+            <a:fld id="{F7021451-1387-4CA6-816F-3879F97B5CBC}" type="slidenum">
+              <a:rPr lang="en-US"/>
+              <a:t>14</a:t>
             </a:fld>
             <a:endParaRPr lang="en-US"/>
           </a:p>
@@ -864,7 +1131,7 @@
           <a:p>
             <a:r>
               <a:rPr lang="en-US" dirty="0"/>
-              <a:t/>
+              <a:t>Defined and separated first; the next two slides carry them, 1995 and 2023, then 1927.</a:t>
             </a:r>
             <a:endParaRPr lang="en-US" dirty="0"/>
           </a:p>
@@ -952,7 +1219,7 @@
           <a:p>
             <a:r>
               <a:rPr lang="en-US" dirty="0"/>
-              <a:t>Lindbergh as the worked historical anchor: integration, synergy, and convergence visible in 1927.</a:t>
+              <a:t>Disney/Pixar is the Scheme of Work's own conglomeration example; Mario is Deck U5.2's quiz case (Nintendo develops and owns the characters, Illumination produces, Universal distributes, Super Nintendo World extends). Hunt all three words in the students' own case-study institutions next.</a:t>
             </a:r>
             <a:endParaRPr lang="en-US" dirty="0"/>
           </a:p>
@@ -1040,7 +1307,7 @@
           <a:p>
             <a:r>
               <a:rPr lang="en-US" dirty="0"/>
-              <a:t/>
+              <a:t>Lindbergh as the worked historical anchor: integration, synergy, and convergence visible in 1927.</a:t>
             </a:r>
             <a:endParaRPr lang="en-US" dirty="0"/>
           </a:p>
@@ -1216,7 +1483,7 @@
           <a:p>
             <a:r>
               <a:rPr lang="en-US" dirty="0"/>
-              <a:t/>
+              <a:t>Winogrand's press scrum: cameras photographing an event staged for cameras. Boorstin's definition made visible; the students' own media events (launches, drops, teasers) follow the same grammar.</a:t>
             </a:r>
             <a:endParaRPr lang="en-US" dirty="0"/>
           </a:p>
@@ -1304,7 +1571,7 @@
           <a:p>
             <a:r>
               <a:rPr lang="en-US" dirty="0"/>
-              <a:t/>
+              <a:t>D2 also runs Beat the Examiner, lite: one paragraph from Cambridge's own specimen answers banded in pairs against the five criteria; the awarded level is revealed after. The unfed-criterion reread follows.</a:t>
             </a:r>
             <a:endParaRPr lang="en-US" dirty="0"/>
           </a:p>
@@ -1392,7 +1659,7 @@
           <a:p>
             <a:r>
               <a:rPr lang="en-US" dirty="0"/>
-              <a:t/>
+              <a:t>Four screenings, no notes on the first, notes crossed out after writing begins: read the page's own words aloud once. A4 reuses the frozen stem with a different sealed extract.</a:t>
             </a:r>
             <a:endParaRPr lang="en-US" dirty="0"/>
           </a:p>
@@ -2071,7 +2338,7 @@
                 <a:ea typeface="Arial" pitchFamily="34" charset="-122"/>
                 <a:cs typeface="Arial" pitchFamily="34" charset="-120"/>
               </a:rPr>
-              <a:t>ASSESSMENT · A4</a:t>
+              <a:t>THE VIEWING-NOTES FRAME</a:t>
             </a:r>
             <a:endParaRPr lang="en-US" sz="1100" dirty="0"/>
           </a:p>
@@ -2110,7 +2377,7 @@
                 <a:ea typeface="Arial" pitchFamily="34" charset="-122"/>
                 <a:cs typeface="Arial" pitchFamily="34" charset="-120"/>
               </a:rPr>
-              <a:t>THE FORECAST GRADE ANCHOR</a:t>
+              <a:t>CAPTURE, DO NOT COMPOSE</a:t>
             </a:r>
             <a:endParaRPr lang="en-US" sz="1100" dirty="0"/>
           </a:p>
@@ -2147,8 +2414,8 @@
         </p:nvSpPr>
         <p:spPr>
           <a:xfrm>
-            <a:off x="822960" y="1280160"/>
-            <a:ext cx="10543032" cy="914400"/>
+            <a:off x="822960" y="932688"/>
+            <a:ext cx="10543032" cy="640080"/>
           </a:xfrm>
           <a:prstGeom prst="rect">
             <a:avLst/>
@@ -2164,7 +2431,7 @@
               <a:buNone/>
             </a:pPr>
             <a:r>
-              <a:rPr lang="en-US" sz="3400" dirty="0">
+              <a:rPr lang="en-US" sz="3200" dirty="0">
                 <a:solidFill>
                   <a:srgbClr val="24313F"/>
                 </a:solidFill>
@@ -2172,9 +2439,9 @@
                 <a:ea typeface="Georgia" pitchFamily="34" charset="-122"/>
                 <a:cs typeface="Georgia" pitchFamily="34" charset="-120"/>
               </a:rPr>
-              <a:t>A4 sits Wednesday 16 December</a:t>
-            </a:r>
-            <a:endParaRPr lang="en-US" sz="3400" dirty="0"/>
+              <a:t>The four-family grid</a:t>
+            </a:r>
+            <a:endParaRPr lang="en-US" sz="3200" dirty="0"/>
           </a:p>
         </p:txBody>
       </p:sp>
@@ -2186,16 +2453,18 @@
         </p:nvSpPr>
         <p:spPr>
           <a:xfrm>
-            <a:off x="822960" y="2468880"/>
-            <a:ext cx="914400" cy="0"/>
-          </a:xfrm>
-          <a:prstGeom prst="line">
-            <a:avLst/>
-          </a:prstGeom>
-          <a:noFill/>
-          <a:ln w="31750">
+            <a:off x="822960" y="1828800"/>
+            <a:ext cx="5088636" cy="1783080"/>
+          </a:xfrm>
+          <a:prstGeom prst="rect">
+            <a:avLst/>
+          </a:prstGeom>
+          <a:solidFill>
+            <a:srgbClr val="FAF8F1"/>
+          </a:solidFill>
+          <a:ln w="12700">
             <a:solidFill>
-              <a:srgbClr val="8C3A38"/>
+              <a:srgbClr val="8AA394"/>
             </a:solidFill>
             <a:prstDash val="solid"/>
           </a:ln>
@@ -2209,37 +2478,34 @@
         </p:nvSpPr>
         <p:spPr>
           <a:xfrm>
-            <a:off x="822960" y="2697480"/>
-            <a:ext cx="9875520" cy="2103120"/>
-          </a:xfrm>
-          <a:prstGeom prst="rect">
-            <a:avLst/>
-          </a:prstGeom>
-          <a:noFill/>
-          <a:ln/>
-        </p:spPr>
-        <p:txBody>
-          <a:bodyPr wrap="square" lIns="0" tIns="0" rIns="0" bIns="0" rtlCol="0" anchor="t"/>
+            <a:off x="1097280" y="2011680"/>
+            <a:ext cx="4539996" cy="457200"/>
+          </a:xfrm>
+          <a:prstGeom prst="rect">
+            <a:avLst/>
+          </a:prstGeom>
+          <a:noFill/>
+          <a:ln/>
+        </p:spPr>
+        <p:txBody>
+          <a:bodyPr wrap="square" lIns="0" tIns="0" rIns="0" bIns="0" rtlCol="0" anchor="ctr"/>
           <a:lstStyle/>
           <a:p>
             <a:pPr indent="0" marL="0">
-              <a:lnSpc>
-                <a:spcPts val="2700"/>
-              </a:lnSpc>
-              <a:buNone/>
-            </a:pPr>
-            <a:r>
-              <a:rPr lang="en-US" sz="1900" dirty="0">
-                <a:solidFill>
-                  <a:srgbClr val="24313F"/>
+              <a:buNone/>
+            </a:pPr>
+            <a:r>
+              <a:rPr lang="en-US" sz="2200" dirty="0">
+                <a:solidFill>
+                  <a:srgbClr val="4A6B5D"/>
                 </a:solidFill>
                 <a:latin typeface="Georgia" pitchFamily="34" charset="0"/>
                 <a:ea typeface="Georgia" pitchFamily="34" charset="-122"/>
                 <a:cs typeface="Georgia" pitchFamily="34" charset="-120"/>
               </a:rPr>
-              <a:t>Component 2 Section A in authentic format: an unseen TV-drama extract, thirty minutes of viewing and structured notes, then forty-five of writing. Marked to the CIE band descriptors, per-criterion, with AO splits recorded per script for the L14 review. No debrief on the day, by design: the format is the lesson, and it ends the way the real one does.</a:t>
-            </a:r>
-            <a:endParaRPr lang="en-US" sz="1900" dirty="0"/>
+              <a:t>Technical</a:t>
+            </a:r>
+            <a:endParaRPr lang="en-US" sz="2200" dirty="0"/>
           </a:p>
         </p:txBody>
       </p:sp>
@@ -2251,8 +2517,8 @@
         </p:nvSpPr>
         <p:spPr>
           <a:xfrm>
-            <a:off x="822960" y="6382512"/>
-            <a:ext cx="10543032" cy="0"/>
+            <a:off x="1097280" y="2542032"/>
+            <a:ext cx="4539996" cy="0"/>
           </a:xfrm>
           <a:prstGeom prst="line">
             <a:avLst/>
@@ -2268,14 +2534,62 @@
       </p:sp>
       <p:sp>
         <p:nvSpPr>
-          <p:cNvPr id="9" name="Text 7"/>
-          <p:cNvSpPr/>
-          <p:nvPr/>
-        </p:nvSpPr>
-        <p:spPr>
-          <a:xfrm>
-            <a:off x="822960" y="6419088"/>
-            <a:ext cx="7315200" cy="274320"/>
+          <p:cNvPr id="9" name="Shape 7"/>
+          <p:cNvSpPr/>
+          <p:nvPr/>
+        </p:nvSpPr>
+        <p:spPr>
+          <a:xfrm>
+            <a:off x="1097280" y="2999232"/>
+            <a:ext cx="4539996" cy="0"/>
+          </a:xfrm>
+          <a:prstGeom prst="line">
+            <a:avLst/>
+          </a:prstGeom>
+          <a:noFill/>
+          <a:ln w="9525">
+            <a:solidFill>
+              <a:srgbClr val="D9D4C4"/>
+            </a:solidFill>
+            <a:prstDash val="solid"/>
+          </a:ln>
+        </p:spPr>
+      </p:sp>
+      <p:sp>
+        <p:nvSpPr>
+          <p:cNvPr id="10" name="Shape 8"/>
+          <p:cNvSpPr/>
+          <p:nvPr/>
+        </p:nvSpPr>
+        <p:spPr>
+          <a:xfrm>
+            <a:off x="6277356" y="1828800"/>
+            <a:ext cx="5088636" cy="1783080"/>
+          </a:xfrm>
+          <a:prstGeom prst="rect">
+            <a:avLst/>
+          </a:prstGeom>
+          <a:solidFill>
+            <a:srgbClr val="FAF8F1"/>
+          </a:solidFill>
+          <a:ln w="12700">
+            <a:solidFill>
+              <a:srgbClr val="8AA394"/>
+            </a:solidFill>
+            <a:prstDash val="solid"/>
+          </a:ln>
+        </p:spPr>
+      </p:sp>
+      <p:sp>
+        <p:nvSpPr>
+          <p:cNvPr id="11" name="Text 9"/>
+          <p:cNvSpPr/>
+          <p:nvPr/>
+        </p:nvSpPr>
+        <p:spPr>
+          <a:xfrm>
+            <a:off x="6551676" y="2011680"/>
+            <a:ext cx="4539996" cy="457200"/>
           </a:xfrm>
           <a:prstGeom prst="rect">
             <a:avLst/>
@@ -2291,7 +2605,312 @@
               <a:buNone/>
             </a:pPr>
             <a:r>
-              <a:rPr lang="en-US" sz="900" spc="150" kern="0" dirty="0">
+              <a:rPr lang="en-US" sz="2200" dirty="0">
+                <a:solidFill>
+                  <a:srgbClr val="4A6B5D"/>
+                </a:solidFill>
+                <a:latin typeface="Georgia" pitchFamily="34" charset="0"/>
+                <a:ea typeface="Georgia" pitchFamily="34" charset="-122"/>
+                <a:cs typeface="Georgia" pitchFamily="34" charset="-120"/>
+              </a:rPr>
+              <a:t>Symbolic</a:t>
+            </a:r>
+            <a:endParaRPr lang="en-US" sz="2200" dirty="0"/>
+          </a:p>
+        </p:txBody>
+      </p:sp>
+      <p:sp>
+        <p:nvSpPr>
+          <p:cNvPr id="12" name="Shape 10"/>
+          <p:cNvSpPr/>
+          <p:nvPr/>
+        </p:nvSpPr>
+        <p:spPr>
+          <a:xfrm>
+            <a:off x="6551676" y="2542032"/>
+            <a:ext cx="4539996" cy="0"/>
+          </a:xfrm>
+          <a:prstGeom prst="line">
+            <a:avLst/>
+          </a:prstGeom>
+          <a:noFill/>
+          <a:ln w="9525">
+            <a:solidFill>
+              <a:srgbClr val="D9D4C4"/>
+            </a:solidFill>
+            <a:prstDash val="solid"/>
+          </a:ln>
+        </p:spPr>
+      </p:sp>
+      <p:sp>
+        <p:nvSpPr>
+          <p:cNvPr id="13" name="Shape 11"/>
+          <p:cNvSpPr/>
+          <p:nvPr/>
+        </p:nvSpPr>
+        <p:spPr>
+          <a:xfrm>
+            <a:off x="6551676" y="2999232"/>
+            <a:ext cx="4539996" cy="0"/>
+          </a:xfrm>
+          <a:prstGeom prst="line">
+            <a:avLst/>
+          </a:prstGeom>
+          <a:noFill/>
+          <a:ln w="9525">
+            <a:solidFill>
+              <a:srgbClr val="D9D4C4"/>
+            </a:solidFill>
+            <a:prstDash val="solid"/>
+          </a:ln>
+        </p:spPr>
+      </p:sp>
+      <p:sp>
+        <p:nvSpPr>
+          <p:cNvPr id="14" name="Shape 12"/>
+          <p:cNvSpPr/>
+          <p:nvPr/>
+        </p:nvSpPr>
+        <p:spPr>
+          <a:xfrm>
+            <a:off x="822960" y="3886200"/>
+            <a:ext cx="5088636" cy="1783080"/>
+          </a:xfrm>
+          <a:prstGeom prst="rect">
+            <a:avLst/>
+          </a:prstGeom>
+          <a:solidFill>
+            <a:srgbClr val="FAF8F1"/>
+          </a:solidFill>
+          <a:ln w="12700">
+            <a:solidFill>
+              <a:srgbClr val="8AA394"/>
+            </a:solidFill>
+            <a:prstDash val="solid"/>
+          </a:ln>
+        </p:spPr>
+      </p:sp>
+      <p:sp>
+        <p:nvSpPr>
+          <p:cNvPr id="15" name="Text 13"/>
+          <p:cNvSpPr/>
+          <p:nvPr/>
+        </p:nvSpPr>
+        <p:spPr>
+          <a:xfrm>
+            <a:off x="1097280" y="4069080"/>
+            <a:ext cx="4539996" cy="457200"/>
+          </a:xfrm>
+          <a:prstGeom prst="rect">
+            <a:avLst/>
+          </a:prstGeom>
+          <a:noFill/>
+          <a:ln/>
+        </p:spPr>
+        <p:txBody>
+          <a:bodyPr wrap="square" lIns="0" tIns="0" rIns="0" bIns="0" rtlCol="0" anchor="ctr"/>
+          <a:lstStyle/>
+          <a:p>
+            <a:pPr indent="0" marL="0">
+              <a:buNone/>
+            </a:pPr>
+            <a:r>
+              <a:rPr lang="en-US" sz="2200" dirty="0">
+                <a:solidFill>
+                  <a:srgbClr val="4A6B5D"/>
+                </a:solidFill>
+                <a:latin typeface="Georgia" pitchFamily="34" charset="0"/>
+                <a:ea typeface="Georgia" pitchFamily="34" charset="-122"/>
+                <a:cs typeface="Georgia" pitchFamily="34" charset="-120"/>
+              </a:rPr>
+              <a:t>Written</a:t>
+            </a:r>
+            <a:endParaRPr lang="en-US" sz="2200" dirty="0"/>
+          </a:p>
+        </p:txBody>
+      </p:sp>
+      <p:sp>
+        <p:nvSpPr>
+          <p:cNvPr id="16" name="Shape 14"/>
+          <p:cNvSpPr/>
+          <p:nvPr/>
+        </p:nvSpPr>
+        <p:spPr>
+          <a:xfrm>
+            <a:off x="1097280" y="4599432"/>
+            <a:ext cx="4539996" cy="0"/>
+          </a:xfrm>
+          <a:prstGeom prst="line">
+            <a:avLst/>
+          </a:prstGeom>
+          <a:noFill/>
+          <a:ln w="9525">
+            <a:solidFill>
+              <a:srgbClr val="D9D4C4"/>
+            </a:solidFill>
+            <a:prstDash val="solid"/>
+          </a:ln>
+        </p:spPr>
+      </p:sp>
+      <p:sp>
+        <p:nvSpPr>
+          <p:cNvPr id="17" name="Shape 15"/>
+          <p:cNvSpPr/>
+          <p:nvPr/>
+        </p:nvSpPr>
+        <p:spPr>
+          <a:xfrm>
+            <a:off x="1097280" y="5056632"/>
+            <a:ext cx="4539996" cy="0"/>
+          </a:xfrm>
+          <a:prstGeom prst="line">
+            <a:avLst/>
+          </a:prstGeom>
+          <a:noFill/>
+          <a:ln w="9525">
+            <a:solidFill>
+              <a:srgbClr val="D9D4C4"/>
+            </a:solidFill>
+            <a:prstDash val="solid"/>
+          </a:ln>
+        </p:spPr>
+      </p:sp>
+      <p:sp>
+        <p:nvSpPr>
+          <p:cNvPr id="18" name="Shape 16"/>
+          <p:cNvSpPr/>
+          <p:nvPr/>
+        </p:nvSpPr>
+        <p:spPr>
+          <a:xfrm>
+            <a:off x="6277356" y="3886200"/>
+            <a:ext cx="5088636" cy="1783080"/>
+          </a:xfrm>
+          <a:prstGeom prst="rect">
+            <a:avLst/>
+          </a:prstGeom>
+          <a:solidFill>
+            <a:srgbClr val="FAF8F1"/>
+          </a:solidFill>
+          <a:ln w="12700">
+            <a:solidFill>
+              <a:srgbClr val="8AA394"/>
+            </a:solidFill>
+            <a:prstDash val="solid"/>
+          </a:ln>
+        </p:spPr>
+      </p:sp>
+      <p:sp>
+        <p:nvSpPr>
+          <p:cNvPr id="19" name="Text 17"/>
+          <p:cNvSpPr/>
+          <p:nvPr/>
+        </p:nvSpPr>
+        <p:spPr>
+          <a:xfrm>
+            <a:off x="6551676" y="4069080"/>
+            <a:ext cx="4539996" cy="457200"/>
+          </a:xfrm>
+          <a:prstGeom prst="rect">
+            <a:avLst/>
+          </a:prstGeom>
+          <a:noFill/>
+          <a:ln/>
+        </p:spPr>
+        <p:txBody>
+          <a:bodyPr wrap="square" lIns="0" tIns="0" rIns="0" bIns="0" rtlCol="0" anchor="ctr"/>
+          <a:lstStyle/>
+          <a:p>
+            <a:pPr indent="0" marL="0">
+              <a:buNone/>
+            </a:pPr>
+            <a:r>
+              <a:rPr lang="en-US" sz="2200" dirty="0">
+                <a:solidFill>
+                  <a:srgbClr val="4A6B5D"/>
+                </a:solidFill>
+                <a:latin typeface="Georgia" pitchFamily="34" charset="0"/>
+                <a:ea typeface="Georgia" pitchFamily="34" charset="-122"/>
+                <a:cs typeface="Georgia" pitchFamily="34" charset="-120"/>
+              </a:rPr>
+              <a:t>Audio</a:t>
+            </a:r>
+            <a:endParaRPr lang="en-US" sz="2200" dirty="0"/>
+          </a:p>
+        </p:txBody>
+      </p:sp>
+      <p:sp>
+        <p:nvSpPr>
+          <p:cNvPr id="20" name="Shape 18"/>
+          <p:cNvSpPr/>
+          <p:nvPr/>
+        </p:nvSpPr>
+        <p:spPr>
+          <a:xfrm>
+            <a:off x="6551676" y="4599432"/>
+            <a:ext cx="4539996" cy="0"/>
+          </a:xfrm>
+          <a:prstGeom prst="line">
+            <a:avLst/>
+          </a:prstGeom>
+          <a:noFill/>
+          <a:ln w="9525">
+            <a:solidFill>
+              <a:srgbClr val="D9D4C4"/>
+            </a:solidFill>
+            <a:prstDash val="solid"/>
+          </a:ln>
+        </p:spPr>
+      </p:sp>
+      <p:sp>
+        <p:nvSpPr>
+          <p:cNvPr id="21" name="Shape 19"/>
+          <p:cNvSpPr/>
+          <p:nvPr/>
+        </p:nvSpPr>
+        <p:spPr>
+          <a:xfrm>
+            <a:off x="6551676" y="5056632"/>
+            <a:ext cx="4539996" cy="0"/>
+          </a:xfrm>
+          <a:prstGeom prst="line">
+            <a:avLst/>
+          </a:prstGeom>
+          <a:noFill/>
+          <a:ln w="9525">
+            <a:solidFill>
+              <a:srgbClr val="D9D4C4"/>
+            </a:solidFill>
+            <a:prstDash val="solid"/>
+          </a:ln>
+        </p:spPr>
+      </p:sp>
+      <p:sp>
+        <p:nvSpPr>
+          <p:cNvPr id="22" name="Text 20"/>
+          <p:cNvSpPr/>
+          <p:nvPr/>
+        </p:nvSpPr>
+        <p:spPr>
+          <a:xfrm>
+            <a:off x="822960" y="5852160"/>
+            <a:ext cx="10543032" cy="365760"/>
+          </a:xfrm>
+          <a:prstGeom prst="rect">
+            <a:avLst/>
+          </a:prstGeom>
+          <a:noFill/>
+          <a:ln/>
+        </p:spPr>
+        <p:txBody>
+          <a:bodyPr wrap="square" lIns="0" tIns="0" rIns="0" bIns="0" rtlCol="0" anchor="ctr"/>
+          <a:lstStyle/>
+          <a:p>
+            <a:pPr indent="0" marL="0">
+              <a:buNone/>
+            </a:pPr>
+            <a:r>
+              <a:rPr lang="en-US" sz="1200" i="1" dirty="0">
                 <a:solidFill>
                   <a:srgbClr val="7A7F72"/>
                 </a:solidFill>
@@ -2299,6 +2918,68 @@
                 <a:ea typeface="Arial" pitchFamily="34" charset="-122"/>
                 <a:cs typeface="Arial" pitchFamily="34" charset="-120"/>
               </a:rPr>
+              <a:t>Two 90-second drills first: notes into the grid, pens down. The grid is the discipline the viewing window needs.</a:t>
+            </a:r>
+            <a:endParaRPr lang="en-US" sz="1200" dirty="0"/>
+          </a:p>
+        </p:txBody>
+      </p:sp>
+      <p:sp>
+        <p:nvSpPr>
+          <p:cNvPr id="23" name="Shape 21"/>
+          <p:cNvSpPr/>
+          <p:nvPr/>
+        </p:nvSpPr>
+        <p:spPr>
+          <a:xfrm>
+            <a:off x="822960" y="6382512"/>
+            <a:ext cx="10543032" cy="0"/>
+          </a:xfrm>
+          <a:prstGeom prst="line">
+            <a:avLst/>
+          </a:prstGeom>
+          <a:noFill/>
+          <a:ln w="9525">
+            <a:solidFill>
+              <a:srgbClr val="D9D4C4"/>
+            </a:solidFill>
+            <a:prstDash val="solid"/>
+          </a:ln>
+        </p:spPr>
+      </p:sp>
+      <p:sp>
+        <p:nvSpPr>
+          <p:cNvPr id="24" name="Text 22"/>
+          <p:cNvSpPr/>
+          <p:nvPr/>
+        </p:nvSpPr>
+        <p:spPr>
+          <a:xfrm>
+            <a:off x="822960" y="6419088"/>
+            <a:ext cx="7315200" cy="274320"/>
+          </a:xfrm>
+          <a:prstGeom prst="rect">
+            <a:avLst/>
+          </a:prstGeom>
+          <a:noFill/>
+          <a:ln/>
+        </p:spPr>
+        <p:txBody>
+          <a:bodyPr wrap="square" lIns="0" tIns="0" rIns="0" bIns="0" rtlCol="0" anchor="ctr"/>
+          <a:lstStyle/>
+          <a:p>
+            <a:pPr indent="0" marL="0">
+              <a:buNone/>
+            </a:pPr>
+            <a:r>
+              <a:rPr lang="en-US" sz="900" spc="150" kern="0" dirty="0">
+                <a:solidFill>
+                  <a:srgbClr val="7A7F72"/>
+                </a:solidFill>
+                <a:latin typeface="Arial" pitchFamily="34" charset="0"/>
+                <a:ea typeface="Arial" pitchFamily="34" charset="-122"/>
+                <a:cs typeface="Arial" pitchFamily="34" charset="-120"/>
+              </a:rPr>
               <a:t>MEDIA STUDIES 9607 · SEMESTER I</a:t>
             </a:r>
             <a:endParaRPr lang="en-US" sz="900" dirty="0"/>
@@ -2307,7 +2988,7 @@
       </p:sp>
       <p:sp>
         <p:nvSpPr>
-          <p:cNvPr id="10" name="Text 8"/>
+          <p:cNvPr id="25" name="Text 23"/>
           <p:cNvSpPr/>
           <p:nvPr/>
         </p:nvSpPr>
@@ -2355,6 +3036,1349 @@
 <file path=ppt/slides/slide11.xml><?xml version="1.0" encoding="utf-8"?>
 <p:sld xmlns:a="http://schemas.openxmlformats.org/drawingml/2006/main" xmlns:r="http://schemas.openxmlformats.org/officeDocument/2006/relationships" xmlns:p="http://schemas.openxmlformats.org/presentationml/2006/main">
   <p:cSld name="Slide 11">
+    <p:bg>
+      <p:bgPr>
+        <a:solidFill>
+          <a:srgbClr val="FAF8F1"/>
+        </a:solidFill>
+      </p:bgPr>
+    </p:bg>
+    <p:spTree>
+      <p:nvGrpSpPr>
+        <p:cNvPr id="1" name=""/>
+        <p:cNvGrpSpPr/>
+        <p:nvPr/>
+      </p:nvGrpSpPr>
+      <p:grpSpPr>
+        <a:xfrm>
+          <a:off x="0" y="0"/>
+          <a:ext cx="0" cy="0"/>
+          <a:chOff x="0" y="0"/>
+          <a:chExt cx="0" cy="0"/>
+        </a:xfrm>
+      </p:grpSpPr>
+      <p:sp>
+        <p:nvSpPr>
+          <p:cNvPr id="2" name="Text 0"/>
+          <p:cNvSpPr/>
+          <p:nvPr/>
+        </p:nvSpPr>
+        <p:spPr>
+          <a:xfrm>
+            <a:off x="822960" y="457200"/>
+            <a:ext cx="6400800" cy="274320"/>
+          </a:xfrm>
+          <a:prstGeom prst="rect">
+            <a:avLst/>
+          </a:prstGeom>
+          <a:noFill/>
+          <a:ln/>
+        </p:spPr>
+        <p:txBody>
+          <a:bodyPr wrap="square" lIns="0" tIns="0" rIns="0" bIns="0" rtlCol="0" anchor="ctr"/>
+          <a:lstStyle/>
+          <a:p>
+            <a:pPr algn="l" indent="0" marL="0">
+              <a:buNone/>
+            </a:pPr>
+            <a:r>
+              <a:rPr lang="en-US" sz="1100" b="1" spc="250" kern="0" dirty="0">
+                <a:solidFill>
+                  <a:srgbClr val="4A6B5D"/>
+                </a:solidFill>
+                <a:latin typeface="Arial" pitchFamily="34" charset="0"/>
+                <a:ea typeface="Arial" pitchFamily="34" charset="-122"/>
+                <a:cs typeface="Arial" pitchFamily="34" charset="-120"/>
+              </a:rPr>
+              <a:t>BEAT THE EXAMINER</a:t>
+            </a:r>
+            <a:endParaRPr lang="en-US" sz="1100" dirty="0"/>
+          </a:p>
+        </p:txBody>
+      </p:sp>
+      <p:sp>
+        <p:nvSpPr>
+          <p:cNvPr id="3" name="Text 1"/>
+          <p:cNvSpPr/>
+          <p:nvPr/>
+        </p:nvSpPr>
+        <p:spPr>
+          <a:xfrm>
+            <a:off x="6793992" y="457200"/>
+            <a:ext cx="4572000" cy="274320"/>
+          </a:xfrm>
+          <a:prstGeom prst="rect">
+            <a:avLst/>
+          </a:prstGeom>
+          <a:noFill/>
+          <a:ln/>
+        </p:spPr>
+        <p:txBody>
+          <a:bodyPr wrap="square" lIns="0" tIns="0" rIns="0" bIns="0" rtlCol="0" anchor="ctr"/>
+          <a:lstStyle/>
+          <a:p>
+            <a:pPr algn="r" indent="0" marL="0">
+              <a:buNone/>
+            </a:pPr>
+            <a:r>
+              <a:rPr lang="en-US" sz="1100" b="1" spc="250" kern="0" dirty="0">
+                <a:solidFill>
+                  <a:srgbClr val="7A7F72"/>
+                </a:solidFill>
+                <a:latin typeface="Arial" pitchFamily="34" charset="0"/>
+                <a:ea typeface="Arial" pitchFamily="34" charset="-122"/>
+                <a:cs typeface="Arial" pitchFamily="34" charset="-120"/>
+              </a:rPr>
+              <a:t>THE CLASSIC MISTAKE, IN THE EXAMINER'S OWN HAND</a:t>
+            </a:r>
+            <a:endParaRPr lang="en-US" sz="1100" dirty="0"/>
+          </a:p>
+        </p:txBody>
+      </p:sp>
+      <p:sp>
+        <p:nvSpPr>
+          <p:cNvPr id="4" name="Shape 2"/>
+          <p:cNvSpPr/>
+          <p:nvPr/>
+        </p:nvSpPr>
+        <p:spPr>
+          <a:xfrm>
+            <a:off x="822960" y="786384"/>
+            <a:ext cx="10543032" cy="0"/>
+          </a:xfrm>
+          <a:prstGeom prst="line">
+            <a:avLst/>
+          </a:prstGeom>
+          <a:noFill/>
+          <a:ln w="9525">
+            <a:solidFill>
+              <a:srgbClr val="D9D4C4"/>
+            </a:solidFill>
+            <a:prstDash val="solid"/>
+          </a:ln>
+        </p:spPr>
+      </p:sp>
+      <p:sp>
+        <p:nvSpPr>
+          <p:cNvPr id="5" name="Shape 3"/>
+          <p:cNvSpPr/>
+          <p:nvPr/>
+        </p:nvSpPr>
+        <p:spPr>
+          <a:xfrm>
+            <a:off x="822960" y="1097280"/>
+            <a:ext cx="5394960" cy="4663440"/>
+          </a:xfrm>
+          <a:prstGeom prst="rect">
+            <a:avLst/>
+          </a:prstGeom>
+          <a:solidFill>
+            <a:srgbClr val="FAF8F1"/>
+          </a:solidFill>
+          <a:ln w="9525">
+            <a:solidFill>
+              <a:srgbClr val="D9D4C4"/>
+            </a:solidFill>
+            <a:prstDash val="solid"/>
+          </a:ln>
+        </p:spPr>
+      </p:sp>
+      <p:pic>
+        <p:nvPicPr>
+          <p:cNvPr id="6" name="Image 0" descr="/Users/dogan/Documents/Vaults/Courses/wiki/classes/media-studies/decks/_build/img/ecr-narration.jpg">    </p:cNvPr>
+          <p:cNvPicPr>
+            <a:picLocks noChangeAspect="1"/>
+          </p:cNvPicPr>
+          <p:nvPr/>
+        </p:nvPicPr>
+        <p:blipFill>
+          <a:blip r:embed="rId1"/>
+          <a:stretch>
+            <a:fillRect/>
+          </a:stretch>
+        </p:blipFill>
+        <p:spPr>
+          <a:xfrm>
+            <a:off x="1962113" y="1225296"/>
+            <a:ext cx="3116654" cy="4407408"/>
+          </a:xfrm>
+          <a:prstGeom prst="rect">
+            <a:avLst/>
+          </a:prstGeom>
+        </p:spPr>
+      </p:pic>
+      <p:sp>
+        <p:nvSpPr>
+          <p:cNvPr id="7" name="Text 4"/>
+          <p:cNvSpPr/>
+          <p:nvPr/>
+        </p:nvSpPr>
+        <p:spPr>
+          <a:xfrm>
+            <a:off x="822960" y="5806440"/>
+            <a:ext cx="5394960" cy="274320"/>
+          </a:xfrm>
+          <a:prstGeom prst="rect">
+            <a:avLst/>
+          </a:prstGeom>
+          <a:noFill/>
+          <a:ln/>
+        </p:spPr>
+        <p:txBody>
+          <a:bodyPr wrap="square" lIns="0" tIns="0" rIns="0" bIns="0" rtlCol="0" anchor="ctr"/>
+          <a:lstStyle/>
+          <a:p>
+            <a:pPr algn="ctr" indent="0" marL="0">
+              <a:buNone/>
+            </a:pPr>
+            <a:r>
+              <a:rPr lang="en-US" sz="1000" dirty="0">
+                <a:solidFill>
+                  <a:srgbClr val="7A7F72"/>
+                </a:solidFill>
+                <a:latin typeface="Arial" pitchFamily="34" charset="0"/>
+                <a:ea typeface="Arial" pitchFamily="34" charset="-122"/>
+                <a:cs typeface="Arial" pitchFamily="34" charset="-120"/>
+              </a:rPr>
+              <a:t>Cambridge Example Candidate Responses, Paper 2: the low script</a:t>
+            </a:r>
+            <a:endParaRPr lang="en-US" sz="1000" dirty="0"/>
+          </a:p>
+        </p:txBody>
+      </p:sp>
+      <p:sp>
+        <p:nvSpPr>
+          <p:cNvPr id="8" name="Text 5"/>
+          <p:cNvSpPr/>
+          <p:nvPr/>
+        </p:nvSpPr>
+        <p:spPr>
+          <a:xfrm>
+            <a:off x="6537960" y="1325880"/>
+            <a:ext cx="4846320" cy="548640"/>
+          </a:xfrm>
+          <a:prstGeom prst="rect">
+            <a:avLst/>
+          </a:prstGeom>
+          <a:noFill/>
+          <a:ln/>
+        </p:spPr>
+        <p:txBody>
+          <a:bodyPr wrap="square" lIns="0" tIns="0" rIns="0" bIns="0" rtlCol="0" anchor="ctr"/>
+          <a:lstStyle/>
+          <a:p>
+            <a:pPr indent="0" marL="0">
+              <a:buNone/>
+            </a:pPr>
+            <a:r>
+              <a:rPr lang="en-US" sz="2800" dirty="0">
+                <a:solidFill>
+                  <a:srgbClr val="8C3A38"/>
+                </a:solidFill>
+                <a:latin typeface="Georgia" pitchFamily="34" charset="0"/>
+                <a:ea typeface="Georgia" pitchFamily="34" charset="-122"/>
+                <a:cs typeface="Georgia" pitchFamily="34" charset="-120"/>
+              </a:rPr>
+              <a:t>Five out of twenty-five</a:t>
+            </a:r>
+            <a:endParaRPr lang="en-US" sz="2800" dirty="0"/>
+          </a:p>
+        </p:txBody>
+      </p:sp>
+      <p:sp>
+        <p:nvSpPr>
+          <p:cNvPr id="9" name="Shape 6"/>
+          <p:cNvSpPr/>
+          <p:nvPr/>
+        </p:nvSpPr>
+        <p:spPr>
+          <a:xfrm>
+            <a:off x="6537960" y="1965960"/>
+            <a:ext cx="4800600" cy="0"/>
+          </a:xfrm>
+          <a:prstGeom prst="line">
+            <a:avLst/>
+          </a:prstGeom>
+          <a:noFill/>
+          <a:ln w="9525">
+            <a:solidFill>
+              <a:srgbClr val="D9D4C4"/>
+            </a:solidFill>
+            <a:prstDash val="solid"/>
+          </a:ln>
+        </p:spPr>
+      </p:sp>
+      <p:sp>
+        <p:nvSpPr>
+          <p:cNvPr id="10" name="Text 7"/>
+          <p:cNvSpPr/>
+          <p:nvPr/>
+        </p:nvSpPr>
+        <p:spPr>
+          <a:xfrm>
+            <a:off x="6537960" y="2148840"/>
+            <a:ext cx="4846320" cy="3566160"/>
+          </a:xfrm>
+          <a:prstGeom prst="rect">
+            <a:avLst/>
+          </a:prstGeom>
+          <a:noFill/>
+          <a:ln/>
+        </p:spPr>
+        <p:txBody>
+          <a:bodyPr wrap="square" lIns="0" tIns="0" rIns="0" bIns="0" rtlCol="0" anchor="t"/>
+          <a:lstStyle/>
+          <a:p>
+            <a:pPr indent="0" marL="0">
+              <a:lnSpc>
+                <a:spcPts val="2100"/>
+              </a:lnSpc>
+              <a:buNone/>
+            </a:pPr>
+            <a:r>
+              <a:rPr lang="en-US" sz="1500" dirty="0">
+                <a:solidFill>
+                  <a:srgbClr val="24313F"/>
+                </a:solidFill>
+                <a:latin typeface="Georgia" pitchFamily="34" charset="0"/>
+                <a:ea typeface="Georgia" pitchFamily="34" charset="-122"/>
+                <a:cs typeface="Georgia" pitchFamily="34" charset="-120"/>
+              </a:rPr>
+              <a:t>The examiner's margin says it plainly: the remainder of the answer is just narration. A transcript of what happened on screen, with no technique named and no meaning claimed, scores a five. The candidate watched carefully and wrote fluently, and it did not matter.</a:t>
+            </a:r>
+            <a:endParaRPr lang="en-US" sz="1500" dirty="0"/>
+          </a:p>
+          <a:p>
+            <a:pPr indent="0" marL="0">
+              <a:lnSpc>
+                <a:spcPts val="2100"/>
+              </a:lnSpc>
+              <a:buNone/>
+            </a:pPr>
+            <a:endParaRPr lang="en-US" sz="1500" dirty="0"/>
+          </a:p>
+          <a:p>
+            <a:pPr indent="0" marL="0">
+              <a:lnSpc>
+                <a:spcPts val="2100"/>
+              </a:lnSpc>
+              <a:buNone/>
+            </a:pPr>
+            <a:r>
+              <a:rPr lang="en-US" sz="1500" dirty="0">
+                <a:solidFill>
+                  <a:srgbClr val="24313F"/>
+                </a:solidFill>
+                <a:latin typeface="Georgia" pitchFamily="34" charset="0"/>
+                <a:ea typeface="Georgia" pitchFamily="34" charset="-122"/>
+                <a:cs typeface="Georgia" pitchFamily="34" charset="-120"/>
+              </a:rPr>
+              <a:t>Band a paragraph of it in pairs against the five criteria; the awarded level is revealed after. Then reread your CS12 for the same defect.</a:t>
+            </a:r>
+            <a:endParaRPr lang="en-US" sz="1500" dirty="0"/>
+          </a:p>
+        </p:txBody>
+      </p:sp>
+      <p:sp>
+        <p:nvSpPr>
+          <p:cNvPr id="11" name="Shape 8"/>
+          <p:cNvSpPr/>
+          <p:nvPr/>
+        </p:nvSpPr>
+        <p:spPr>
+          <a:xfrm>
+            <a:off x="822960" y="6382512"/>
+            <a:ext cx="10543032" cy="0"/>
+          </a:xfrm>
+          <a:prstGeom prst="line">
+            <a:avLst/>
+          </a:prstGeom>
+          <a:noFill/>
+          <a:ln w="9525">
+            <a:solidFill>
+              <a:srgbClr val="D9D4C4"/>
+            </a:solidFill>
+            <a:prstDash val="solid"/>
+          </a:ln>
+        </p:spPr>
+      </p:sp>
+      <p:sp>
+        <p:nvSpPr>
+          <p:cNvPr id="12" name="Text 9"/>
+          <p:cNvSpPr/>
+          <p:nvPr/>
+        </p:nvSpPr>
+        <p:spPr>
+          <a:xfrm>
+            <a:off x="822960" y="6419088"/>
+            <a:ext cx="7315200" cy="274320"/>
+          </a:xfrm>
+          <a:prstGeom prst="rect">
+            <a:avLst/>
+          </a:prstGeom>
+          <a:noFill/>
+          <a:ln/>
+        </p:spPr>
+        <p:txBody>
+          <a:bodyPr wrap="square" lIns="0" tIns="0" rIns="0" bIns="0" rtlCol="0" anchor="ctr"/>
+          <a:lstStyle/>
+          <a:p>
+            <a:pPr indent="0" marL="0">
+              <a:buNone/>
+            </a:pPr>
+            <a:r>
+              <a:rPr lang="en-US" sz="900" spc="150" kern="0" dirty="0">
+                <a:solidFill>
+                  <a:srgbClr val="7A7F72"/>
+                </a:solidFill>
+                <a:latin typeface="Arial" pitchFamily="34" charset="0"/>
+                <a:ea typeface="Arial" pitchFamily="34" charset="-122"/>
+                <a:cs typeface="Arial" pitchFamily="34" charset="-120"/>
+              </a:rPr>
+              <a:t>MEDIA STUDIES 9607 · SEMESTER I</a:t>
+            </a:r>
+            <a:endParaRPr lang="en-US" sz="900" dirty="0"/>
+          </a:p>
+        </p:txBody>
+      </p:sp>
+      <p:sp>
+        <p:nvSpPr>
+          <p:cNvPr id="13" name="Text 10"/>
+          <p:cNvSpPr/>
+          <p:nvPr/>
+        </p:nvSpPr>
+        <p:spPr>
+          <a:xfrm>
+            <a:off x="10268712" y="6355080"/>
+            <a:ext cx="1097280" cy="365760"/>
+          </a:xfrm>
+          <a:prstGeom prst="rect">
+            <a:avLst/>
+          </a:prstGeom>
+          <a:noFill/>
+          <a:ln/>
+        </p:spPr>
+        <p:txBody>
+          <a:bodyPr wrap="square" lIns="0" tIns="0" rIns="0" bIns="0" rtlCol="0" anchor="ctr"/>
+          <a:lstStyle/>
+          <a:p>
+            <a:pPr algn="r" indent="0" marL="0">
+              <a:buNone/>
+            </a:pPr>
+            <a:r>
+              <a:rPr lang="en-US" sz="1600" dirty="0">
+                <a:solidFill>
+                  <a:srgbClr val="A3C1AD"/>
+                </a:solidFill>
+                <a:latin typeface="Georgia" pitchFamily="34" charset="0"/>
+                <a:ea typeface="Georgia" pitchFamily="34" charset="-122"/>
+                <a:cs typeface="Georgia" pitchFamily="34" charset="-120"/>
+              </a:rPr>
+              <a:t>06</a:t>
+            </a:r>
+            <a:endParaRPr lang="en-US" sz="1600" dirty="0"/>
+          </a:p>
+        </p:txBody>
+      </p:sp>
+    </p:spTree>
+  </p:cSld>
+  <p:clrMapOvr>
+    <a:masterClrMapping/>
+  </p:clrMapOvr>
+</p:sld>
+</file>
+
+<file path=ppt/slides/slide12.xml><?xml version="1.0" encoding="utf-8"?>
+<p:sld xmlns:a="http://schemas.openxmlformats.org/drawingml/2006/main" xmlns:r="http://schemas.openxmlformats.org/officeDocument/2006/relationships" xmlns:p="http://schemas.openxmlformats.org/presentationml/2006/main">
+  <p:cSld name="Slide 12">
+    <p:bg>
+      <p:bgPr>
+        <a:solidFill>
+          <a:srgbClr val="FAF8F1"/>
+        </a:solidFill>
+      </p:bgPr>
+    </p:bg>
+    <p:spTree>
+      <p:nvGrpSpPr>
+        <p:cNvPr id="1" name=""/>
+        <p:cNvGrpSpPr/>
+        <p:nvPr/>
+      </p:nvGrpSpPr>
+      <p:grpSpPr>
+        <a:xfrm>
+          <a:off x="0" y="0"/>
+          <a:ext cx="0" cy="0"/>
+          <a:chOff x="0" y="0"/>
+          <a:chExt cx="0" cy="0"/>
+        </a:xfrm>
+      </p:grpSpPr>
+      <p:sp>
+        <p:nvSpPr>
+          <p:cNvPr id="2" name="Text 0"/>
+          <p:cNvSpPr/>
+          <p:nvPr/>
+        </p:nvSpPr>
+        <p:spPr>
+          <a:xfrm>
+            <a:off x="822960" y="457200"/>
+            <a:ext cx="6400800" cy="274320"/>
+          </a:xfrm>
+          <a:prstGeom prst="rect">
+            <a:avLst/>
+          </a:prstGeom>
+          <a:noFill/>
+          <a:ln/>
+        </p:spPr>
+        <p:txBody>
+          <a:bodyPr wrap="square" lIns="0" tIns="0" rIns="0" bIns="0" rtlCol="0" anchor="ctr"/>
+          <a:lstStyle/>
+          <a:p>
+            <a:pPr algn="l" indent="0" marL="0">
+              <a:buNone/>
+            </a:pPr>
+            <a:r>
+              <a:rPr lang="en-US" sz="1100" b="1" spc="250" kern="0" dirty="0">
+                <a:solidFill>
+                  <a:srgbClr val="4A6B5D"/>
+                </a:solidFill>
+                <a:latin typeface="Arial" pitchFamily="34" charset="0"/>
+                <a:ea typeface="Arial" pitchFamily="34" charset="-122"/>
+                <a:cs typeface="Arial" pitchFamily="34" charset="-120"/>
+              </a:rPr>
+              <a:t>REGULATION, THE FOURTH CONTEXT</a:t>
+            </a:r>
+            <a:endParaRPr lang="en-US" sz="1100" dirty="0"/>
+          </a:p>
+        </p:txBody>
+      </p:sp>
+      <p:sp>
+        <p:nvSpPr>
+          <p:cNvPr id="3" name="Text 1"/>
+          <p:cNvSpPr/>
+          <p:nvPr/>
+        </p:nvSpPr>
+        <p:spPr>
+          <a:xfrm>
+            <a:off x="6793992" y="457200"/>
+            <a:ext cx="4572000" cy="274320"/>
+          </a:xfrm>
+          <a:prstGeom prst="rect">
+            <a:avLst/>
+          </a:prstGeom>
+          <a:noFill/>
+          <a:ln/>
+        </p:spPr>
+        <p:txBody>
+          <a:bodyPr wrap="square" lIns="0" tIns="0" rIns="0" bIns="0" rtlCol="0" anchor="ctr"/>
+          <a:lstStyle/>
+          <a:p>
+            <a:pPr algn="r" indent="0" marL="0">
+              <a:buNone/>
+            </a:pPr>
+            <a:r>
+              <a:rPr lang="en-US" sz="1100" b="1" spc="250" kern="0" dirty="0">
+                <a:solidFill>
+                  <a:srgbClr val="7A7F72"/>
+                </a:solidFill>
+                <a:latin typeface="Arial" pitchFamily="34" charset="0"/>
+                <a:ea typeface="Arial" pitchFamily="34" charset="-122"/>
+                <a:cs typeface="Arial" pitchFamily="34" charset="-120"/>
+              </a:rPr>
+              <a:t>WHILE THE SIT IS FRESH</a:t>
+            </a:r>
+            <a:endParaRPr lang="en-US" sz="1100" dirty="0"/>
+          </a:p>
+        </p:txBody>
+      </p:sp>
+      <p:sp>
+        <p:nvSpPr>
+          <p:cNvPr id="4" name="Shape 2"/>
+          <p:cNvSpPr/>
+          <p:nvPr/>
+        </p:nvSpPr>
+        <p:spPr>
+          <a:xfrm>
+            <a:off x="822960" y="786384"/>
+            <a:ext cx="10543032" cy="0"/>
+          </a:xfrm>
+          <a:prstGeom prst="line">
+            <a:avLst/>
+          </a:prstGeom>
+          <a:noFill/>
+          <a:ln w="9525">
+            <a:solidFill>
+              <a:srgbClr val="D9D4C4"/>
+            </a:solidFill>
+            <a:prstDash val="solid"/>
+          </a:ln>
+        </p:spPr>
+      </p:sp>
+      <p:sp>
+        <p:nvSpPr>
+          <p:cNvPr id="5" name="Text 3"/>
+          <p:cNvSpPr/>
+          <p:nvPr/>
+        </p:nvSpPr>
+        <p:spPr>
+          <a:xfrm>
+            <a:off x="822960" y="1051560"/>
+            <a:ext cx="6400800" cy="731520"/>
+          </a:xfrm>
+          <a:prstGeom prst="rect">
+            <a:avLst/>
+          </a:prstGeom>
+          <a:noFill/>
+          <a:ln/>
+        </p:spPr>
+        <p:txBody>
+          <a:bodyPr wrap="square" lIns="0" tIns="0" rIns="0" bIns="0" rtlCol="0" anchor="ctr"/>
+          <a:lstStyle/>
+          <a:p>
+            <a:pPr indent="0" marL="0">
+              <a:buNone/>
+            </a:pPr>
+            <a:r>
+              <a:rPr lang="en-US" sz="3000" dirty="0">
+                <a:solidFill>
+                  <a:srgbClr val="24313F"/>
+                </a:solidFill>
+                <a:latin typeface="Georgia" pitchFamily="34" charset="0"/>
+                <a:ea typeface="Georgia" pitchFamily="34" charset="-122"/>
+                <a:cs typeface="Georgia" pitchFamily="34" charset="-120"/>
+              </a:rPr>
+              <a:t>The chain, one link longer</a:t>
+            </a:r>
+            <a:endParaRPr lang="en-US" sz="3000" dirty="0"/>
+          </a:p>
+        </p:txBody>
+      </p:sp>
+      <p:sp>
+        <p:nvSpPr>
+          <p:cNvPr id="6" name="Shape 4"/>
+          <p:cNvSpPr/>
+          <p:nvPr/>
+        </p:nvSpPr>
+        <p:spPr>
+          <a:xfrm>
+            <a:off x="822960" y="1965960"/>
+            <a:ext cx="6400800" cy="868680"/>
+          </a:xfrm>
+          <a:prstGeom prst="rect">
+            <a:avLst/>
+          </a:prstGeom>
+          <a:solidFill>
+            <a:srgbClr val="E8EFE7"/>
+          </a:solidFill>
+          <a:ln/>
+        </p:spPr>
+      </p:sp>
+      <p:sp>
+        <p:nvSpPr>
+          <p:cNvPr id="7" name="Text 5"/>
+          <p:cNvSpPr/>
+          <p:nvPr/>
+        </p:nvSpPr>
+        <p:spPr>
+          <a:xfrm>
+            <a:off x="1051560" y="1965960"/>
+            <a:ext cx="6035040" cy="868680"/>
+          </a:xfrm>
+          <a:prstGeom prst="rect">
+            <a:avLst/>
+          </a:prstGeom>
+          <a:noFill/>
+          <a:ln/>
+        </p:spPr>
+        <p:txBody>
+          <a:bodyPr wrap="square" lIns="0" tIns="0" rIns="0" bIns="0" rtlCol="0" anchor="ctr"/>
+          <a:lstStyle/>
+          <a:p>
+            <a:pPr indent="0" marL="0">
+              <a:buNone/>
+            </a:pPr>
+            <a:r>
+              <a:rPr lang="en-US" sz="1900" dirty="0">
+                <a:solidFill>
+                  <a:srgbClr val="4A6B5D"/>
+                </a:solidFill>
+                <a:latin typeface="Georgia" pitchFamily="34" charset="0"/>
+                <a:ea typeface="Georgia" pitchFamily="34" charset="-122"/>
+                <a:cs typeface="Georgia" pitchFamily="34" charset="-120"/>
+              </a:rPr>
+              <a:t>decision ← incentive ← payer ← REGULATOR</a:t>
+            </a:r>
+            <a:endParaRPr lang="en-US" sz="1900" dirty="0"/>
+          </a:p>
+        </p:txBody>
+      </p:sp>
+      <p:sp>
+        <p:nvSpPr>
+          <p:cNvPr id="8" name="Text 6"/>
+          <p:cNvSpPr/>
+          <p:nvPr/>
+        </p:nvSpPr>
+        <p:spPr>
+          <a:xfrm>
+            <a:off x="822960" y="3063240"/>
+            <a:ext cx="6400800" cy="2377440"/>
+          </a:xfrm>
+          <a:prstGeom prst="rect">
+            <a:avLst/>
+          </a:prstGeom>
+          <a:noFill/>
+          <a:ln/>
+        </p:spPr>
+        <p:txBody>
+          <a:bodyPr wrap="square" lIns="0" tIns="0" rIns="0" bIns="0" rtlCol="0" anchor="t"/>
+          <a:lstStyle/>
+          <a:p>
+            <a:pPr indent="0" marL="0">
+              <a:lnSpc>
+                <a:spcPts val="2400"/>
+              </a:lnSpc>
+              <a:buNone/>
+            </a:pPr>
+            <a:r>
+              <a:rPr lang="en-US" sz="1650" dirty="0">
+                <a:solidFill>
+                  <a:srgbClr val="24313F"/>
+                </a:solidFill>
+                <a:latin typeface="Georgia" pitchFamily="34" charset="0"/>
+                <a:ea typeface="Georgia" pitchFamily="34" charset="-122"/>
+                <a:cs typeface="Georgia" pitchFamily="34" charset="-120"/>
+              </a:rPr>
+              <a:t>Who regulates the case-study institution (Ofcom, the FCC, platform self-regulation, per its home market), with what powers, and what that visibly changes: scheduling, cuts, ratings, and above all what never gets made. Add the regulation row to the document, and date it.</a:t>
+            </a:r>
+            <a:endParaRPr lang="en-US" sz="1650" dirty="0"/>
+          </a:p>
+        </p:txBody>
+      </p:sp>
+      <p:sp>
+        <p:nvSpPr>
+          <p:cNvPr id="9" name="Shape 7"/>
+          <p:cNvSpPr/>
+          <p:nvPr/>
+        </p:nvSpPr>
+        <p:spPr>
+          <a:xfrm>
+            <a:off x="7635240" y="1097280"/>
+            <a:ext cx="3749040" cy="4572000"/>
+          </a:xfrm>
+          <a:prstGeom prst="rect">
+            <a:avLst/>
+          </a:prstGeom>
+          <a:solidFill>
+            <a:srgbClr val="FAF8F1"/>
+          </a:solidFill>
+          <a:ln w="9525">
+            <a:solidFill>
+              <a:srgbClr val="D9D4C4"/>
+            </a:solidFill>
+            <a:prstDash val="solid"/>
+          </a:ln>
+        </p:spPr>
+      </p:sp>
+      <p:pic>
+        <p:nvPicPr>
+          <p:cNvPr id="10" name="Image 0" descr="/Users/dogan/Documents/Vaults/Courses/wiki/classes/media-studies/decks/_build/img/ofcom-cover.jpg">    </p:cNvPr>
+          <p:cNvPicPr>
+            <a:picLocks noChangeAspect="1"/>
+          </p:cNvPicPr>
+          <p:nvPr/>
+        </p:nvPicPr>
+        <p:blipFill>
+          <a:blip r:embed="rId1"/>
+          <a:stretch>
+            <a:fillRect/>
+          </a:stretch>
+        </p:blipFill>
+        <p:spPr>
+          <a:xfrm>
+            <a:off x="7983254" y="1225296"/>
+            <a:ext cx="3053012" cy="4315968"/>
+          </a:xfrm>
+          <a:prstGeom prst="rect">
+            <a:avLst/>
+          </a:prstGeom>
+        </p:spPr>
+      </p:pic>
+      <p:sp>
+        <p:nvSpPr>
+          <p:cNvPr id="11" name="Text 8"/>
+          <p:cNvSpPr/>
+          <p:nvPr/>
+        </p:nvSpPr>
+        <p:spPr>
+          <a:xfrm>
+            <a:off x="7635240" y="5715000"/>
+            <a:ext cx="3749040" cy="320040"/>
+          </a:xfrm>
+          <a:prstGeom prst="rect">
+            <a:avLst/>
+          </a:prstGeom>
+          <a:noFill/>
+          <a:ln/>
+        </p:spPr>
+        <p:txBody>
+          <a:bodyPr wrap="square" lIns="0" tIns="0" rIns="0" bIns="0" rtlCol="0" anchor="ctr"/>
+          <a:lstStyle/>
+          <a:p>
+            <a:pPr algn="ctr" indent="0" marL="0">
+              <a:buNone/>
+            </a:pPr>
+            <a:r>
+              <a:rPr lang="en-US" sz="1000" dirty="0">
+                <a:solidFill>
+                  <a:srgbClr val="7A7F72"/>
+                </a:solidFill>
+                <a:latin typeface="Arial" pitchFamily="34" charset="0"/>
+                <a:ea typeface="Arial" pitchFamily="34" charset="-122"/>
+                <a:cs typeface="Arial" pitchFamily="34" charset="-120"/>
+              </a:rPr>
+              <a:t>The Ofcom Broadcasting Code: a regulator's rulebook, in print</a:t>
+            </a:r>
+            <a:endParaRPr lang="en-US" sz="1000" dirty="0"/>
+          </a:p>
+        </p:txBody>
+      </p:sp>
+      <p:sp>
+        <p:nvSpPr>
+          <p:cNvPr id="12" name="Shape 9"/>
+          <p:cNvSpPr/>
+          <p:nvPr/>
+        </p:nvSpPr>
+        <p:spPr>
+          <a:xfrm>
+            <a:off x="822960" y="6382512"/>
+            <a:ext cx="10543032" cy="0"/>
+          </a:xfrm>
+          <a:prstGeom prst="line">
+            <a:avLst/>
+          </a:prstGeom>
+          <a:noFill/>
+          <a:ln w="9525">
+            <a:solidFill>
+              <a:srgbClr val="D9D4C4"/>
+            </a:solidFill>
+            <a:prstDash val="solid"/>
+          </a:ln>
+        </p:spPr>
+      </p:sp>
+      <p:sp>
+        <p:nvSpPr>
+          <p:cNvPr id="13" name="Text 10"/>
+          <p:cNvSpPr/>
+          <p:nvPr/>
+        </p:nvSpPr>
+        <p:spPr>
+          <a:xfrm>
+            <a:off x="822960" y="6419088"/>
+            <a:ext cx="7315200" cy="274320"/>
+          </a:xfrm>
+          <a:prstGeom prst="rect">
+            <a:avLst/>
+          </a:prstGeom>
+          <a:noFill/>
+          <a:ln/>
+        </p:spPr>
+        <p:txBody>
+          <a:bodyPr wrap="square" lIns="0" tIns="0" rIns="0" bIns="0" rtlCol="0" anchor="ctr"/>
+          <a:lstStyle/>
+          <a:p>
+            <a:pPr indent="0" marL="0">
+              <a:buNone/>
+            </a:pPr>
+            <a:r>
+              <a:rPr lang="en-US" sz="900" spc="150" kern="0" dirty="0">
+                <a:solidFill>
+                  <a:srgbClr val="7A7F72"/>
+                </a:solidFill>
+                <a:latin typeface="Arial" pitchFamily="34" charset="0"/>
+                <a:ea typeface="Arial" pitchFamily="34" charset="-122"/>
+                <a:cs typeface="Arial" pitchFamily="34" charset="-120"/>
+              </a:rPr>
+              <a:t>MEDIA STUDIES 9607 · SEMESTER I</a:t>
+            </a:r>
+            <a:endParaRPr lang="en-US" sz="900" dirty="0"/>
+          </a:p>
+        </p:txBody>
+      </p:sp>
+      <p:sp>
+        <p:nvSpPr>
+          <p:cNvPr id="14" name="Text 11"/>
+          <p:cNvSpPr/>
+          <p:nvPr/>
+        </p:nvSpPr>
+        <p:spPr>
+          <a:xfrm>
+            <a:off x="10268712" y="6355080"/>
+            <a:ext cx="1097280" cy="365760"/>
+          </a:xfrm>
+          <a:prstGeom prst="rect">
+            <a:avLst/>
+          </a:prstGeom>
+          <a:noFill/>
+          <a:ln/>
+        </p:spPr>
+        <p:txBody>
+          <a:bodyPr wrap="square" lIns="0" tIns="0" rIns="0" bIns="0" rtlCol="0" anchor="ctr"/>
+          <a:lstStyle/>
+          <a:p>
+            <a:pPr algn="r" indent="0" marL="0">
+              <a:buNone/>
+            </a:pPr>
+            <a:r>
+              <a:rPr lang="en-US" sz="1600" dirty="0">
+                <a:solidFill>
+                  <a:srgbClr val="A3C1AD"/>
+                </a:solidFill>
+                <a:latin typeface="Georgia" pitchFamily="34" charset="0"/>
+                <a:ea typeface="Georgia" pitchFamily="34" charset="-122"/>
+                <a:cs typeface="Georgia" pitchFamily="34" charset="-120"/>
+              </a:rPr>
+              <a:t>07</a:t>
+            </a:r>
+            <a:endParaRPr lang="en-US" sz="1600" dirty="0"/>
+          </a:p>
+        </p:txBody>
+      </p:sp>
+    </p:spTree>
+  </p:cSld>
+  <p:clrMapOvr>
+    <a:masterClrMapping/>
+  </p:clrMapOvr>
+</p:sld>
+</file>
+
+<file path=ppt/slides/slide13.xml><?xml version="1.0" encoding="utf-8"?>
+<p:sld xmlns:a="http://schemas.openxmlformats.org/drawingml/2006/main" xmlns:r="http://schemas.openxmlformats.org/officeDocument/2006/relationships" xmlns:p="http://schemas.openxmlformats.org/presentationml/2006/main">
+  <p:cSld name="Slide 13">
+    <p:bg>
+      <p:bgPr>
+        <a:solidFill>
+          <a:srgbClr val="FAF8F1"/>
+        </a:solidFill>
+      </p:bgPr>
+    </p:bg>
+    <p:spTree>
+      <p:nvGrpSpPr>
+        <p:cNvPr id="1" name=""/>
+        <p:cNvGrpSpPr/>
+        <p:nvPr/>
+      </p:nvGrpSpPr>
+      <p:grpSpPr>
+        <a:xfrm>
+          <a:off x="0" y="0"/>
+          <a:ext cx="0" cy="0"/>
+          <a:chOff x="0" y="0"/>
+          <a:chExt cx="0" cy="0"/>
+        </a:xfrm>
+      </p:grpSpPr>
+      <p:sp>
+        <p:nvSpPr>
+          <p:cNvPr id="2" name="Text 0"/>
+          <p:cNvSpPr/>
+          <p:nvPr/>
+        </p:nvSpPr>
+        <p:spPr>
+          <a:xfrm>
+            <a:off x="822960" y="457200"/>
+            <a:ext cx="6400800" cy="274320"/>
+          </a:xfrm>
+          <a:prstGeom prst="rect">
+            <a:avLst/>
+          </a:prstGeom>
+          <a:noFill/>
+          <a:ln/>
+        </p:spPr>
+        <p:txBody>
+          <a:bodyPr wrap="square" lIns="0" tIns="0" rIns="0" bIns="0" rtlCol="0" anchor="ctr"/>
+          <a:lstStyle/>
+          <a:p>
+            <a:pPr algn="l" indent="0" marL="0">
+              <a:buNone/>
+            </a:pPr>
+            <a:r>
+              <a:rPr lang="en-US" sz="1100" b="1" spc="250" kern="0" dirty="0">
+                <a:solidFill>
+                  <a:srgbClr val="4A6B5D"/>
+                </a:solidFill>
+                <a:latin typeface="Arial" pitchFamily="34" charset="0"/>
+                <a:ea typeface="Arial" pitchFamily="34" charset="-122"/>
+                <a:cs typeface="Arial" pitchFamily="34" charset="-120"/>
+              </a:rPr>
+              <a:t>ASSESSMENT · A4</a:t>
+            </a:r>
+            <a:endParaRPr lang="en-US" sz="1100" dirty="0"/>
+          </a:p>
+        </p:txBody>
+      </p:sp>
+      <p:sp>
+        <p:nvSpPr>
+          <p:cNvPr id="3" name="Text 1"/>
+          <p:cNvSpPr/>
+          <p:nvPr/>
+        </p:nvSpPr>
+        <p:spPr>
+          <a:xfrm>
+            <a:off x="6793992" y="457200"/>
+            <a:ext cx="4572000" cy="274320"/>
+          </a:xfrm>
+          <a:prstGeom prst="rect">
+            <a:avLst/>
+          </a:prstGeom>
+          <a:noFill/>
+          <a:ln/>
+        </p:spPr>
+        <p:txBody>
+          <a:bodyPr wrap="square" lIns="0" tIns="0" rIns="0" bIns="0" rtlCol="0" anchor="ctr"/>
+          <a:lstStyle/>
+          <a:p>
+            <a:pPr algn="r" indent="0" marL="0">
+              <a:buNone/>
+            </a:pPr>
+            <a:r>
+              <a:rPr lang="en-US" sz="1100" b="1" spc="250" kern="0" dirty="0">
+                <a:solidFill>
+                  <a:srgbClr val="7A7F72"/>
+                </a:solidFill>
+                <a:latin typeface="Arial" pitchFamily="34" charset="0"/>
+                <a:ea typeface="Arial" pitchFamily="34" charset="-122"/>
+                <a:cs typeface="Arial" pitchFamily="34" charset="-120"/>
+              </a:rPr>
+              <a:t>THE FORECAST GRADE ANCHOR</a:t>
+            </a:r>
+            <a:endParaRPr lang="en-US" sz="1100" dirty="0"/>
+          </a:p>
+        </p:txBody>
+      </p:sp>
+      <p:sp>
+        <p:nvSpPr>
+          <p:cNvPr id="4" name="Shape 2"/>
+          <p:cNvSpPr/>
+          <p:nvPr/>
+        </p:nvSpPr>
+        <p:spPr>
+          <a:xfrm>
+            <a:off x="822960" y="786384"/>
+            <a:ext cx="10543032" cy="0"/>
+          </a:xfrm>
+          <a:prstGeom prst="line">
+            <a:avLst/>
+          </a:prstGeom>
+          <a:noFill/>
+          <a:ln w="9525">
+            <a:solidFill>
+              <a:srgbClr val="D9D4C4"/>
+            </a:solidFill>
+            <a:prstDash val="solid"/>
+          </a:ln>
+        </p:spPr>
+      </p:sp>
+      <p:sp>
+        <p:nvSpPr>
+          <p:cNvPr id="5" name="Text 3"/>
+          <p:cNvSpPr/>
+          <p:nvPr/>
+        </p:nvSpPr>
+        <p:spPr>
+          <a:xfrm>
+            <a:off x="822960" y="1051560"/>
+            <a:ext cx="6583680" cy="822960"/>
+          </a:xfrm>
+          <a:prstGeom prst="rect">
+            <a:avLst/>
+          </a:prstGeom>
+          <a:noFill/>
+          <a:ln/>
+        </p:spPr>
+        <p:txBody>
+          <a:bodyPr wrap="square" lIns="0" tIns="0" rIns="0" bIns="0" rtlCol="0" anchor="ctr"/>
+          <a:lstStyle/>
+          <a:p>
+            <a:pPr indent="0" marL="0">
+              <a:buNone/>
+            </a:pPr>
+            <a:r>
+              <a:rPr lang="en-US" sz="3000" dirty="0">
+                <a:solidFill>
+                  <a:srgbClr val="24313F"/>
+                </a:solidFill>
+                <a:latin typeface="Georgia" pitchFamily="34" charset="0"/>
+                <a:ea typeface="Georgia" pitchFamily="34" charset="-122"/>
+                <a:cs typeface="Georgia" pitchFamily="34" charset="-120"/>
+              </a:rPr>
+              <a:t>A4 sits Wednesday 16 December</a:t>
+            </a:r>
+            <a:endParaRPr lang="en-US" sz="3000" dirty="0"/>
+          </a:p>
+        </p:txBody>
+      </p:sp>
+      <p:sp>
+        <p:nvSpPr>
+          <p:cNvPr id="6" name="Shape 4"/>
+          <p:cNvSpPr/>
+          <p:nvPr/>
+        </p:nvSpPr>
+        <p:spPr>
+          <a:xfrm>
+            <a:off x="822960" y="2011680"/>
+            <a:ext cx="914400" cy="0"/>
+          </a:xfrm>
+          <a:prstGeom prst="line">
+            <a:avLst/>
+          </a:prstGeom>
+          <a:noFill/>
+          <a:ln w="31750">
+            <a:solidFill>
+              <a:srgbClr val="8C3A38"/>
+            </a:solidFill>
+            <a:prstDash val="solid"/>
+          </a:ln>
+        </p:spPr>
+      </p:sp>
+      <p:sp>
+        <p:nvSpPr>
+          <p:cNvPr id="7" name="Text 5"/>
+          <p:cNvSpPr/>
+          <p:nvPr/>
+        </p:nvSpPr>
+        <p:spPr>
+          <a:xfrm>
+            <a:off x="822960" y="2240280"/>
+            <a:ext cx="6492240" cy="3291840"/>
+          </a:xfrm>
+          <a:prstGeom prst="rect">
+            <a:avLst/>
+          </a:prstGeom>
+          <a:noFill/>
+          <a:ln/>
+        </p:spPr>
+        <p:txBody>
+          <a:bodyPr wrap="square" lIns="0" tIns="0" rIns="0" bIns="0" rtlCol="0" anchor="t"/>
+          <a:lstStyle/>
+          <a:p>
+            <a:pPr indent="0" marL="0">
+              <a:lnSpc>
+                <a:spcPts val="2400"/>
+              </a:lnSpc>
+              <a:buNone/>
+            </a:pPr>
+            <a:r>
+              <a:rPr lang="en-US" sz="1650" dirty="0">
+                <a:solidFill>
+                  <a:srgbClr val="24313F"/>
+                </a:solidFill>
+                <a:latin typeface="Georgia" pitchFamily="34" charset="0"/>
+                <a:ea typeface="Georgia" pitchFamily="34" charset="-122"/>
+                <a:cs typeface="Georgia" pitchFamily="34" charset="-120"/>
+              </a:rPr>
+              <a:t>Component 2 Section A in authentic format: an unseen TV-drama extract, thirty minutes of viewing and structured notes, then forty-five of writing, to the paper's own screening protocol. Marked to the CIE band descriptors, per-criterion, with AO splits recorded per script for the L17 review. No debrief on the day, by design: the format is the lesson, and it ends the way the real one does.</a:t>
+            </a:r>
+            <a:endParaRPr lang="en-US" sz="1650" dirty="0"/>
+          </a:p>
+        </p:txBody>
+      </p:sp>
+      <p:sp>
+        <p:nvSpPr>
+          <p:cNvPr id="8" name="Shape 6"/>
+          <p:cNvSpPr/>
+          <p:nvPr/>
+        </p:nvSpPr>
+        <p:spPr>
+          <a:xfrm>
+            <a:off x="7406640" y="1234440"/>
+            <a:ext cx="3977640" cy="4023360"/>
+          </a:xfrm>
+          <a:prstGeom prst="rect">
+            <a:avLst/>
+          </a:prstGeom>
+          <a:solidFill>
+            <a:srgbClr val="FAF8F1"/>
+          </a:solidFill>
+          <a:ln w="9525">
+            <a:solidFill>
+              <a:srgbClr val="D9D4C4"/>
+            </a:solidFill>
+            <a:prstDash val="solid"/>
+          </a:ln>
+        </p:spPr>
+      </p:sp>
+      <p:pic>
+        <p:nvPicPr>
+          <p:cNvPr id="9" name="Image 0" descr="/Users/dogan/Documents/Vaults/Courses/wiki/classes/media-studies/decks/_build/img/ws46.jpg">    </p:cNvPr>
+          <p:cNvPicPr>
+            <a:picLocks noChangeAspect="1"/>
+          </p:cNvPicPr>
+          <p:nvPr/>
+        </p:nvPicPr>
+        <p:blipFill>
+          <a:blip r:embed="rId1"/>
+          <a:stretch>
+            <a:fillRect/>
+          </a:stretch>
+        </p:blipFill>
+        <p:spPr>
+          <a:xfrm>
+            <a:off x="7534656" y="1931067"/>
+            <a:ext cx="3721608" cy="2630106"/>
+          </a:xfrm>
+          <a:prstGeom prst="rect">
+            <a:avLst/>
+          </a:prstGeom>
+        </p:spPr>
+      </p:pic>
+      <p:sp>
+        <p:nvSpPr>
+          <p:cNvPr id="10" name="Text 7"/>
+          <p:cNvSpPr/>
+          <p:nvPr/>
+        </p:nvSpPr>
+        <p:spPr>
+          <a:xfrm>
+            <a:off x="7406640" y="5303520"/>
+            <a:ext cx="3977640" cy="320040"/>
+          </a:xfrm>
+          <a:prstGeom prst="rect">
+            <a:avLst/>
+          </a:prstGeom>
+          <a:noFill/>
+          <a:ln/>
+        </p:spPr>
+        <p:txBody>
+          <a:bodyPr wrap="square" lIns="0" tIns="0" rIns="0" bIns="0" rtlCol="0" anchor="ctr"/>
+          <a:lstStyle/>
+          <a:p>
+            <a:pPr algn="ctr" indent="0" marL="0">
+              <a:buNone/>
+            </a:pPr>
+            <a:r>
+              <a:rPr lang="en-US" sz="1000" dirty="0">
+                <a:solidFill>
+                  <a:srgbClr val="7A7F72"/>
+                </a:solidFill>
+                <a:latin typeface="Arial" pitchFamily="34" charset="0"/>
+                <a:ea typeface="Arial" pitchFamily="34" charset="-122"/>
+                <a:cs typeface="Arial" pitchFamily="34" charset="-120"/>
+              </a:rPr>
+              <a:t>WS 4.6: the rubric rows and comment bank the feedback follows</a:t>
+            </a:r>
+            <a:endParaRPr lang="en-US" sz="1000" dirty="0"/>
+          </a:p>
+        </p:txBody>
+      </p:sp>
+      <p:sp>
+        <p:nvSpPr>
+          <p:cNvPr id="11" name="Shape 8"/>
+          <p:cNvSpPr/>
+          <p:nvPr/>
+        </p:nvSpPr>
+        <p:spPr>
+          <a:xfrm>
+            <a:off x="822960" y="6382512"/>
+            <a:ext cx="10543032" cy="0"/>
+          </a:xfrm>
+          <a:prstGeom prst="line">
+            <a:avLst/>
+          </a:prstGeom>
+          <a:noFill/>
+          <a:ln w="9525">
+            <a:solidFill>
+              <a:srgbClr val="D9D4C4"/>
+            </a:solidFill>
+            <a:prstDash val="solid"/>
+          </a:ln>
+        </p:spPr>
+      </p:sp>
+      <p:sp>
+        <p:nvSpPr>
+          <p:cNvPr id="12" name="Text 9"/>
+          <p:cNvSpPr/>
+          <p:nvPr/>
+        </p:nvSpPr>
+        <p:spPr>
+          <a:xfrm>
+            <a:off x="822960" y="6419088"/>
+            <a:ext cx="7315200" cy="274320"/>
+          </a:xfrm>
+          <a:prstGeom prst="rect">
+            <a:avLst/>
+          </a:prstGeom>
+          <a:noFill/>
+          <a:ln/>
+        </p:spPr>
+        <p:txBody>
+          <a:bodyPr wrap="square" lIns="0" tIns="0" rIns="0" bIns="0" rtlCol="0" anchor="ctr"/>
+          <a:lstStyle/>
+          <a:p>
+            <a:pPr indent="0" marL="0">
+              <a:buNone/>
+            </a:pPr>
+            <a:r>
+              <a:rPr lang="en-US" sz="900" spc="150" kern="0" dirty="0">
+                <a:solidFill>
+                  <a:srgbClr val="7A7F72"/>
+                </a:solidFill>
+                <a:latin typeface="Arial" pitchFamily="34" charset="0"/>
+                <a:ea typeface="Arial" pitchFamily="34" charset="-122"/>
+                <a:cs typeface="Arial" pitchFamily="34" charset="-120"/>
+              </a:rPr>
+              <a:t>MEDIA STUDIES 9607 · SEMESTER I</a:t>
+            </a:r>
+            <a:endParaRPr lang="en-US" sz="900" dirty="0"/>
+          </a:p>
+        </p:txBody>
+      </p:sp>
+      <p:sp>
+        <p:nvSpPr>
+          <p:cNvPr id="13" name="Text 10"/>
+          <p:cNvSpPr/>
+          <p:nvPr/>
+        </p:nvSpPr>
+        <p:spPr>
+          <a:xfrm>
+            <a:off x="10268712" y="6355080"/>
+            <a:ext cx="1097280" cy="365760"/>
+          </a:xfrm>
+          <a:prstGeom prst="rect">
+            <a:avLst/>
+          </a:prstGeom>
+          <a:noFill/>
+          <a:ln/>
+        </p:spPr>
+        <p:txBody>
+          <a:bodyPr wrap="square" lIns="0" tIns="0" rIns="0" bIns="0" rtlCol="0" anchor="ctr"/>
+          <a:lstStyle/>
+          <a:p>
+            <a:pPr algn="r" indent="0" marL="0">
+              <a:buNone/>
+            </a:pPr>
+            <a:r>
+              <a:rPr lang="en-US" sz="1600" dirty="0">
+                <a:solidFill>
+                  <a:srgbClr val="A3C1AD"/>
+                </a:solidFill>
+                <a:latin typeface="Georgia" pitchFamily="34" charset="0"/>
+                <a:ea typeface="Georgia" pitchFamily="34" charset="-122"/>
+                <a:cs typeface="Georgia" pitchFamily="34" charset="-120"/>
+              </a:rPr>
+              <a:t>08</a:t>
+            </a:r>
+            <a:endParaRPr lang="en-US" sz="1600" dirty="0"/>
+          </a:p>
+        </p:txBody>
+      </p:sp>
+    </p:spTree>
+  </p:cSld>
+  <p:clrMapOvr>
+    <a:masterClrMapping/>
+  </p:clrMapOvr>
+</p:sld>
+</file>
+
+<file path=ppt/slides/slide14.xml><?xml version="1.0" encoding="utf-8"?>
+<p:sld xmlns:a="http://schemas.openxmlformats.org/drawingml/2006/main" xmlns:r="http://schemas.openxmlformats.org/officeDocument/2006/relationships" xmlns:p="http://schemas.openxmlformats.org/presentationml/2006/main">
+  <p:cSld name="Slide 14">
     <p:bg>
       <p:bgPr>
         <a:solidFill>
@@ -2634,7 +4658,7 @@
                 <a:ea typeface="Georgia" pitchFamily="34" charset="-122"/>
                 <a:cs typeface="Georgia" pitchFamily="34" charset="-120"/>
               </a:rPr>
-              <a:t>06</a:t>
+              <a:t>09</a:t>
             </a:r>
             <a:endParaRPr lang="en-US" sz="1600" dirty="0"/>
           </a:p>
@@ -3452,9 +5476,135 @@
           <a:chExt cx="0" cy="0"/>
         </a:xfrm>
       </p:grpSpPr>
+      <p:sp>
+        <p:nvSpPr>
+          <p:cNvPr id="2" name="Text 0"/>
+          <p:cNvSpPr/>
+          <p:nvPr/>
+        </p:nvSpPr>
+        <p:spPr>
+          <a:xfrm>
+            <a:off x="822960" y="457200"/>
+            <a:ext cx="6400800" cy="274320"/>
+          </a:xfrm>
+          <a:prstGeom prst="rect">
+            <a:avLst/>
+          </a:prstGeom>
+          <a:noFill/>
+          <a:ln/>
+        </p:spPr>
+        <p:txBody>
+          <a:bodyPr wrap="square" lIns="0" tIns="0" rIns="0" bIns="0" rtlCol="0" anchor="ctr"/>
+          <a:lstStyle/>
+          <a:p>
+            <a:pPr algn="l" indent="0" marL="0">
+              <a:buNone/>
+            </a:pPr>
+            <a:r>
+              <a:rPr lang="en-US" sz="1100" b="1" spc="250" kern="0" dirty="0">
+                <a:solidFill>
+                  <a:srgbClr val="4A6B5D"/>
+                </a:solidFill>
+                <a:latin typeface="Arial" pitchFamily="34" charset="0"/>
+                <a:ea typeface="Arial" pitchFamily="34" charset="-122"/>
+                <a:cs typeface="Arial" pitchFamily="34" charset="-120"/>
+              </a:rPr>
+              <a:t>THE THREE WORDS, AT WORK</a:t>
+            </a:r>
+            <a:endParaRPr lang="en-US" sz="1100" dirty="0"/>
+          </a:p>
+        </p:txBody>
+      </p:sp>
+      <p:sp>
+        <p:nvSpPr>
+          <p:cNvPr id="3" name="Text 1"/>
+          <p:cNvSpPr/>
+          <p:nvPr/>
+        </p:nvSpPr>
+        <p:spPr>
+          <a:xfrm>
+            <a:off x="6793992" y="457200"/>
+            <a:ext cx="4572000" cy="274320"/>
+          </a:xfrm>
+          <a:prstGeom prst="rect">
+            <a:avLst/>
+          </a:prstGeom>
+          <a:noFill/>
+          <a:ln/>
+        </p:spPr>
+        <p:txBody>
+          <a:bodyPr wrap="square" lIns="0" tIns="0" rIns="0" bIns="0" rtlCol="0" anchor="ctr"/>
+          <a:lstStyle/>
+          <a:p>
+            <a:pPr algn="r" indent="0" marL="0">
+              <a:buNone/>
+            </a:pPr>
+            <a:r>
+              <a:rPr lang="en-US" sz="1100" b="1" spc="250" kern="0" dirty="0">
+                <a:solidFill>
+                  <a:srgbClr val="7A7F72"/>
+                </a:solidFill>
+                <a:latin typeface="Arial" pitchFamily="34" charset="0"/>
+                <a:ea typeface="Arial" pitchFamily="34" charset="-122"/>
+                <a:cs typeface="Arial" pitchFamily="34" charset="-120"/>
+              </a:rPr>
+              <a:t>1995 AND 2023, SAME MACHINE</a:t>
+            </a:r>
+            <a:endParaRPr lang="en-US" sz="1100" dirty="0"/>
+          </a:p>
+        </p:txBody>
+      </p:sp>
+      <p:sp>
+        <p:nvSpPr>
+          <p:cNvPr id="4" name="Shape 2"/>
+          <p:cNvSpPr/>
+          <p:nvPr/>
+        </p:nvSpPr>
+        <p:spPr>
+          <a:xfrm>
+            <a:off x="822960" y="786384"/>
+            <a:ext cx="10543032" cy="0"/>
+          </a:xfrm>
+          <a:prstGeom prst="line">
+            <a:avLst/>
+          </a:prstGeom>
+          <a:noFill/>
+          <a:ln w="9525">
+            <a:solidFill>
+              <a:srgbClr val="D9D4C4"/>
+            </a:solidFill>
+            <a:prstDash val="solid"/>
+          </a:ln>
+        </p:spPr>
+      </p:sp>
+      <p:sp>
+        <p:nvSpPr>
+          <p:cNvPr id="5" name="Shape 3"/>
+          <p:cNvSpPr/>
+          <p:nvPr/>
+        </p:nvSpPr>
+        <p:spPr>
+          <a:xfrm>
+            <a:off x="822960" y="1143000"/>
+            <a:ext cx="6675120" cy="4023360"/>
+          </a:xfrm>
+          <a:prstGeom prst="rect">
+            <a:avLst/>
+          </a:prstGeom>
+          <a:solidFill>
+            <a:srgbClr val="FAF8F1"/>
+          </a:solidFill>
+          <a:ln w="9525">
+            <a:solidFill>
+              <a:srgbClr val="D9D4C4"/>
+            </a:solidFill>
+            <a:prstDash val="solid"/>
+          </a:ln>
+        </p:spPr>
+      </p:sp>
       <p:pic>
         <p:nvPicPr>
-          <p:cNvPr id="2" name="Image 0" descr="/Users/dogan/Documents/Vaults/Courses/wiki/classes/media-studies/decks/_build/img/crops/underwood-lindbergh_a591.jpg">    </p:cNvPr>
+          <p:cNvPr id="6" name="Image 0" descr="/Users/dogan/Documents/Vaults/Courses/wiki/classes/media-studies/decks/_build/img/toystory-buzz-unwrapped.jpg">    </p:cNvPr>
           <p:cNvPicPr>
             <a:picLocks noChangeAspect="1"/>
           </p:cNvPicPr>
@@ -3468,8 +5618,8 @@
         </p:blipFill>
         <p:spPr>
           <a:xfrm>
-            <a:off x="8138160" y="0"/>
-            <a:ext cx="4050792" cy="6858000"/>
+            <a:off x="1245759" y="1271016"/>
+            <a:ext cx="5829521" cy="3767328"/>
           </a:xfrm>
           <a:prstGeom prst="rect">
             <a:avLst/>
@@ -3478,14 +5628,53 @@
       </p:pic>
       <p:sp>
         <p:nvSpPr>
-          <p:cNvPr id="3" name="Text 0"/>
-          <p:cNvSpPr/>
-          <p:nvPr/>
-        </p:nvSpPr>
-        <p:spPr>
-          <a:xfrm>
-            <a:off x="8321040" y="6126480"/>
-            <a:ext cx="3685032" cy="365760"/>
+          <p:cNvPr id="7" name="Text 4"/>
+          <p:cNvSpPr/>
+          <p:nvPr/>
+        </p:nvSpPr>
+        <p:spPr>
+          <a:xfrm>
+            <a:off x="822960" y="5212080"/>
+            <a:ext cx="6675120" cy="320040"/>
+          </a:xfrm>
+          <a:prstGeom prst="rect">
+            <a:avLst/>
+          </a:prstGeom>
+          <a:noFill/>
+          <a:ln/>
+        </p:spPr>
+        <p:txBody>
+          <a:bodyPr wrap="square" lIns="0" tIns="0" rIns="0" bIns="0" rtlCol="0" anchor="ctr"/>
+          <a:lstStyle/>
+          <a:p>
+            <a:pPr algn="ctr" indent="0" marL="0">
+              <a:buNone/>
+            </a:pPr>
+            <a:r>
+              <a:rPr lang="en-US" sz="1000" dirty="0">
+                <a:solidFill>
+                  <a:srgbClr val="7A7F72"/>
+                </a:solidFill>
+                <a:latin typeface="Arial" pitchFamily="34" charset="0"/>
+                <a:ea typeface="Arial" pitchFamily="34" charset="-122"/>
+                <a:cs typeface="Arial" pitchFamily="34" charset="-120"/>
+              </a:rPr>
+              <a:t>Toy Story (1995, Pixar/Disney): the film is literally the toy advert, and the toy is the film's premise</a:t>
+            </a:r>
+            <a:endParaRPr lang="en-US" sz="1000" dirty="0"/>
+          </a:p>
+        </p:txBody>
+      </p:sp>
+      <p:sp>
+        <p:nvSpPr>
+          <p:cNvPr id="8" name="Shape 5"/>
+          <p:cNvSpPr/>
+          <p:nvPr/>
+        </p:nvSpPr>
+        <p:spPr>
+          <a:xfrm>
+            <a:off x="7863840" y="1051560"/>
+            <a:ext cx="3474720" cy="4206240"/>
           </a:xfrm>
           <a:prstGeom prst="rect">
             <a:avLst/>
@@ -3493,84 +5682,6 @@
           <a:solidFill>
             <a:srgbClr val="FAF8F1"/>
           </a:solidFill>
-          <a:ln/>
-        </p:spPr>
-        <p:txBody>
-          <a:bodyPr wrap="square" lIns="0" tIns="0" rIns="0" bIns="0" rtlCol="0" anchor="ctr"/>
-          <a:lstStyle/>
-          <a:p>
-            <a:pPr indent="0" marL="0">
-              <a:buNone/>
-            </a:pPr>
-            <a:r>
-              <a:rPr lang="en-US" sz="950" spc="50" kern="0" dirty="0">
-                <a:solidFill>
-                  <a:srgbClr val="7A7F72"/>
-                </a:solidFill>
-                <a:latin typeface="Arial" pitchFamily="34" charset="0"/>
-                <a:ea typeface="Arial" pitchFamily="34" charset="-122"/>
-                <a:cs typeface="Arial" pitchFamily="34" charset="-120"/>
-              </a:rPr>
-              <a:t>Underwood &amp; Underwood, Charles Lindbergh, 1927</a:t>
-            </a:r>
-            <a:endParaRPr lang="en-US" sz="950" dirty="0"/>
-          </a:p>
-        </p:txBody>
-      </p:sp>
-      <p:sp>
-        <p:nvSpPr>
-          <p:cNvPr id="4" name="Text 1"/>
-          <p:cNvSpPr/>
-          <p:nvPr/>
-        </p:nvSpPr>
-        <p:spPr>
-          <a:xfrm>
-            <a:off x="822960" y="685800"/>
-            <a:ext cx="5486400" cy="274320"/>
-          </a:xfrm>
-          <a:prstGeom prst="rect">
-            <a:avLst/>
-          </a:prstGeom>
-          <a:noFill/>
-          <a:ln/>
-        </p:spPr>
-        <p:txBody>
-          <a:bodyPr wrap="square" lIns="0" tIns="0" rIns="0" bIns="0" rtlCol="0" anchor="ctr"/>
-          <a:lstStyle/>
-          <a:p>
-            <a:pPr algn="l" indent="0" marL="0">
-              <a:buNone/>
-            </a:pPr>
-            <a:r>
-              <a:rPr lang="en-US" sz="1100" b="1" spc="250" kern="0" dirty="0">
-                <a:solidFill>
-                  <a:srgbClr val="4A6B5D"/>
-                </a:solidFill>
-                <a:latin typeface="Arial" pitchFamily="34" charset="0"/>
-                <a:ea typeface="Arial" pitchFamily="34" charset="-122"/>
-                <a:cs typeface="Arial" pitchFamily="34" charset="-120"/>
-              </a:rPr>
-              <a:t>SYNERGY, 1927</a:t>
-            </a:r>
-            <a:endParaRPr lang="en-US" sz="1100" dirty="0"/>
-          </a:p>
-        </p:txBody>
-      </p:sp>
-      <p:sp>
-        <p:nvSpPr>
-          <p:cNvPr id="5" name="Shape 2"/>
-          <p:cNvSpPr/>
-          <p:nvPr/>
-        </p:nvSpPr>
-        <p:spPr>
-          <a:xfrm>
-            <a:off x="822960" y="1051560"/>
-            <a:ext cx="6949440" cy="0"/>
-          </a:xfrm>
-          <a:prstGeom prst="line">
-            <a:avLst/>
-          </a:prstGeom>
-          <a:noFill/>
           <a:ln w="9525">
             <a:solidFill>
               <a:srgbClr val="D9D4C4"/>
@@ -3579,16 +5690,40 @@
           </a:ln>
         </p:spPr>
       </p:sp>
-      <p:sp>
-        <p:nvSpPr>
-          <p:cNvPr id="6" name="Text 3"/>
-          <p:cNvSpPr/>
-          <p:nvPr/>
-        </p:nvSpPr>
-        <p:spPr>
-          <a:xfrm>
-            <a:off x="822960" y="1234440"/>
-            <a:ext cx="6949440" cy="1371600"/>
+      <p:pic>
+        <p:nvPicPr>
+          <p:cNvPr id="9" name="Image 1" descr="/Users/dogan/Documents/Vaults/Courses/wiki/classes/media-studies/decks/_build/img/poster-supermario.jpg">    </p:cNvPr>
+          <p:cNvPicPr>
+            <a:picLocks noChangeAspect="1"/>
+          </p:cNvPicPr>
+          <p:nvPr/>
+        </p:nvPicPr>
+        <p:blipFill>
+          <a:blip r:embed="rId2"/>
+          <a:stretch>
+            <a:fillRect/>
+          </a:stretch>
+        </p:blipFill>
+        <p:spPr>
+          <a:xfrm>
+            <a:off x="8354251" y="1179576"/>
+            <a:ext cx="2493898" cy="3950208"/>
+          </a:xfrm>
+          <a:prstGeom prst="rect">
+            <a:avLst/>
+          </a:prstGeom>
+        </p:spPr>
+      </p:pic>
+      <p:sp>
+        <p:nvSpPr>
+          <p:cNvPr id="10" name="Text 6"/>
+          <p:cNvSpPr/>
+          <p:nvPr/>
+        </p:nvSpPr>
+        <p:spPr>
+          <a:xfrm>
+            <a:off x="7863840" y="5285232"/>
+            <a:ext cx="3474720" cy="457200"/>
           </a:xfrm>
           <a:prstGeom prst="rect">
             <a:avLst/>
@@ -3600,86 +5735,187 @@
           <a:bodyPr wrap="square" lIns="0" tIns="0" rIns="0" bIns="0" rtlCol="0" anchor="t"/>
           <a:lstStyle/>
           <a:p>
+            <a:pPr algn="ctr" indent="0" marL="0">
+              <a:lnSpc>
+                <a:spcPts val="1300"/>
+              </a:lnSpc>
+              <a:buNone/>
+            </a:pPr>
+            <a:r>
+              <a:rPr lang="en-US" sz="1000" dirty="0">
+                <a:solidFill>
+                  <a:srgbClr val="7A7F72"/>
+                </a:solidFill>
+                <a:latin typeface="Arial" pitchFamily="34" charset="0"/>
+                <a:ea typeface="Arial" pitchFamily="34" charset="-122"/>
+                <a:cs typeface="Arial" pitchFamily="34" charset="-120"/>
+              </a:rPr>
+              <a:t>The Super Mario Bros. Movie (2023): Nintendo + Illumination + Universal</a:t>
+            </a:r>
+            <a:endParaRPr lang="en-US" sz="1000" dirty="0"/>
+          </a:p>
+        </p:txBody>
+      </p:sp>
+      <p:sp>
+        <p:nvSpPr>
+          <p:cNvPr id="11" name="Shape 7"/>
+          <p:cNvSpPr/>
+          <p:nvPr/>
+        </p:nvSpPr>
+        <p:spPr>
+          <a:xfrm>
+            <a:off x="822960" y="5806440"/>
+            <a:ext cx="914400" cy="0"/>
+          </a:xfrm>
+          <a:prstGeom prst="line">
+            <a:avLst/>
+          </a:prstGeom>
+          <a:noFill/>
+          <a:ln w="31750">
+            <a:solidFill>
+              <a:srgbClr val="8C3A38"/>
+            </a:solidFill>
+            <a:prstDash val="solid"/>
+          </a:ln>
+        </p:spPr>
+      </p:sp>
+      <p:sp>
+        <p:nvSpPr>
+          <p:cNvPr id="12" name="Text 8"/>
+          <p:cNvSpPr/>
+          <p:nvPr/>
+        </p:nvSpPr>
+        <p:spPr>
+          <a:xfrm>
+            <a:off x="822960" y="5943600"/>
+            <a:ext cx="10543032" cy="411480"/>
+          </a:xfrm>
+          <a:prstGeom prst="rect">
+            <a:avLst/>
+          </a:prstGeom>
+          <a:noFill/>
+          <a:ln/>
+        </p:spPr>
+        <p:txBody>
+          <a:bodyPr wrap="square" lIns="0" tIns="0" rIns="0" bIns="0" rtlCol="0" anchor="ctr"/>
+          <a:lstStyle/>
+          <a:p>
             <a:pPr indent="0" marL="0">
-              <a:lnSpc>
-                <a:spcPts val="4400"/>
-              </a:lnSpc>
-              <a:buNone/>
-            </a:pPr>
-            <a:r>
-              <a:rPr lang="en-US" sz="4200" dirty="0">
-                <a:solidFill>
-                  <a:srgbClr val="24313F"/>
+              <a:buNone/>
+            </a:pPr>
+            <a:r>
+              <a:rPr lang="en-US" sz="1350" i="1" dirty="0">
+                <a:solidFill>
+                  <a:srgbClr val="4A6B5D"/>
                 </a:solidFill>
                 <a:latin typeface="Georgia" pitchFamily="34" charset="0"/>
                 <a:ea typeface="Georgia" pitchFamily="34" charset="-122"/>
                 <a:cs typeface="Georgia" pitchFamily="34" charset="-120"/>
               </a:rPr>
-              <a:t>Every channel,</a:t>
-            </a:r>
-            <a:endParaRPr lang="en-US" sz="4200" dirty="0"/>
-          </a:p>
+              <a:t>Integration: the owner holds game, studio and park. Synergy: each one sells the others. Convergence: one IP across console, cinema, phone and feed.</a:t>
+            </a:r>
+            <a:endParaRPr lang="en-US" sz="1350" dirty="0"/>
+          </a:p>
+        </p:txBody>
+      </p:sp>
+      <p:sp>
+        <p:nvSpPr>
+          <p:cNvPr id="13" name="Shape 9"/>
+          <p:cNvSpPr/>
+          <p:nvPr/>
+        </p:nvSpPr>
+        <p:spPr>
+          <a:xfrm>
+            <a:off x="822960" y="6382512"/>
+            <a:ext cx="10543032" cy="0"/>
+          </a:xfrm>
+          <a:prstGeom prst="line">
+            <a:avLst/>
+          </a:prstGeom>
+          <a:noFill/>
+          <a:ln w="9525">
+            <a:solidFill>
+              <a:srgbClr val="D9D4C4"/>
+            </a:solidFill>
+            <a:prstDash val="solid"/>
+          </a:ln>
+        </p:spPr>
+      </p:sp>
+      <p:sp>
+        <p:nvSpPr>
+          <p:cNvPr id="14" name="Text 10"/>
+          <p:cNvSpPr/>
+          <p:nvPr/>
+        </p:nvSpPr>
+        <p:spPr>
+          <a:xfrm>
+            <a:off x="822960" y="6419088"/>
+            <a:ext cx="7315200" cy="274320"/>
+          </a:xfrm>
+          <a:prstGeom prst="rect">
+            <a:avLst/>
+          </a:prstGeom>
+          <a:noFill/>
+          <a:ln/>
+        </p:spPr>
+        <p:txBody>
+          <a:bodyPr wrap="square" lIns="0" tIns="0" rIns="0" bIns="0" rtlCol="0" anchor="ctr"/>
+          <a:lstStyle/>
           <a:p>
             <a:pPr indent="0" marL="0">
-              <a:lnSpc>
-                <a:spcPts val="4400"/>
-              </a:lnSpc>
-              <a:buNone/>
-            </a:pPr>
-            <a:r>
-              <a:rPr lang="en-US" sz="4200" dirty="0">
-                <a:solidFill>
-                  <a:srgbClr val="24313F"/>
+              <a:buNone/>
+            </a:pPr>
+            <a:r>
+              <a:rPr lang="en-US" sz="900" spc="150" kern="0" dirty="0">
+                <a:solidFill>
+                  <a:srgbClr val="7A7F72"/>
+                </a:solidFill>
+                <a:latin typeface="Arial" pitchFamily="34" charset="0"/>
+                <a:ea typeface="Arial" pitchFamily="34" charset="-122"/>
+                <a:cs typeface="Arial" pitchFamily="34" charset="-120"/>
+              </a:rPr>
+              <a:t>MEDIA STUDIES 9607 · SEMESTER I</a:t>
+            </a:r>
+            <a:endParaRPr lang="en-US" sz="900" dirty="0"/>
+          </a:p>
+        </p:txBody>
+      </p:sp>
+      <p:sp>
+        <p:nvSpPr>
+          <p:cNvPr id="15" name="Text 11"/>
+          <p:cNvSpPr/>
+          <p:nvPr/>
+        </p:nvSpPr>
+        <p:spPr>
+          <a:xfrm>
+            <a:off x="10268712" y="6355080"/>
+            <a:ext cx="1097280" cy="365760"/>
+          </a:xfrm>
+          <a:prstGeom prst="rect">
+            <a:avLst/>
+          </a:prstGeom>
+          <a:noFill/>
+          <a:ln/>
+        </p:spPr>
+        <p:txBody>
+          <a:bodyPr wrap="square" lIns="0" tIns="0" rIns="0" bIns="0" rtlCol="0" anchor="ctr"/>
+          <a:lstStyle/>
+          <a:p>
+            <a:pPr algn="r" indent="0" marL="0">
+              <a:buNone/>
+            </a:pPr>
+            <a:r>
+              <a:rPr lang="en-US" sz="1600" dirty="0">
+                <a:solidFill>
+                  <a:srgbClr val="A3C1AD"/>
                 </a:solidFill>
                 <a:latin typeface="Georgia" pitchFamily="34" charset="0"/>
                 <a:ea typeface="Georgia" pitchFamily="34" charset="-122"/>
                 <a:cs typeface="Georgia" pitchFamily="34" charset="-120"/>
               </a:rPr>
-              <a:t>one story</a:t>
-            </a:r>
-            <a:endParaRPr lang="en-US" sz="4200" dirty="0"/>
-          </a:p>
-        </p:txBody>
-      </p:sp>
-      <p:sp>
-        <p:nvSpPr>
-          <p:cNvPr id="7" name="Text 4"/>
-          <p:cNvSpPr/>
-          <p:nvPr/>
-        </p:nvSpPr>
-        <p:spPr>
-          <a:xfrm>
-            <a:off x="822960" y="2743200"/>
-            <a:ext cx="7040880" cy="2743200"/>
-          </a:xfrm>
-          <a:prstGeom prst="rect">
-            <a:avLst/>
-          </a:prstGeom>
-          <a:noFill/>
-          <a:ln/>
-        </p:spPr>
-        <p:txBody>
-          <a:bodyPr wrap="square" lIns="0" tIns="0" rIns="0" bIns="0" rtlCol="0" anchor="t"/>
-          <a:lstStyle/>
-          <a:p>
-            <a:pPr indent="0" marL="0">
-              <a:lnSpc>
-                <a:spcPts val="2600"/>
-              </a:lnSpc>
-              <a:buNone/>
-            </a:pPr>
-            <a:r>
-              <a:rPr lang="en-US" sz="1800" dirty="0">
-                <a:solidFill>
-                  <a:srgbClr val="24313F"/>
-                </a:solidFill>
-                <a:latin typeface="Georgia" pitchFamily="34" charset="0"/>
-                <a:ea typeface="Georgia" pitchFamily="34" charset="-122"/>
-                <a:cs typeface="Georgia" pitchFamily="34" charset="-120"/>
-              </a:rPr>
-              <a:t>One man crosses an ocean, and every channel of the era sells the same story to itself: newsreels, press syndicates, radio, records, endorsements. The media event, the synergy, the convergence: all of it seventy years before the internet gave them names.</a:t>
-            </a:r>
-            <a:endParaRPr lang="en-US" sz="1800" dirty="0"/>
+              <a:t>02</a:t>
+            </a:r>
+            <a:endParaRPr lang="en-US" sz="1600" dirty="0"/>
           </a:p>
         </p:txBody>
       </p:sp>
@@ -3694,6 +5930,269 @@
 <file path=ppt/slides/slide5.xml><?xml version="1.0" encoding="utf-8"?>
 <p:sld xmlns:a="http://schemas.openxmlformats.org/drawingml/2006/main" xmlns:r="http://schemas.openxmlformats.org/officeDocument/2006/relationships" xmlns:p="http://schemas.openxmlformats.org/presentationml/2006/main">
   <p:cSld name="Slide 5">
+    <p:bg>
+      <p:bgPr>
+        <a:solidFill>
+          <a:srgbClr val="FAF8F1"/>
+        </a:solidFill>
+      </p:bgPr>
+    </p:bg>
+    <p:spTree>
+      <p:nvGrpSpPr>
+        <p:cNvPr id="1" name=""/>
+        <p:cNvGrpSpPr/>
+        <p:nvPr/>
+      </p:nvGrpSpPr>
+      <p:grpSpPr>
+        <a:xfrm>
+          <a:off x="0" y="0"/>
+          <a:ext cx="0" cy="0"/>
+          <a:chOff x="0" y="0"/>
+          <a:chExt cx="0" cy="0"/>
+        </a:xfrm>
+      </p:grpSpPr>
+      <p:pic>
+        <p:nvPicPr>
+          <p:cNvPr id="2" name="Image 0" descr="/Users/dogan/Documents/Vaults/Courses/wiki/classes/media-studies/decks/_build/img/crops/underwood-lindbergh_a591.jpg">    </p:cNvPr>
+          <p:cNvPicPr>
+            <a:picLocks noChangeAspect="1"/>
+          </p:cNvPicPr>
+          <p:nvPr/>
+        </p:nvPicPr>
+        <p:blipFill>
+          <a:blip r:embed="rId1"/>
+          <a:stretch>
+            <a:fillRect/>
+          </a:stretch>
+        </p:blipFill>
+        <p:spPr>
+          <a:xfrm>
+            <a:off x="8138160" y="0"/>
+            <a:ext cx="4050792" cy="6858000"/>
+          </a:xfrm>
+          <a:prstGeom prst="rect">
+            <a:avLst/>
+          </a:prstGeom>
+        </p:spPr>
+      </p:pic>
+      <p:sp>
+        <p:nvSpPr>
+          <p:cNvPr id="3" name="Text 0"/>
+          <p:cNvSpPr/>
+          <p:nvPr/>
+        </p:nvSpPr>
+        <p:spPr>
+          <a:xfrm>
+            <a:off x="8321040" y="6126480"/>
+            <a:ext cx="3685032" cy="365760"/>
+          </a:xfrm>
+          <a:prstGeom prst="rect">
+            <a:avLst/>
+          </a:prstGeom>
+          <a:solidFill>
+            <a:srgbClr val="FAF8F1"/>
+          </a:solidFill>
+          <a:ln/>
+        </p:spPr>
+        <p:txBody>
+          <a:bodyPr wrap="square" lIns="0" tIns="0" rIns="0" bIns="0" rtlCol="0" anchor="ctr"/>
+          <a:lstStyle/>
+          <a:p>
+            <a:pPr indent="0" marL="0">
+              <a:buNone/>
+            </a:pPr>
+            <a:r>
+              <a:rPr lang="en-US" sz="950" spc="50" kern="0" dirty="0">
+                <a:solidFill>
+                  <a:srgbClr val="7A7F72"/>
+                </a:solidFill>
+                <a:latin typeface="Arial" pitchFamily="34" charset="0"/>
+                <a:ea typeface="Arial" pitchFamily="34" charset="-122"/>
+                <a:cs typeface="Arial" pitchFamily="34" charset="-120"/>
+              </a:rPr>
+              <a:t>Underwood &amp; Underwood, Charles Lindbergh, 1927</a:t>
+            </a:r>
+            <a:endParaRPr lang="en-US" sz="950" dirty="0"/>
+          </a:p>
+        </p:txBody>
+      </p:sp>
+      <p:sp>
+        <p:nvSpPr>
+          <p:cNvPr id="4" name="Text 1"/>
+          <p:cNvSpPr/>
+          <p:nvPr/>
+        </p:nvSpPr>
+        <p:spPr>
+          <a:xfrm>
+            <a:off x="822960" y="685800"/>
+            <a:ext cx="5486400" cy="274320"/>
+          </a:xfrm>
+          <a:prstGeom prst="rect">
+            <a:avLst/>
+          </a:prstGeom>
+          <a:noFill/>
+          <a:ln/>
+        </p:spPr>
+        <p:txBody>
+          <a:bodyPr wrap="square" lIns="0" tIns="0" rIns="0" bIns="0" rtlCol="0" anchor="ctr"/>
+          <a:lstStyle/>
+          <a:p>
+            <a:pPr algn="l" indent="0" marL="0">
+              <a:buNone/>
+            </a:pPr>
+            <a:r>
+              <a:rPr lang="en-US" sz="1100" b="1" spc="250" kern="0" dirty="0">
+                <a:solidFill>
+                  <a:srgbClr val="4A6B5D"/>
+                </a:solidFill>
+                <a:latin typeface="Arial" pitchFamily="34" charset="0"/>
+                <a:ea typeface="Arial" pitchFamily="34" charset="-122"/>
+                <a:cs typeface="Arial" pitchFamily="34" charset="-120"/>
+              </a:rPr>
+              <a:t>SYNERGY, 1927</a:t>
+            </a:r>
+            <a:endParaRPr lang="en-US" sz="1100" dirty="0"/>
+          </a:p>
+        </p:txBody>
+      </p:sp>
+      <p:sp>
+        <p:nvSpPr>
+          <p:cNvPr id="5" name="Shape 2"/>
+          <p:cNvSpPr/>
+          <p:nvPr/>
+        </p:nvSpPr>
+        <p:spPr>
+          <a:xfrm>
+            <a:off x="822960" y="1051560"/>
+            <a:ext cx="6949440" cy="0"/>
+          </a:xfrm>
+          <a:prstGeom prst="line">
+            <a:avLst/>
+          </a:prstGeom>
+          <a:noFill/>
+          <a:ln w="9525">
+            <a:solidFill>
+              <a:srgbClr val="D9D4C4"/>
+            </a:solidFill>
+            <a:prstDash val="solid"/>
+          </a:ln>
+        </p:spPr>
+      </p:sp>
+      <p:sp>
+        <p:nvSpPr>
+          <p:cNvPr id="6" name="Text 3"/>
+          <p:cNvSpPr/>
+          <p:nvPr/>
+        </p:nvSpPr>
+        <p:spPr>
+          <a:xfrm>
+            <a:off x="822960" y="1234440"/>
+            <a:ext cx="6949440" cy="1371600"/>
+          </a:xfrm>
+          <a:prstGeom prst="rect">
+            <a:avLst/>
+          </a:prstGeom>
+          <a:noFill/>
+          <a:ln/>
+        </p:spPr>
+        <p:txBody>
+          <a:bodyPr wrap="square" lIns="0" tIns="0" rIns="0" bIns="0" rtlCol="0" anchor="t"/>
+          <a:lstStyle/>
+          <a:p>
+            <a:pPr indent="0" marL="0">
+              <a:lnSpc>
+                <a:spcPts val="4400"/>
+              </a:lnSpc>
+              <a:buNone/>
+            </a:pPr>
+            <a:r>
+              <a:rPr lang="en-US" sz="4200" dirty="0">
+                <a:solidFill>
+                  <a:srgbClr val="24313F"/>
+                </a:solidFill>
+                <a:latin typeface="Georgia" pitchFamily="34" charset="0"/>
+                <a:ea typeface="Georgia" pitchFamily="34" charset="-122"/>
+                <a:cs typeface="Georgia" pitchFamily="34" charset="-120"/>
+              </a:rPr>
+              <a:t>Every channel,</a:t>
+            </a:r>
+            <a:endParaRPr lang="en-US" sz="4200" dirty="0"/>
+          </a:p>
+          <a:p>
+            <a:pPr indent="0" marL="0">
+              <a:lnSpc>
+                <a:spcPts val="4400"/>
+              </a:lnSpc>
+              <a:buNone/>
+            </a:pPr>
+            <a:r>
+              <a:rPr lang="en-US" sz="4200" dirty="0">
+                <a:solidFill>
+                  <a:srgbClr val="24313F"/>
+                </a:solidFill>
+                <a:latin typeface="Georgia" pitchFamily="34" charset="0"/>
+                <a:ea typeface="Georgia" pitchFamily="34" charset="-122"/>
+                <a:cs typeface="Georgia" pitchFamily="34" charset="-120"/>
+              </a:rPr>
+              <a:t>one story</a:t>
+            </a:r>
+            <a:endParaRPr lang="en-US" sz="4200" dirty="0"/>
+          </a:p>
+        </p:txBody>
+      </p:sp>
+      <p:sp>
+        <p:nvSpPr>
+          <p:cNvPr id="7" name="Text 4"/>
+          <p:cNvSpPr/>
+          <p:nvPr/>
+        </p:nvSpPr>
+        <p:spPr>
+          <a:xfrm>
+            <a:off x="822960" y="2743200"/>
+            <a:ext cx="7040880" cy="2743200"/>
+          </a:xfrm>
+          <a:prstGeom prst="rect">
+            <a:avLst/>
+          </a:prstGeom>
+          <a:noFill/>
+          <a:ln/>
+        </p:spPr>
+        <p:txBody>
+          <a:bodyPr wrap="square" lIns="0" tIns="0" rIns="0" bIns="0" rtlCol="0" anchor="t"/>
+          <a:lstStyle/>
+          <a:p>
+            <a:pPr indent="0" marL="0">
+              <a:lnSpc>
+                <a:spcPts val="2600"/>
+              </a:lnSpc>
+              <a:buNone/>
+            </a:pPr>
+            <a:r>
+              <a:rPr lang="en-US" sz="1800" dirty="0">
+                <a:solidFill>
+                  <a:srgbClr val="24313F"/>
+                </a:solidFill>
+                <a:latin typeface="Georgia" pitchFamily="34" charset="0"/>
+                <a:ea typeface="Georgia" pitchFamily="34" charset="-122"/>
+                <a:cs typeface="Georgia" pitchFamily="34" charset="-120"/>
+              </a:rPr>
+              <a:t>One man crosses an ocean, and every channel of the era sells the same story to itself: newsreels, press syndicates, radio, records, endorsements. The media event, the synergy, the convergence: all of it seventy years before the internet gave them names.</a:t>
+            </a:r>
+            <a:endParaRPr lang="en-US" sz="1800" dirty="0"/>
+          </a:p>
+        </p:txBody>
+      </p:sp>
+    </p:spTree>
+  </p:cSld>
+  <p:clrMapOvr>
+    <a:masterClrMapping/>
+  </p:clrMapOvr>
+</p:sld>
+</file>
+
+<file path=ppt/slides/slide6.xml><?xml version="1.0" encoding="utf-8"?>
+<p:sld xmlns:a="http://schemas.openxmlformats.org/drawingml/2006/main" xmlns:r="http://schemas.openxmlformats.org/officeDocument/2006/relationships" xmlns:p="http://schemas.openxmlformats.org/presentationml/2006/main">
+  <p:cSld name="Slide 6">
     <p:bg>
       <p:bgPr>
         <a:solidFill>
@@ -3762,7 +6261,7 @@
         </p:nvSpPr>
         <p:spPr>
           <a:xfrm>
-            <a:off x="822960" y="1691640"/>
+            <a:off x="822960" y="1828800"/>
             <a:ext cx="10424160" cy="3291840"/>
           </a:xfrm>
           <a:prstGeom prst="rect">
@@ -3777,12 +6276,12 @@
           <a:p>
             <a:pPr indent="0" marL="0">
               <a:lnSpc>
-                <a:spcPts val="4200"/>
+                <a:spcPts val="4600"/>
               </a:lnSpc>
               <a:buNone/>
             </a:pPr>
             <a:r>
-              <a:rPr lang="en-US" sz="3200" dirty="0">
+              <a:rPr lang="en-US" sz="3600" dirty="0">
                 <a:solidFill>
                   <a:srgbClr val="24313F"/>
                 </a:solidFill>
@@ -3790,9 +6289,9 @@
                 <a:ea typeface="Georgia" pitchFamily="34" charset="-122"/>
                 <a:cs typeface="Georgia" pitchFamily="34" charset="-120"/>
               </a:rPr>
-              <a:t>It is not spontaneous, but comes about because someone has planned, planted, or incited it... primarily for the purpose of being reported.</a:t>
-            </a:r>
-            <a:endParaRPr lang="en-US" sz="3200" dirty="0"/>
+              <a:t>It is not spontaneous, but comes about because someone has planned, planted, or incited it.</a:t>
+            </a:r>
+            <a:endParaRPr lang="en-US" sz="3600" dirty="0"/>
           </a:p>
         </p:txBody>
       </p:sp>
@@ -3866,16 +6365,9 @@
 </p:sld>
 </file>
 
-<file path=ppt/slides/slide6.xml><?xml version="1.0" encoding="utf-8"?>
+<file path=ppt/slides/slide7.xml><?xml version="1.0" encoding="utf-8"?>
 <p:sld xmlns:a="http://schemas.openxmlformats.org/drawingml/2006/main" xmlns:r="http://schemas.openxmlformats.org/officeDocument/2006/relationships" xmlns:p="http://schemas.openxmlformats.org/presentationml/2006/main">
-  <p:cSld name="Slide 6">
-    <p:bg>
-      <p:bgPr>
-        <a:solidFill>
-          <a:srgbClr val="FAF8F1"/>
-        </a:solidFill>
-      </p:bgPr>
-    </p:bg>
+  <p:cSld name="Slide 7">
     <p:spTree>
       <p:nvGrpSpPr>
         <p:cNvPr id="1" name=""/>
@@ -3890,16 +6382,60 @@
           <a:chExt cx="0" cy="0"/>
         </a:xfrm>
       </p:grpSpPr>
-      <p:sp>
-        <p:nvSpPr>
-          <p:cNvPr id="2" name="Text 0"/>
-          <p:cNvSpPr/>
-          <p:nvPr/>
-        </p:nvSpPr>
-        <p:spPr>
-          <a:xfrm>
-            <a:off x="822960" y="457200"/>
-            <a:ext cx="6400800" cy="274320"/>
+      <p:pic>
+        <p:nvPicPr>
+          <p:cNvPr id="2" name="Image 0" descr="/Users/dogan/Documents/Vaults/Courses/wiki/classes/media-studies/decks/_build/img/crops/winogrand-pressconf_a1777.jpg">    </p:cNvPr>
+          <p:cNvPicPr>
+            <a:picLocks noChangeAspect="1"/>
+          </p:cNvPicPr>
+          <p:nvPr/>
+        </p:nvPicPr>
+        <p:blipFill>
+          <a:blip r:embed="rId1"/>
+          <a:stretch>
+            <a:fillRect/>
+          </a:stretch>
+        </p:blipFill>
+        <p:spPr>
+          <a:xfrm>
+            <a:off x="0" y="0"/>
+            <a:ext cx="12188952" cy="6858000"/>
+          </a:xfrm>
+          <a:prstGeom prst="rect">
+            <a:avLst/>
+          </a:prstGeom>
+        </p:spPr>
+      </p:pic>
+      <p:sp>
+        <p:nvSpPr>
+          <p:cNvPr id="3" name="Shape 0"/>
+          <p:cNvSpPr/>
+          <p:nvPr/>
+        </p:nvSpPr>
+        <p:spPr>
+          <a:xfrm>
+            <a:off x="502920" y="502920"/>
+            <a:ext cx="5120640" cy="502920"/>
+          </a:xfrm>
+          <a:prstGeom prst="rect">
+            <a:avLst/>
+          </a:prstGeom>
+          <a:solidFill>
+            <a:srgbClr val="FAF8F1"/>
+          </a:solidFill>
+          <a:ln/>
+        </p:spPr>
+      </p:sp>
+      <p:sp>
+        <p:nvSpPr>
+          <p:cNvPr id="4" name="Text 1"/>
+          <p:cNvSpPr/>
+          <p:nvPr/>
+        </p:nvSpPr>
+        <p:spPr>
+          <a:xfrm>
+            <a:off x="704088" y="521208"/>
+            <a:ext cx="4846320" cy="274320"/>
           </a:xfrm>
           <a:prstGeom prst="rect">
             <a:avLst/>
@@ -3923,7 +6459,7 @@
                 <a:ea typeface="Arial" pitchFamily="34" charset="-122"/>
                 <a:cs typeface="Arial" pitchFamily="34" charset="-120"/>
               </a:rPr>
-              <a:t>ONE INSTITUTION, END TO END</a:t>
+              <a:t>THE PSEUDO-EVENT, PHOTOGRAPHED</a:t>
             </a:r>
             <a:endParaRPr lang="en-US" sz="1100" dirty="0"/>
           </a:p>
@@ -3931,1131 +6467,40 @@
       </p:sp>
       <p:sp>
         <p:nvSpPr>
-          <p:cNvPr id="3" name="Text 1"/>
-          <p:cNvSpPr/>
-          <p:nvPr/>
-        </p:nvSpPr>
-        <p:spPr>
-          <a:xfrm>
-            <a:off x="6793992" y="457200"/>
-            <a:ext cx="4572000" cy="274320"/>
-          </a:xfrm>
-          <a:prstGeom prst="rect">
-            <a:avLst/>
-          </a:prstGeom>
-          <a:noFill/>
-          <a:ln/>
-        </p:spPr>
-        <p:txBody>
-          <a:bodyPr wrap="square" lIns="0" tIns="0" rIns="0" bIns="0" rtlCol="0" anchor="ctr"/>
-          <a:lstStyle/>
-          <a:p>
-            <a:pPr algn="r" indent="0" marL="0">
-              <a:buNone/>
-            </a:pPr>
-            <a:r>
-              <a:rPr lang="en-US" sz="1100" b="1" spc="250" kern="0" dirty="0">
-                <a:solidFill>
-                  <a:srgbClr val="7A7F72"/>
-                </a:solidFill>
-                <a:latin typeface="Arial" pitchFamily="34" charset="0"/>
-                <a:ea typeface="Arial" pitchFamily="34" charset="-122"/>
-                <a:cs typeface="Arial" pitchFamily="34" charset="-120"/>
-              </a:rPr>
-              <a:t>GREENLIGHT TO YOUR FEED</a:t>
-            </a:r>
-            <a:endParaRPr lang="en-US" sz="1100" dirty="0"/>
-          </a:p>
-        </p:txBody>
-      </p:sp>
-      <p:sp>
-        <p:nvSpPr>
-          <p:cNvPr id="4" name="Shape 2"/>
-          <p:cNvSpPr/>
-          <p:nvPr/>
-        </p:nvSpPr>
-        <p:spPr>
-          <a:xfrm>
-            <a:off x="822960" y="786384"/>
-            <a:ext cx="10543032" cy="0"/>
+          <p:cNvPr id="5" name="Shape 2"/>
+          <p:cNvSpPr/>
+          <p:nvPr/>
+        </p:nvSpPr>
+        <p:spPr>
+          <a:xfrm>
+            <a:off x="457200" y="5230368"/>
+            <a:ext cx="8778240" cy="1243584"/>
+          </a:xfrm>
+          <a:prstGeom prst="rect">
+            <a:avLst/>
+          </a:prstGeom>
+          <a:solidFill>
+            <a:srgbClr val="FAF8F1"/>
+          </a:solidFill>
+          <a:ln/>
+        </p:spPr>
+      </p:sp>
+      <p:sp>
+        <p:nvSpPr>
+          <p:cNvPr id="6" name="Shape 3"/>
+          <p:cNvSpPr/>
+          <p:nvPr/>
+        </p:nvSpPr>
+        <p:spPr>
+          <a:xfrm>
+            <a:off x="676656" y="5468112"/>
+            <a:ext cx="731520" cy="0"/>
           </a:xfrm>
           <a:prstGeom prst="line">
             <a:avLst/>
           </a:prstGeom>
           <a:noFill/>
-          <a:ln w="9525">
-            <a:solidFill>
-              <a:srgbClr val="D9D4C4"/>
-            </a:solidFill>
-            <a:prstDash val="solid"/>
-          </a:ln>
-        </p:spPr>
-      </p:sp>
-      <p:sp>
-        <p:nvSpPr>
-          <p:cNvPr id="5" name="Text 3"/>
-          <p:cNvSpPr/>
-          <p:nvPr/>
-        </p:nvSpPr>
-        <p:spPr>
-          <a:xfrm>
-            <a:off x="822960" y="932688"/>
-            <a:ext cx="10543032" cy="640080"/>
-          </a:xfrm>
-          <a:prstGeom prst="rect">
-            <a:avLst/>
-          </a:prstGeom>
-          <a:noFill/>
-          <a:ln/>
-        </p:spPr>
-        <p:txBody>
-          <a:bodyPr wrap="square" lIns="0" tIns="0" rIns="0" bIns="0" rtlCol="0" anchor="ctr"/>
-          <a:lstStyle/>
-          <a:p>
-            <a:pPr indent="0" marL="0">
-              <a:buNone/>
-            </a:pPr>
-            <a:r>
-              <a:rPr lang="en-US" sz="3200" dirty="0">
-                <a:solidFill>
-                  <a:srgbClr val="24313F"/>
-                </a:solidFill>
-                <a:latin typeface="Georgia" pitchFamily="34" charset="0"/>
-                <a:ea typeface="Georgia" pitchFamily="34" charset="-122"/>
-                <a:cs typeface="Georgia" pitchFamily="34" charset="-120"/>
-              </a:rPr>
-              <a:t>Follow it all the way through</a:t>
-            </a:r>
-            <a:endParaRPr lang="en-US" sz="3200" dirty="0"/>
-          </a:p>
-        </p:txBody>
-      </p:sp>
-      <p:sp>
-        <p:nvSpPr>
-          <p:cNvPr id="6" name="Shape 4"/>
-          <p:cNvSpPr/>
-          <p:nvPr/>
-        </p:nvSpPr>
-        <p:spPr>
-          <a:xfrm>
-            <a:off x="1701546" y="3383280"/>
-            <a:ext cx="8785860" cy="0"/>
-          </a:xfrm>
-          <a:prstGeom prst="line">
-            <a:avLst/>
-          </a:prstGeom>
-          <a:noFill/>
-          <a:ln w="19050">
-            <a:solidFill>
-              <a:srgbClr val="8AA394"/>
-            </a:solidFill>
-            <a:prstDash val="solid"/>
-          </a:ln>
-        </p:spPr>
-      </p:sp>
-      <p:sp>
-        <p:nvSpPr>
-          <p:cNvPr id="7" name="Text 5"/>
-          <p:cNvSpPr/>
-          <p:nvPr/>
-        </p:nvSpPr>
-        <p:spPr>
-          <a:xfrm>
-            <a:off x="1445514" y="3127248"/>
-            <a:ext cx="512064" cy="512064"/>
-          </a:xfrm>
-          <a:prstGeom prst="ellipse">
-            <a:avLst/>
-          </a:prstGeom>
-          <a:solidFill>
-            <a:srgbClr val="4A6B5D"/>
-          </a:solidFill>
-          <a:ln/>
-        </p:spPr>
-        <p:txBody>
-          <a:bodyPr wrap="square" lIns="0" tIns="0" rIns="0" bIns="0" rtlCol="0" anchor="ctr"/>
-          <a:lstStyle/>
-          <a:p>
-            <a:pPr algn="ctr" indent="0" marL="0">
-              <a:buNone/>
-            </a:pPr>
-            <a:r>
-              <a:rPr lang="en-US" sz="1800" dirty="0">
-                <a:solidFill>
-                  <a:srgbClr val="FAF8F1"/>
-                </a:solidFill>
-                <a:latin typeface="Georgia" pitchFamily="34" charset="0"/>
-                <a:ea typeface="Georgia" pitchFamily="34" charset="-122"/>
-                <a:cs typeface="Georgia" pitchFamily="34" charset="-120"/>
-              </a:rPr>
-              <a:t>1</a:t>
-            </a:r>
-            <a:endParaRPr lang="en-US" sz="1800" dirty="0"/>
-          </a:p>
-        </p:txBody>
-      </p:sp>
-      <p:sp>
-        <p:nvSpPr>
-          <p:cNvPr id="8" name="Text 6"/>
-          <p:cNvSpPr/>
-          <p:nvPr/>
-        </p:nvSpPr>
-        <p:spPr>
-          <a:xfrm>
-            <a:off x="868680" y="2468880"/>
-            <a:ext cx="1665732" cy="502920"/>
-          </a:xfrm>
-          <a:prstGeom prst="rect">
-            <a:avLst/>
-          </a:prstGeom>
-          <a:noFill/>
-          <a:ln/>
-        </p:spPr>
-        <p:txBody>
-          <a:bodyPr wrap="square" lIns="0" tIns="0" rIns="0" bIns="0" rtlCol="0" anchor="b"/>
-          <a:lstStyle/>
-          <a:p>
-            <a:pPr algn="ctr" indent="0" marL="0">
-              <a:buNone/>
-            </a:pPr>
-            <a:r>
-              <a:rPr lang="en-US" sz="1700" dirty="0">
-                <a:solidFill>
-                  <a:srgbClr val="24313F"/>
-                </a:solidFill>
-                <a:latin typeface="Georgia" pitchFamily="34" charset="0"/>
-                <a:ea typeface="Georgia" pitchFamily="34" charset="-122"/>
-                <a:cs typeface="Georgia" pitchFamily="34" charset="-120"/>
-              </a:rPr>
-              <a:t>Greenlight</a:t>
-            </a:r>
-            <a:endParaRPr lang="en-US" sz="1700" dirty="0"/>
-          </a:p>
-        </p:txBody>
-      </p:sp>
-      <p:sp>
-        <p:nvSpPr>
-          <p:cNvPr id="9" name="Text 7"/>
-          <p:cNvSpPr/>
-          <p:nvPr/>
-        </p:nvSpPr>
-        <p:spPr>
-          <a:xfrm>
-            <a:off x="868680" y="3767328"/>
-            <a:ext cx="1665732" cy="457200"/>
-          </a:xfrm>
-          <a:prstGeom prst="rect">
-            <a:avLst/>
-          </a:prstGeom>
-          <a:noFill/>
-          <a:ln/>
-        </p:spPr>
-        <p:txBody>
-          <a:bodyPr wrap="square" lIns="0" tIns="0" rIns="0" bIns="0" rtlCol="0" anchor="ctr"/>
-          <a:lstStyle/>
-          <a:p>
-            <a:pPr algn="ctr" indent="0" marL="0">
-              <a:buNone/>
-            </a:pPr>
-            <a:r>
-              <a:rPr lang="en-US" sz="1050" i="1" dirty="0">
-                <a:solidFill>
-                  <a:srgbClr val="7A7F72"/>
-                </a:solidFill>
-                <a:latin typeface="Arial" pitchFamily="34" charset="0"/>
-                <a:ea typeface="Arial" pitchFamily="34" charset="-122"/>
-                <a:cs typeface="Arial" pitchFamily="34" charset="-120"/>
-              </a:rPr>
-              <a:t>who says yes</a:t>
-            </a:r>
-            <a:endParaRPr lang="en-US" sz="1050" dirty="0"/>
-          </a:p>
-        </p:txBody>
-      </p:sp>
-      <p:sp>
-        <p:nvSpPr>
-          <p:cNvPr id="10" name="Text 8"/>
-          <p:cNvSpPr/>
-          <p:nvPr/>
-        </p:nvSpPr>
-        <p:spPr>
-          <a:xfrm>
-            <a:off x="3202686" y="3127248"/>
-            <a:ext cx="512064" cy="512064"/>
-          </a:xfrm>
-          <a:prstGeom prst="ellipse">
-            <a:avLst/>
-          </a:prstGeom>
-          <a:solidFill>
-            <a:srgbClr val="4A6B5D"/>
-          </a:solidFill>
-          <a:ln/>
-        </p:spPr>
-        <p:txBody>
-          <a:bodyPr wrap="square" lIns="0" tIns="0" rIns="0" bIns="0" rtlCol="0" anchor="ctr"/>
-          <a:lstStyle/>
-          <a:p>
-            <a:pPr algn="ctr" indent="0" marL="0">
-              <a:buNone/>
-            </a:pPr>
-            <a:r>
-              <a:rPr lang="en-US" sz="1800" dirty="0">
-                <a:solidFill>
-                  <a:srgbClr val="FAF8F1"/>
-                </a:solidFill>
-                <a:latin typeface="Georgia" pitchFamily="34" charset="0"/>
-                <a:ea typeface="Georgia" pitchFamily="34" charset="-122"/>
-                <a:cs typeface="Georgia" pitchFamily="34" charset="-120"/>
-              </a:rPr>
-              <a:t>2</a:t>
-            </a:r>
-            <a:endParaRPr lang="en-US" sz="1800" dirty="0"/>
-          </a:p>
-        </p:txBody>
-      </p:sp>
-      <p:sp>
-        <p:nvSpPr>
-          <p:cNvPr id="11" name="Text 9"/>
-          <p:cNvSpPr/>
-          <p:nvPr/>
-        </p:nvSpPr>
-        <p:spPr>
-          <a:xfrm>
-            <a:off x="2625852" y="2468880"/>
-            <a:ext cx="1665732" cy="502920"/>
-          </a:xfrm>
-          <a:prstGeom prst="rect">
-            <a:avLst/>
-          </a:prstGeom>
-          <a:noFill/>
-          <a:ln/>
-        </p:spPr>
-        <p:txBody>
-          <a:bodyPr wrap="square" lIns="0" tIns="0" rIns="0" bIns="0" rtlCol="0" anchor="b"/>
-          <a:lstStyle/>
-          <a:p>
-            <a:pPr algn="ctr" indent="0" marL="0">
-              <a:buNone/>
-            </a:pPr>
-            <a:r>
-              <a:rPr lang="en-US" sz="1700" dirty="0">
-                <a:solidFill>
-                  <a:srgbClr val="24313F"/>
-                </a:solidFill>
-                <a:latin typeface="Georgia" pitchFamily="34" charset="0"/>
-                <a:ea typeface="Georgia" pitchFamily="34" charset="-122"/>
-                <a:cs typeface="Georgia" pitchFamily="34" charset="-120"/>
-              </a:rPr>
-              <a:t>Produce</a:t>
-            </a:r>
-            <a:endParaRPr lang="en-US" sz="1700" dirty="0"/>
-          </a:p>
-        </p:txBody>
-      </p:sp>
-      <p:sp>
-        <p:nvSpPr>
-          <p:cNvPr id="12" name="Text 10"/>
-          <p:cNvSpPr/>
-          <p:nvPr/>
-        </p:nvSpPr>
-        <p:spPr>
-          <a:xfrm>
-            <a:off x="2625852" y="3767328"/>
-            <a:ext cx="1665732" cy="457200"/>
-          </a:xfrm>
-          <a:prstGeom prst="rect">
-            <a:avLst/>
-          </a:prstGeom>
-          <a:noFill/>
-          <a:ln/>
-        </p:spPr>
-        <p:txBody>
-          <a:bodyPr wrap="square" lIns="0" tIns="0" rIns="0" bIns="0" rtlCol="0" anchor="ctr"/>
-          <a:lstStyle/>
-          <a:p>
-            <a:pPr algn="ctr" indent="0" marL="0">
-              <a:buNone/>
-            </a:pPr>
-            <a:r>
-              <a:rPr lang="en-US" sz="1050" i="1" dirty="0">
-                <a:solidFill>
-                  <a:srgbClr val="7A7F72"/>
-                </a:solidFill>
-                <a:latin typeface="Arial" pitchFamily="34" charset="0"/>
-                <a:ea typeface="Arial" pitchFamily="34" charset="-122"/>
-                <a:cs typeface="Arial" pitchFamily="34" charset="-120"/>
-              </a:rPr>
-              <a:t>who makes it</a:t>
-            </a:r>
-            <a:endParaRPr lang="en-US" sz="1050" dirty="0"/>
-          </a:p>
-        </p:txBody>
-      </p:sp>
-      <p:sp>
-        <p:nvSpPr>
-          <p:cNvPr id="13" name="Text 11"/>
-          <p:cNvSpPr/>
-          <p:nvPr/>
-        </p:nvSpPr>
-        <p:spPr>
-          <a:xfrm>
-            <a:off x="4959858" y="3127248"/>
-            <a:ext cx="512064" cy="512064"/>
-          </a:xfrm>
-          <a:prstGeom prst="ellipse">
-            <a:avLst/>
-          </a:prstGeom>
-          <a:solidFill>
-            <a:srgbClr val="4A6B5D"/>
-          </a:solidFill>
-          <a:ln/>
-        </p:spPr>
-        <p:txBody>
-          <a:bodyPr wrap="square" lIns="0" tIns="0" rIns="0" bIns="0" rtlCol="0" anchor="ctr"/>
-          <a:lstStyle/>
-          <a:p>
-            <a:pPr algn="ctr" indent="0" marL="0">
-              <a:buNone/>
-            </a:pPr>
-            <a:r>
-              <a:rPr lang="en-US" sz="1800" dirty="0">
-                <a:solidFill>
-                  <a:srgbClr val="FAF8F1"/>
-                </a:solidFill>
-                <a:latin typeface="Georgia" pitchFamily="34" charset="0"/>
-                <a:ea typeface="Georgia" pitchFamily="34" charset="-122"/>
-                <a:cs typeface="Georgia" pitchFamily="34" charset="-120"/>
-              </a:rPr>
-              <a:t>3</a:t>
-            </a:r>
-            <a:endParaRPr lang="en-US" sz="1800" dirty="0"/>
-          </a:p>
-        </p:txBody>
-      </p:sp>
-      <p:sp>
-        <p:nvSpPr>
-          <p:cNvPr id="14" name="Text 12"/>
-          <p:cNvSpPr/>
-          <p:nvPr/>
-        </p:nvSpPr>
-        <p:spPr>
-          <a:xfrm>
-            <a:off x="4383024" y="2468880"/>
-            <a:ext cx="1665732" cy="502920"/>
-          </a:xfrm>
-          <a:prstGeom prst="rect">
-            <a:avLst/>
-          </a:prstGeom>
-          <a:noFill/>
-          <a:ln/>
-        </p:spPr>
-        <p:txBody>
-          <a:bodyPr wrap="square" lIns="0" tIns="0" rIns="0" bIns="0" rtlCol="0" anchor="b"/>
-          <a:lstStyle/>
-          <a:p>
-            <a:pPr algn="ctr" indent="0" marL="0">
-              <a:buNone/>
-            </a:pPr>
-            <a:r>
-              <a:rPr lang="en-US" sz="1700" dirty="0">
-                <a:solidFill>
-                  <a:srgbClr val="24313F"/>
-                </a:solidFill>
-                <a:latin typeface="Georgia" pitchFamily="34" charset="0"/>
-                <a:ea typeface="Georgia" pitchFamily="34" charset="-122"/>
-                <a:cs typeface="Georgia" pitchFamily="34" charset="-120"/>
-              </a:rPr>
-              <a:t>Distribute</a:t>
-            </a:r>
-            <a:endParaRPr lang="en-US" sz="1700" dirty="0"/>
-          </a:p>
-        </p:txBody>
-      </p:sp>
-      <p:sp>
-        <p:nvSpPr>
-          <p:cNvPr id="15" name="Text 13"/>
-          <p:cNvSpPr/>
-          <p:nvPr/>
-        </p:nvSpPr>
-        <p:spPr>
-          <a:xfrm>
-            <a:off x="4383024" y="3767328"/>
-            <a:ext cx="1665732" cy="457200"/>
-          </a:xfrm>
-          <a:prstGeom prst="rect">
-            <a:avLst/>
-          </a:prstGeom>
-          <a:noFill/>
-          <a:ln/>
-        </p:spPr>
-        <p:txBody>
-          <a:bodyPr wrap="square" lIns="0" tIns="0" rIns="0" bIns="0" rtlCol="0" anchor="ctr"/>
-          <a:lstStyle/>
-          <a:p>
-            <a:pPr algn="ctr" indent="0" marL="0">
-              <a:buNone/>
-            </a:pPr>
-            <a:r>
-              <a:rPr lang="en-US" sz="1050" i="1" dirty="0">
-                <a:solidFill>
-                  <a:srgbClr val="7A7F72"/>
-                </a:solidFill>
-                <a:latin typeface="Arial" pitchFamily="34" charset="0"/>
-                <a:ea typeface="Arial" pitchFamily="34" charset="-122"/>
-                <a:cs typeface="Arial" pitchFamily="34" charset="-120"/>
-              </a:rPr>
-              <a:t>who moves it</a:t>
-            </a:r>
-            <a:endParaRPr lang="en-US" sz="1050" dirty="0"/>
-          </a:p>
-        </p:txBody>
-      </p:sp>
-      <p:sp>
-        <p:nvSpPr>
-          <p:cNvPr id="16" name="Text 14"/>
-          <p:cNvSpPr/>
-          <p:nvPr/>
-        </p:nvSpPr>
-        <p:spPr>
-          <a:xfrm>
-            <a:off x="6717030" y="3127248"/>
-            <a:ext cx="512064" cy="512064"/>
-          </a:xfrm>
-          <a:prstGeom prst="ellipse">
-            <a:avLst/>
-          </a:prstGeom>
-          <a:solidFill>
-            <a:srgbClr val="4A6B5D"/>
-          </a:solidFill>
-          <a:ln/>
-        </p:spPr>
-        <p:txBody>
-          <a:bodyPr wrap="square" lIns="0" tIns="0" rIns="0" bIns="0" rtlCol="0" anchor="ctr"/>
-          <a:lstStyle/>
-          <a:p>
-            <a:pPr algn="ctr" indent="0" marL="0">
-              <a:buNone/>
-            </a:pPr>
-            <a:r>
-              <a:rPr lang="en-US" sz="1800" dirty="0">
-                <a:solidFill>
-                  <a:srgbClr val="FAF8F1"/>
-                </a:solidFill>
-                <a:latin typeface="Georgia" pitchFamily="34" charset="0"/>
-                <a:ea typeface="Georgia" pitchFamily="34" charset="-122"/>
-                <a:cs typeface="Georgia" pitchFamily="34" charset="-120"/>
-              </a:rPr>
-              <a:t>4</a:t>
-            </a:r>
-            <a:endParaRPr lang="en-US" sz="1800" dirty="0"/>
-          </a:p>
-        </p:txBody>
-      </p:sp>
-      <p:sp>
-        <p:nvSpPr>
-          <p:cNvPr id="17" name="Text 15"/>
-          <p:cNvSpPr/>
-          <p:nvPr/>
-        </p:nvSpPr>
-        <p:spPr>
-          <a:xfrm>
-            <a:off x="6140196" y="2468880"/>
-            <a:ext cx="1665732" cy="502920"/>
-          </a:xfrm>
-          <a:prstGeom prst="rect">
-            <a:avLst/>
-          </a:prstGeom>
-          <a:noFill/>
-          <a:ln/>
-        </p:spPr>
-        <p:txBody>
-          <a:bodyPr wrap="square" lIns="0" tIns="0" rIns="0" bIns="0" rtlCol="0" anchor="b"/>
-          <a:lstStyle/>
-          <a:p>
-            <a:pPr algn="ctr" indent="0" marL="0">
-              <a:buNone/>
-            </a:pPr>
-            <a:r>
-              <a:rPr lang="en-US" sz="1700" dirty="0">
-                <a:solidFill>
-                  <a:srgbClr val="24313F"/>
-                </a:solidFill>
-                <a:latin typeface="Georgia" pitchFamily="34" charset="0"/>
-                <a:ea typeface="Georgia" pitchFamily="34" charset="-122"/>
-                <a:cs typeface="Georgia" pitchFamily="34" charset="-120"/>
-              </a:rPr>
-              <a:t>Market</a:t>
-            </a:r>
-            <a:endParaRPr lang="en-US" sz="1700" dirty="0"/>
-          </a:p>
-        </p:txBody>
-      </p:sp>
-      <p:sp>
-        <p:nvSpPr>
-          <p:cNvPr id="18" name="Text 16"/>
-          <p:cNvSpPr/>
-          <p:nvPr/>
-        </p:nvSpPr>
-        <p:spPr>
-          <a:xfrm>
-            <a:off x="6140196" y="3767328"/>
-            <a:ext cx="1665732" cy="457200"/>
-          </a:xfrm>
-          <a:prstGeom prst="rect">
-            <a:avLst/>
-          </a:prstGeom>
-          <a:noFill/>
-          <a:ln/>
-        </p:spPr>
-        <p:txBody>
-          <a:bodyPr wrap="square" lIns="0" tIns="0" rIns="0" bIns="0" rtlCol="0" anchor="ctr"/>
-          <a:lstStyle/>
-          <a:p>
-            <a:pPr algn="ctr" indent="0" marL="0">
-              <a:buNone/>
-            </a:pPr>
-            <a:r>
-              <a:rPr lang="en-US" sz="1050" i="1" dirty="0">
-                <a:solidFill>
-                  <a:srgbClr val="7A7F72"/>
-                </a:solidFill>
-                <a:latin typeface="Arial" pitchFamily="34" charset="0"/>
-                <a:ea typeface="Arial" pitchFamily="34" charset="-122"/>
-                <a:cs typeface="Arial" pitchFamily="34" charset="-120"/>
-              </a:rPr>
-              <a:t>who sells it</a:t>
-            </a:r>
-            <a:endParaRPr lang="en-US" sz="1050" dirty="0"/>
-          </a:p>
-        </p:txBody>
-      </p:sp>
-      <p:sp>
-        <p:nvSpPr>
-          <p:cNvPr id="19" name="Text 17"/>
-          <p:cNvSpPr/>
-          <p:nvPr/>
-        </p:nvSpPr>
-        <p:spPr>
-          <a:xfrm>
-            <a:off x="8474202" y="3127248"/>
-            <a:ext cx="512064" cy="512064"/>
-          </a:xfrm>
-          <a:prstGeom prst="ellipse">
-            <a:avLst/>
-          </a:prstGeom>
-          <a:solidFill>
-            <a:srgbClr val="4A6B5D"/>
-          </a:solidFill>
-          <a:ln/>
-        </p:spPr>
-        <p:txBody>
-          <a:bodyPr wrap="square" lIns="0" tIns="0" rIns="0" bIns="0" rtlCol="0" anchor="ctr"/>
-          <a:lstStyle/>
-          <a:p>
-            <a:pPr algn="ctr" indent="0" marL="0">
-              <a:buNone/>
-            </a:pPr>
-            <a:r>
-              <a:rPr lang="en-US" sz="1800" dirty="0">
-                <a:solidFill>
-                  <a:srgbClr val="FAF8F1"/>
-                </a:solidFill>
-                <a:latin typeface="Georgia" pitchFamily="34" charset="0"/>
-                <a:ea typeface="Georgia" pitchFamily="34" charset="-122"/>
-                <a:cs typeface="Georgia" pitchFamily="34" charset="-120"/>
-              </a:rPr>
-              <a:t>5</a:t>
-            </a:r>
-            <a:endParaRPr lang="en-US" sz="1800" dirty="0"/>
-          </a:p>
-        </p:txBody>
-      </p:sp>
-      <p:sp>
-        <p:nvSpPr>
-          <p:cNvPr id="20" name="Text 18"/>
-          <p:cNvSpPr/>
-          <p:nvPr/>
-        </p:nvSpPr>
-        <p:spPr>
-          <a:xfrm>
-            <a:off x="7897368" y="2468880"/>
-            <a:ext cx="1665732" cy="502920"/>
-          </a:xfrm>
-          <a:prstGeom prst="rect">
-            <a:avLst/>
-          </a:prstGeom>
-          <a:noFill/>
-          <a:ln/>
-        </p:spPr>
-        <p:txBody>
-          <a:bodyPr wrap="square" lIns="0" tIns="0" rIns="0" bIns="0" rtlCol="0" anchor="b"/>
-          <a:lstStyle/>
-          <a:p>
-            <a:pPr algn="ctr" indent="0" marL="0">
-              <a:buNone/>
-            </a:pPr>
-            <a:r>
-              <a:rPr lang="en-US" sz="1700" dirty="0">
-                <a:solidFill>
-                  <a:srgbClr val="24313F"/>
-                </a:solidFill>
-                <a:latin typeface="Georgia" pitchFamily="34" charset="0"/>
-                <a:ea typeface="Georgia" pitchFamily="34" charset="-122"/>
-                <a:cs typeface="Georgia" pitchFamily="34" charset="-120"/>
-              </a:rPr>
-              <a:t>Meet</a:t>
-            </a:r>
-            <a:endParaRPr lang="en-US" sz="1700" dirty="0"/>
-          </a:p>
-        </p:txBody>
-      </p:sp>
-      <p:sp>
-        <p:nvSpPr>
-          <p:cNvPr id="21" name="Text 19"/>
-          <p:cNvSpPr/>
-          <p:nvPr/>
-        </p:nvSpPr>
-        <p:spPr>
-          <a:xfrm>
-            <a:off x="7897368" y="3767328"/>
-            <a:ext cx="1665732" cy="457200"/>
-          </a:xfrm>
-          <a:prstGeom prst="rect">
-            <a:avLst/>
-          </a:prstGeom>
-          <a:noFill/>
-          <a:ln/>
-        </p:spPr>
-        <p:txBody>
-          <a:bodyPr wrap="square" lIns="0" tIns="0" rIns="0" bIns="0" rtlCol="0" anchor="ctr"/>
-          <a:lstStyle/>
-          <a:p>
-            <a:pPr algn="ctr" indent="0" marL="0">
-              <a:buNone/>
-            </a:pPr>
-            <a:r>
-              <a:rPr lang="en-US" sz="1050" i="1" dirty="0">
-                <a:solidFill>
-                  <a:srgbClr val="7A7F72"/>
-                </a:solidFill>
-                <a:latin typeface="Arial" pitchFamily="34" charset="0"/>
-                <a:ea typeface="Arial" pitchFamily="34" charset="-122"/>
-                <a:cs typeface="Arial" pitchFamily="34" charset="-120"/>
-              </a:rPr>
-              <a:t>where you find it</a:t>
-            </a:r>
-            <a:endParaRPr lang="en-US" sz="1050" dirty="0"/>
-          </a:p>
-        </p:txBody>
-      </p:sp>
-      <p:sp>
-        <p:nvSpPr>
-          <p:cNvPr id="22" name="Text 20"/>
-          <p:cNvSpPr/>
-          <p:nvPr/>
-        </p:nvSpPr>
-        <p:spPr>
-          <a:xfrm>
-            <a:off x="10231374" y="3127248"/>
-            <a:ext cx="512064" cy="512064"/>
-          </a:xfrm>
-          <a:prstGeom prst="ellipse">
-            <a:avLst/>
-          </a:prstGeom>
-          <a:solidFill>
-            <a:srgbClr val="4A6B5D"/>
-          </a:solidFill>
-          <a:ln/>
-        </p:spPr>
-        <p:txBody>
-          <a:bodyPr wrap="square" lIns="0" tIns="0" rIns="0" bIns="0" rtlCol="0" anchor="ctr"/>
-          <a:lstStyle/>
-          <a:p>
-            <a:pPr algn="ctr" indent="0" marL="0">
-              <a:buNone/>
-            </a:pPr>
-            <a:r>
-              <a:rPr lang="en-US" sz="1800" dirty="0">
-                <a:solidFill>
-                  <a:srgbClr val="FAF8F1"/>
-                </a:solidFill>
-                <a:latin typeface="Georgia" pitchFamily="34" charset="0"/>
-                <a:ea typeface="Georgia" pitchFamily="34" charset="-122"/>
-                <a:cs typeface="Georgia" pitchFamily="34" charset="-120"/>
-              </a:rPr>
-              <a:t>6</a:t>
-            </a:r>
-            <a:endParaRPr lang="en-US" sz="1800" dirty="0"/>
-          </a:p>
-        </p:txBody>
-      </p:sp>
-      <p:sp>
-        <p:nvSpPr>
-          <p:cNvPr id="23" name="Text 21"/>
-          <p:cNvSpPr/>
-          <p:nvPr/>
-        </p:nvSpPr>
-        <p:spPr>
-          <a:xfrm>
-            <a:off x="9654540" y="2468880"/>
-            <a:ext cx="1665732" cy="502920"/>
-          </a:xfrm>
-          <a:prstGeom prst="rect">
-            <a:avLst/>
-          </a:prstGeom>
-          <a:noFill/>
-          <a:ln/>
-        </p:spPr>
-        <p:txBody>
-          <a:bodyPr wrap="square" lIns="0" tIns="0" rIns="0" bIns="0" rtlCol="0" anchor="b"/>
-          <a:lstStyle/>
-          <a:p>
-            <a:pPr algn="ctr" indent="0" marL="0">
-              <a:buNone/>
-            </a:pPr>
-            <a:r>
-              <a:rPr lang="en-US" sz="1700" dirty="0">
-                <a:solidFill>
-                  <a:srgbClr val="24313F"/>
-                </a:solidFill>
-                <a:latin typeface="Georgia" pitchFamily="34" charset="0"/>
-                <a:ea typeface="Georgia" pitchFamily="34" charset="-122"/>
-                <a:cs typeface="Georgia" pitchFamily="34" charset="-120"/>
-              </a:rPr>
-              <a:t>Revenue</a:t>
-            </a:r>
-            <a:endParaRPr lang="en-US" sz="1700" dirty="0"/>
-          </a:p>
-        </p:txBody>
-      </p:sp>
-      <p:sp>
-        <p:nvSpPr>
-          <p:cNvPr id="24" name="Text 22"/>
-          <p:cNvSpPr/>
-          <p:nvPr/>
-        </p:nvSpPr>
-        <p:spPr>
-          <a:xfrm>
-            <a:off x="9654540" y="3767328"/>
-            <a:ext cx="1665732" cy="457200"/>
-          </a:xfrm>
-          <a:prstGeom prst="rect">
-            <a:avLst/>
-          </a:prstGeom>
-          <a:noFill/>
-          <a:ln/>
-        </p:spPr>
-        <p:txBody>
-          <a:bodyPr wrap="square" lIns="0" tIns="0" rIns="0" bIns="0" rtlCol="0" anchor="ctr"/>
-          <a:lstStyle/>
-          <a:p>
-            <a:pPr algn="ctr" indent="0" marL="0">
-              <a:buNone/>
-            </a:pPr>
-            <a:r>
-              <a:rPr lang="en-US" sz="1050" i="1" dirty="0">
-                <a:solidFill>
-                  <a:srgbClr val="7A7F72"/>
-                </a:solidFill>
-                <a:latin typeface="Arial" pitchFamily="34" charset="0"/>
-                <a:ea typeface="Arial" pitchFamily="34" charset="-122"/>
-                <a:cs typeface="Arial" pitchFamily="34" charset="-120"/>
-              </a:rPr>
-              <a:t>who is paid</a:t>
-            </a:r>
-            <a:endParaRPr lang="en-US" sz="1050" dirty="0"/>
-          </a:p>
-        </p:txBody>
-      </p:sp>
-      <p:sp>
-        <p:nvSpPr>
-          <p:cNvPr id="25" name="Text 23"/>
-          <p:cNvSpPr/>
-          <p:nvPr/>
-        </p:nvSpPr>
-        <p:spPr>
-          <a:xfrm>
-            <a:off x="822960" y="5029200"/>
-            <a:ext cx="10543032" cy="457200"/>
-          </a:xfrm>
-          <a:prstGeom prst="rect">
-            <a:avLst/>
-          </a:prstGeom>
-          <a:noFill/>
-          <a:ln/>
-        </p:spPr>
-        <p:txBody>
-          <a:bodyPr wrap="square" lIns="0" tIns="0" rIns="0" bIns="0" rtlCol="0" anchor="ctr"/>
-          <a:lstStyle/>
-          <a:p>
-            <a:pPr indent="0" marL="0">
-              <a:buNone/>
-            </a:pPr>
-            <a:r>
-              <a:rPr lang="en-US" sz="1250" i="1" dirty="0">
-                <a:solidFill>
-                  <a:srgbClr val="7A7F72"/>
-                </a:solidFill>
-                <a:latin typeface="Arial" pitchFamily="34" charset="0"/>
-                <a:ea typeface="Arial" pitchFamily="34" charset="-122"/>
-                <a:cs typeface="Arial" pitchFamily="34" charset="-120"/>
-              </a:rPr>
-              <a:t>Each link annotated from the case-study documents, drawn as one chain on the board.</a:t>
-            </a:r>
-            <a:endParaRPr lang="en-US" sz="1250" dirty="0"/>
-          </a:p>
-        </p:txBody>
-      </p:sp>
-      <p:sp>
-        <p:nvSpPr>
-          <p:cNvPr id="26" name="Shape 24"/>
-          <p:cNvSpPr/>
-          <p:nvPr/>
-        </p:nvSpPr>
-        <p:spPr>
-          <a:xfrm>
-            <a:off x="822960" y="6382512"/>
-            <a:ext cx="10543032" cy="0"/>
-          </a:xfrm>
-          <a:prstGeom prst="line">
-            <a:avLst/>
-          </a:prstGeom>
-          <a:noFill/>
-          <a:ln w="9525">
-            <a:solidFill>
-              <a:srgbClr val="D9D4C4"/>
-            </a:solidFill>
-            <a:prstDash val="solid"/>
-          </a:ln>
-        </p:spPr>
-      </p:sp>
-      <p:sp>
-        <p:nvSpPr>
-          <p:cNvPr id="27" name="Text 25"/>
-          <p:cNvSpPr/>
-          <p:nvPr/>
-        </p:nvSpPr>
-        <p:spPr>
-          <a:xfrm>
-            <a:off x="822960" y="6419088"/>
-            <a:ext cx="7315200" cy="274320"/>
-          </a:xfrm>
-          <a:prstGeom prst="rect">
-            <a:avLst/>
-          </a:prstGeom>
-          <a:noFill/>
-          <a:ln/>
-        </p:spPr>
-        <p:txBody>
-          <a:bodyPr wrap="square" lIns="0" tIns="0" rIns="0" bIns="0" rtlCol="0" anchor="ctr"/>
-          <a:lstStyle/>
-          <a:p>
-            <a:pPr indent="0" marL="0">
-              <a:buNone/>
-            </a:pPr>
-            <a:r>
-              <a:rPr lang="en-US" sz="900" spc="150" kern="0" dirty="0">
-                <a:solidFill>
-                  <a:srgbClr val="7A7F72"/>
-                </a:solidFill>
-                <a:latin typeface="Arial" pitchFamily="34" charset="0"/>
-                <a:ea typeface="Arial" pitchFamily="34" charset="-122"/>
-                <a:cs typeface="Arial" pitchFamily="34" charset="-120"/>
-              </a:rPr>
-              <a:t>MEDIA STUDIES 9607 · SEMESTER I</a:t>
-            </a:r>
-            <a:endParaRPr lang="en-US" sz="900" dirty="0"/>
-          </a:p>
-        </p:txBody>
-      </p:sp>
-      <p:sp>
-        <p:nvSpPr>
-          <p:cNvPr id="28" name="Text 26"/>
-          <p:cNvSpPr/>
-          <p:nvPr/>
-        </p:nvSpPr>
-        <p:spPr>
-          <a:xfrm>
-            <a:off x="10268712" y="6355080"/>
-            <a:ext cx="1097280" cy="365760"/>
-          </a:xfrm>
-          <a:prstGeom prst="rect">
-            <a:avLst/>
-          </a:prstGeom>
-          <a:noFill/>
-          <a:ln/>
-        </p:spPr>
-        <p:txBody>
-          <a:bodyPr wrap="square" lIns="0" tIns="0" rIns="0" bIns="0" rtlCol="0" anchor="ctr"/>
-          <a:lstStyle/>
-          <a:p>
-            <a:pPr algn="r" indent="0" marL="0">
-              <a:buNone/>
-            </a:pPr>
-            <a:r>
-              <a:rPr lang="en-US" sz="1600" dirty="0">
-                <a:solidFill>
-                  <a:srgbClr val="A3C1AD"/>
-                </a:solidFill>
-                <a:latin typeface="Georgia" pitchFamily="34" charset="0"/>
-                <a:ea typeface="Georgia" pitchFamily="34" charset="-122"/>
-                <a:cs typeface="Georgia" pitchFamily="34" charset="-120"/>
-              </a:rPr>
-              <a:t>02</a:t>
-            </a:r>
-            <a:endParaRPr lang="en-US" sz="1600" dirty="0"/>
-          </a:p>
-        </p:txBody>
-      </p:sp>
-    </p:spTree>
-  </p:cSld>
-  <p:clrMapOvr>
-    <a:masterClrMapping/>
-  </p:clrMapOvr>
-</p:sld>
-</file>
-
-<file path=ppt/slides/slide7.xml><?xml version="1.0" encoding="utf-8"?>
-<p:sld xmlns:a="http://schemas.openxmlformats.org/drawingml/2006/main" xmlns:r="http://schemas.openxmlformats.org/officeDocument/2006/relationships" xmlns:p="http://schemas.openxmlformats.org/presentationml/2006/main">
-  <p:cSld name="Slide 7">
-    <p:bg>
-      <p:bgPr>
-        <a:solidFill>
-          <a:srgbClr val="E8EFE7"/>
-        </a:solidFill>
-      </p:bgPr>
-    </p:bg>
-    <p:spTree>
-      <p:nvGrpSpPr>
-        <p:cNvPr id="1" name=""/>
-        <p:cNvGrpSpPr/>
-        <p:nvPr/>
-      </p:nvGrpSpPr>
-      <p:grpSpPr>
-        <a:xfrm>
-          <a:off x="0" y="0"/>
-          <a:ext cx="0" cy="0"/>
-          <a:chOff x="0" y="0"/>
-          <a:chExt cx="0" cy="0"/>
-        </a:xfrm>
-      </p:grpSpPr>
-      <p:sp>
-        <p:nvSpPr>
-          <p:cNvPr id="2" name="Text 0"/>
-          <p:cNvSpPr/>
-          <p:nvPr/>
-        </p:nvSpPr>
-        <p:spPr>
-          <a:xfrm>
-            <a:off x="502920" y="548640"/>
-            <a:ext cx="1828800" cy="1828800"/>
-          </a:xfrm>
-          <a:prstGeom prst="rect">
-            <a:avLst/>
-          </a:prstGeom>
-          <a:noFill/>
-          <a:ln/>
-        </p:spPr>
-        <p:txBody>
-          <a:bodyPr wrap="square" lIns="0" tIns="0" rIns="0" bIns="0" rtlCol="0" anchor="t"/>
-          <a:lstStyle/>
-          <a:p>
-            <a:pPr indent="0" marL="0">
-              <a:buNone/>
-            </a:pPr>
-            <a:r>
-              <a:rPr lang="en-US" sz="20000" dirty="0">
-                <a:solidFill>
-                  <a:srgbClr val="A3C1AD"/>
-                </a:solidFill>
-                <a:latin typeface="Georgia" pitchFamily="34" charset="0"/>
-                <a:ea typeface="Georgia" pitchFamily="34" charset="-122"/>
-                <a:cs typeface="Georgia" pitchFamily="34" charset="-120"/>
-              </a:rPr>
-              <a:t>“</a:t>
-            </a:r>
-            <a:endParaRPr lang="en-US" sz="20000" dirty="0"/>
-          </a:p>
-        </p:txBody>
-      </p:sp>
-      <p:sp>
-        <p:nvSpPr>
-          <p:cNvPr id="3" name="Text 1"/>
-          <p:cNvSpPr/>
-          <p:nvPr/>
-        </p:nvSpPr>
-        <p:spPr>
-          <a:xfrm>
-            <a:off x="822960" y="1920240"/>
-            <a:ext cx="10424160" cy="2194560"/>
-          </a:xfrm>
-          <a:prstGeom prst="rect">
-            <a:avLst/>
-          </a:prstGeom>
-          <a:noFill/>
-          <a:ln/>
-        </p:spPr>
-        <p:txBody>
-          <a:bodyPr wrap="square" lIns="0" tIns="0" rIns="0" bIns="0" rtlCol="0" anchor="ctr"/>
-          <a:lstStyle/>
-          <a:p>
-            <a:pPr indent="0" marL="0">
-              <a:lnSpc>
-                <a:spcPts val="5200"/>
-              </a:lnSpc>
-              <a:buNone/>
-            </a:pPr>
-            <a:r>
-              <a:rPr lang="en-US" sz="4400" dirty="0">
-                <a:solidFill>
-                  <a:srgbClr val="24313F"/>
-                </a:solidFill>
-                <a:latin typeface="Georgia" pitchFamily="34" charset="0"/>
-                <a:ea typeface="Georgia" pitchFamily="34" charset="-122"/>
-                <a:cs typeface="Georgia" pitchFamily="34" charset="-120"/>
-              </a:rPr>
-              <a:t>Thirty minutes of notes.</a:t>
-            </a:r>
-            <a:endParaRPr lang="en-US" sz="4400" dirty="0"/>
-          </a:p>
-          <a:p>
-            <a:pPr indent="0" marL="0">
-              <a:lnSpc>
-                <a:spcPts val="5200"/>
-              </a:lnSpc>
-              <a:buNone/>
-            </a:pPr>
-            <a:r>
-              <a:rPr lang="en-US" sz="4400" dirty="0">
-                <a:solidFill>
-                  <a:srgbClr val="24313F"/>
-                </a:solidFill>
-                <a:latin typeface="Georgia" pitchFamily="34" charset="0"/>
-                <a:ea typeface="Georgia" pitchFamily="34" charset="-122"/>
-                <a:cs typeface="Georgia" pitchFamily="34" charset="-120"/>
-              </a:rPr>
-              <a:t>Forty-five of writing.</a:t>
-            </a:r>
-            <a:endParaRPr lang="en-US" sz="4400" dirty="0"/>
-          </a:p>
-        </p:txBody>
-      </p:sp>
-      <p:sp>
-        <p:nvSpPr>
-          <p:cNvPr id="4" name="Shape 2"/>
-          <p:cNvSpPr/>
-          <p:nvPr/>
-        </p:nvSpPr>
-        <p:spPr>
-          <a:xfrm>
-            <a:off x="822960" y="4663440"/>
-            <a:ext cx="914400" cy="0"/>
-          </a:xfrm>
-          <a:prstGeom prst="line">
-            <a:avLst/>
-          </a:prstGeom>
-          <a:noFill/>
-          <a:ln w="31750">
+          <a:ln w="28575">
             <a:solidFill>
               <a:srgbClr val="8C3A38"/>
             </a:solidFill>
@@ -5065,14 +6510,56 @@
       </p:sp>
       <p:sp>
         <p:nvSpPr>
-          <p:cNvPr id="5" name="Text 3"/>
-          <p:cNvSpPr/>
-          <p:nvPr/>
-        </p:nvSpPr>
-        <p:spPr>
-          <a:xfrm>
-            <a:off x="822960" y="4846320"/>
-            <a:ext cx="10241280" cy="457200"/>
+          <p:cNvPr id="7" name="Text 4"/>
+          <p:cNvSpPr/>
+          <p:nvPr/>
+        </p:nvSpPr>
+        <p:spPr>
+          <a:xfrm>
+            <a:off x="676656" y="5541264"/>
+            <a:ext cx="8339328" cy="585216"/>
+          </a:xfrm>
+          <a:prstGeom prst="rect">
+            <a:avLst/>
+          </a:prstGeom>
+          <a:noFill/>
+          <a:ln/>
+        </p:spPr>
+        <p:txBody>
+          <a:bodyPr wrap="square" lIns="0" tIns="0" rIns="0" bIns="0" rtlCol="0" anchor="t"/>
+          <a:lstStyle/>
+          <a:p>
+            <a:pPr indent="0" marL="0">
+              <a:lnSpc>
+                <a:spcPts val="2200"/>
+              </a:lnSpc>
+              <a:buNone/>
+            </a:pPr>
+            <a:r>
+              <a:rPr lang="en-US" sz="1800" dirty="0">
+                <a:solidFill>
+                  <a:srgbClr val="24313F"/>
+                </a:solidFill>
+                <a:latin typeface="Georgia" pitchFamily="34" charset="0"/>
+                <a:ea typeface="Georgia" pitchFamily="34" charset="-122"/>
+                <a:cs typeface="Georgia" pitchFamily="34" charset="-120"/>
+              </a:rPr>
+              <a:t>An event that exists in order to be reported: the press conference is its purest form.</a:t>
+            </a:r>
+            <a:endParaRPr lang="en-US" sz="1800" dirty="0"/>
+          </a:p>
+        </p:txBody>
+      </p:sp>
+      <p:sp>
+        <p:nvSpPr>
+          <p:cNvPr id="8" name="Text 5"/>
+          <p:cNvSpPr/>
+          <p:nvPr/>
+        </p:nvSpPr>
+        <p:spPr>
+          <a:xfrm>
+            <a:off x="676656" y="6181344"/>
+            <a:ext cx="8339328" cy="256032"/>
           </a:xfrm>
           <a:prstGeom prst="rect">
             <a:avLst/>
@@ -5088,17 +6575,17 @@
               <a:buNone/>
             </a:pPr>
             <a:r>
-              <a:rPr lang="en-US" sz="1400" spc="100" kern="0" dirty="0">
-                <a:solidFill>
-                  <a:srgbClr val="4A6B5D"/>
+              <a:rPr lang="en-US" sz="950" spc="50" kern="0" dirty="0">
+                <a:solidFill>
+                  <a:srgbClr val="7A7F72"/>
                 </a:solidFill>
                 <a:latin typeface="Arial" pitchFamily="34" charset="0"/>
                 <a:ea typeface="Arial" pitchFamily="34" charset="-122"/>
                 <a:cs typeface="Arial" pitchFamily="34" charset="-120"/>
               </a:rPr>
-              <a:t>A different skill from A1's single hour. The viewing window is for structured notes, not a transcript: the grid, not sentences.</a:t>
-            </a:r>
-            <a:endParaRPr lang="en-US" sz="1400" dirty="0"/>
+              <a:t>Garry Winogrand, Elliot Richardson Press Conference, Austin, 1973</a:t>
+            </a:r>
+            <a:endParaRPr lang="en-US" sz="950" dirty="0"/>
           </a:p>
         </p:txBody>
       </p:sp>
@@ -5167,7 +6654,7 @@
                 <a:ea typeface="Arial" pitchFamily="34" charset="-122"/>
                 <a:cs typeface="Arial" pitchFamily="34" charset="-120"/>
               </a:rPr>
-              <a:t>THE VIEWING-NOTES FRAME</a:t>
+              <a:t>ONE INSTITUTION, END TO END</a:t>
             </a:r>
             <a:endParaRPr lang="en-US" sz="1100" dirty="0"/>
           </a:p>
@@ -5206,7 +6693,7 @@
                 <a:ea typeface="Arial" pitchFamily="34" charset="-122"/>
                 <a:cs typeface="Arial" pitchFamily="34" charset="-120"/>
               </a:rPr>
-              <a:t>CAPTURE, DO NOT COMPOSE</a:t>
+              <a:t>GREENLIGHT TO YOUR FEED</a:t>
             </a:r>
             <a:endParaRPr lang="en-US" sz="1100" dirty="0"/>
           </a:p>
@@ -5268,7 +6755,7 @@
                 <a:ea typeface="Georgia" pitchFamily="34" charset="-122"/>
                 <a:cs typeface="Georgia" pitchFamily="34" charset="-120"/>
               </a:rPr>
-              <a:t>The four-family grid</a:t>
+              <a:t>Follow it all the way through</a:t>
             </a:r>
             <a:endParaRPr lang="en-US" sz="3200" dirty="0"/>
           </a:p>
@@ -5282,16 +6769,14 @@
         </p:nvSpPr>
         <p:spPr>
           <a:xfrm>
-            <a:off x="822960" y="1828800"/>
-            <a:ext cx="5088636" cy="1783080"/>
-          </a:xfrm>
-          <a:prstGeom prst="rect">
-            <a:avLst/>
-          </a:prstGeom>
-          <a:solidFill>
-            <a:srgbClr val="FAF8F1"/>
-          </a:solidFill>
-          <a:ln w="12700">
+            <a:off x="1701546" y="3383280"/>
+            <a:ext cx="8785860" cy="0"/>
+          </a:xfrm>
+          <a:prstGeom prst="line">
+            <a:avLst/>
+          </a:prstGeom>
+          <a:noFill/>
+          <a:ln w="19050">
             <a:solidFill>
               <a:srgbClr val="8AA394"/>
             </a:solidFill>
@@ -5307,47 +6792,761 @@
         </p:nvSpPr>
         <p:spPr>
           <a:xfrm>
-            <a:off x="1097280" y="2011680"/>
-            <a:ext cx="4539996" cy="457200"/>
-          </a:xfrm>
-          <a:prstGeom prst="rect">
-            <a:avLst/>
-          </a:prstGeom>
-          <a:noFill/>
+            <a:off x="1445514" y="3127248"/>
+            <a:ext cx="512064" cy="512064"/>
+          </a:xfrm>
+          <a:prstGeom prst="ellipse">
+            <a:avLst/>
+          </a:prstGeom>
+          <a:solidFill>
+            <a:srgbClr val="4A6B5D"/>
+          </a:solidFill>
           <a:ln/>
         </p:spPr>
         <p:txBody>
           <a:bodyPr wrap="square" lIns="0" tIns="0" rIns="0" bIns="0" rtlCol="0" anchor="ctr"/>
           <a:lstStyle/>
           <a:p>
-            <a:pPr indent="0" marL="0">
-              <a:buNone/>
-            </a:pPr>
-            <a:r>
-              <a:rPr lang="en-US" sz="2200" dirty="0">
-                <a:solidFill>
-                  <a:srgbClr val="4A6B5D"/>
+            <a:pPr algn="ctr" indent="0" marL="0">
+              <a:buNone/>
+            </a:pPr>
+            <a:r>
+              <a:rPr lang="en-US" sz="1800" dirty="0">
+                <a:solidFill>
+                  <a:srgbClr val="FAF8F1"/>
                 </a:solidFill>
                 <a:latin typeface="Georgia" pitchFamily="34" charset="0"/>
                 <a:ea typeface="Georgia" pitchFamily="34" charset="-122"/>
                 <a:cs typeface="Georgia" pitchFamily="34" charset="-120"/>
               </a:rPr>
-              <a:t>Technical</a:t>
-            </a:r>
-            <a:endParaRPr lang="en-US" sz="2200" dirty="0"/>
-          </a:p>
-        </p:txBody>
-      </p:sp>
-      <p:sp>
-        <p:nvSpPr>
-          <p:cNvPr id="8" name="Shape 6"/>
-          <p:cNvSpPr/>
-          <p:nvPr/>
-        </p:nvSpPr>
-        <p:spPr>
-          <a:xfrm>
-            <a:off x="1097280" y="2542032"/>
-            <a:ext cx="4539996" cy="0"/>
+              <a:t>1</a:t>
+            </a:r>
+            <a:endParaRPr lang="en-US" sz="1800" dirty="0"/>
+          </a:p>
+        </p:txBody>
+      </p:sp>
+      <p:sp>
+        <p:nvSpPr>
+          <p:cNvPr id="8" name="Text 6"/>
+          <p:cNvSpPr/>
+          <p:nvPr/>
+        </p:nvSpPr>
+        <p:spPr>
+          <a:xfrm>
+            <a:off x="868680" y="2468880"/>
+            <a:ext cx="1665732" cy="502920"/>
+          </a:xfrm>
+          <a:prstGeom prst="rect">
+            <a:avLst/>
+          </a:prstGeom>
+          <a:noFill/>
+          <a:ln/>
+        </p:spPr>
+        <p:txBody>
+          <a:bodyPr wrap="square" lIns="0" tIns="0" rIns="0" bIns="0" rtlCol="0" anchor="b"/>
+          <a:lstStyle/>
+          <a:p>
+            <a:pPr algn="ctr" indent="0" marL="0">
+              <a:buNone/>
+            </a:pPr>
+            <a:r>
+              <a:rPr lang="en-US" sz="1700" dirty="0">
+                <a:solidFill>
+                  <a:srgbClr val="24313F"/>
+                </a:solidFill>
+                <a:latin typeface="Georgia" pitchFamily="34" charset="0"/>
+                <a:ea typeface="Georgia" pitchFamily="34" charset="-122"/>
+                <a:cs typeface="Georgia" pitchFamily="34" charset="-120"/>
+              </a:rPr>
+              <a:t>Greenlight</a:t>
+            </a:r>
+            <a:endParaRPr lang="en-US" sz="1700" dirty="0"/>
+          </a:p>
+        </p:txBody>
+      </p:sp>
+      <p:sp>
+        <p:nvSpPr>
+          <p:cNvPr id="9" name="Text 7"/>
+          <p:cNvSpPr/>
+          <p:nvPr/>
+        </p:nvSpPr>
+        <p:spPr>
+          <a:xfrm>
+            <a:off x="868680" y="3767328"/>
+            <a:ext cx="1665732" cy="457200"/>
+          </a:xfrm>
+          <a:prstGeom prst="rect">
+            <a:avLst/>
+          </a:prstGeom>
+          <a:noFill/>
+          <a:ln/>
+        </p:spPr>
+        <p:txBody>
+          <a:bodyPr wrap="square" lIns="0" tIns="0" rIns="0" bIns="0" rtlCol="0" anchor="ctr"/>
+          <a:lstStyle/>
+          <a:p>
+            <a:pPr algn="ctr" indent="0" marL="0">
+              <a:buNone/>
+            </a:pPr>
+            <a:r>
+              <a:rPr lang="en-US" sz="1050" i="1" dirty="0">
+                <a:solidFill>
+                  <a:srgbClr val="7A7F72"/>
+                </a:solidFill>
+                <a:latin typeface="Arial" pitchFamily="34" charset="0"/>
+                <a:ea typeface="Arial" pitchFamily="34" charset="-122"/>
+                <a:cs typeface="Arial" pitchFamily="34" charset="-120"/>
+              </a:rPr>
+              <a:t>who says yes</a:t>
+            </a:r>
+            <a:endParaRPr lang="en-US" sz="1050" dirty="0"/>
+          </a:p>
+        </p:txBody>
+      </p:sp>
+      <p:sp>
+        <p:nvSpPr>
+          <p:cNvPr id="10" name="Text 8"/>
+          <p:cNvSpPr/>
+          <p:nvPr/>
+        </p:nvSpPr>
+        <p:spPr>
+          <a:xfrm>
+            <a:off x="3202686" y="3127248"/>
+            <a:ext cx="512064" cy="512064"/>
+          </a:xfrm>
+          <a:prstGeom prst="ellipse">
+            <a:avLst/>
+          </a:prstGeom>
+          <a:solidFill>
+            <a:srgbClr val="4A6B5D"/>
+          </a:solidFill>
+          <a:ln/>
+        </p:spPr>
+        <p:txBody>
+          <a:bodyPr wrap="square" lIns="0" tIns="0" rIns="0" bIns="0" rtlCol="0" anchor="ctr"/>
+          <a:lstStyle/>
+          <a:p>
+            <a:pPr algn="ctr" indent="0" marL="0">
+              <a:buNone/>
+            </a:pPr>
+            <a:r>
+              <a:rPr lang="en-US" sz="1800" dirty="0">
+                <a:solidFill>
+                  <a:srgbClr val="FAF8F1"/>
+                </a:solidFill>
+                <a:latin typeface="Georgia" pitchFamily="34" charset="0"/>
+                <a:ea typeface="Georgia" pitchFamily="34" charset="-122"/>
+                <a:cs typeface="Georgia" pitchFamily="34" charset="-120"/>
+              </a:rPr>
+              <a:t>2</a:t>
+            </a:r>
+            <a:endParaRPr lang="en-US" sz="1800" dirty="0"/>
+          </a:p>
+        </p:txBody>
+      </p:sp>
+      <p:sp>
+        <p:nvSpPr>
+          <p:cNvPr id="11" name="Text 9"/>
+          <p:cNvSpPr/>
+          <p:nvPr/>
+        </p:nvSpPr>
+        <p:spPr>
+          <a:xfrm>
+            <a:off x="2625852" y="2468880"/>
+            <a:ext cx="1665732" cy="502920"/>
+          </a:xfrm>
+          <a:prstGeom prst="rect">
+            <a:avLst/>
+          </a:prstGeom>
+          <a:noFill/>
+          <a:ln/>
+        </p:spPr>
+        <p:txBody>
+          <a:bodyPr wrap="square" lIns="0" tIns="0" rIns="0" bIns="0" rtlCol="0" anchor="b"/>
+          <a:lstStyle/>
+          <a:p>
+            <a:pPr algn="ctr" indent="0" marL="0">
+              <a:buNone/>
+            </a:pPr>
+            <a:r>
+              <a:rPr lang="en-US" sz="1700" dirty="0">
+                <a:solidFill>
+                  <a:srgbClr val="24313F"/>
+                </a:solidFill>
+                <a:latin typeface="Georgia" pitchFamily="34" charset="0"/>
+                <a:ea typeface="Georgia" pitchFamily="34" charset="-122"/>
+                <a:cs typeface="Georgia" pitchFamily="34" charset="-120"/>
+              </a:rPr>
+              <a:t>Produce</a:t>
+            </a:r>
+            <a:endParaRPr lang="en-US" sz="1700" dirty="0"/>
+          </a:p>
+        </p:txBody>
+      </p:sp>
+      <p:sp>
+        <p:nvSpPr>
+          <p:cNvPr id="12" name="Text 10"/>
+          <p:cNvSpPr/>
+          <p:nvPr/>
+        </p:nvSpPr>
+        <p:spPr>
+          <a:xfrm>
+            <a:off x="2625852" y="3767328"/>
+            <a:ext cx="1665732" cy="457200"/>
+          </a:xfrm>
+          <a:prstGeom prst="rect">
+            <a:avLst/>
+          </a:prstGeom>
+          <a:noFill/>
+          <a:ln/>
+        </p:spPr>
+        <p:txBody>
+          <a:bodyPr wrap="square" lIns="0" tIns="0" rIns="0" bIns="0" rtlCol="0" anchor="ctr"/>
+          <a:lstStyle/>
+          <a:p>
+            <a:pPr algn="ctr" indent="0" marL="0">
+              <a:buNone/>
+            </a:pPr>
+            <a:r>
+              <a:rPr lang="en-US" sz="1050" i="1" dirty="0">
+                <a:solidFill>
+                  <a:srgbClr val="7A7F72"/>
+                </a:solidFill>
+                <a:latin typeface="Arial" pitchFamily="34" charset="0"/>
+                <a:ea typeface="Arial" pitchFamily="34" charset="-122"/>
+                <a:cs typeface="Arial" pitchFamily="34" charset="-120"/>
+              </a:rPr>
+              <a:t>who makes it</a:t>
+            </a:r>
+            <a:endParaRPr lang="en-US" sz="1050" dirty="0"/>
+          </a:p>
+        </p:txBody>
+      </p:sp>
+      <p:sp>
+        <p:nvSpPr>
+          <p:cNvPr id="13" name="Text 11"/>
+          <p:cNvSpPr/>
+          <p:nvPr/>
+        </p:nvSpPr>
+        <p:spPr>
+          <a:xfrm>
+            <a:off x="4959858" y="3127248"/>
+            <a:ext cx="512064" cy="512064"/>
+          </a:xfrm>
+          <a:prstGeom prst="ellipse">
+            <a:avLst/>
+          </a:prstGeom>
+          <a:solidFill>
+            <a:srgbClr val="4A6B5D"/>
+          </a:solidFill>
+          <a:ln/>
+        </p:spPr>
+        <p:txBody>
+          <a:bodyPr wrap="square" lIns="0" tIns="0" rIns="0" bIns="0" rtlCol="0" anchor="ctr"/>
+          <a:lstStyle/>
+          <a:p>
+            <a:pPr algn="ctr" indent="0" marL="0">
+              <a:buNone/>
+            </a:pPr>
+            <a:r>
+              <a:rPr lang="en-US" sz="1800" dirty="0">
+                <a:solidFill>
+                  <a:srgbClr val="FAF8F1"/>
+                </a:solidFill>
+                <a:latin typeface="Georgia" pitchFamily="34" charset="0"/>
+                <a:ea typeface="Georgia" pitchFamily="34" charset="-122"/>
+                <a:cs typeface="Georgia" pitchFamily="34" charset="-120"/>
+              </a:rPr>
+              <a:t>3</a:t>
+            </a:r>
+            <a:endParaRPr lang="en-US" sz="1800" dirty="0"/>
+          </a:p>
+        </p:txBody>
+      </p:sp>
+      <p:sp>
+        <p:nvSpPr>
+          <p:cNvPr id="14" name="Text 12"/>
+          <p:cNvSpPr/>
+          <p:nvPr/>
+        </p:nvSpPr>
+        <p:spPr>
+          <a:xfrm>
+            <a:off x="4383024" y="2468880"/>
+            <a:ext cx="1665732" cy="502920"/>
+          </a:xfrm>
+          <a:prstGeom prst="rect">
+            <a:avLst/>
+          </a:prstGeom>
+          <a:noFill/>
+          <a:ln/>
+        </p:spPr>
+        <p:txBody>
+          <a:bodyPr wrap="square" lIns="0" tIns="0" rIns="0" bIns="0" rtlCol="0" anchor="b"/>
+          <a:lstStyle/>
+          <a:p>
+            <a:pPr algn="ctr" indent="0" marL="0">
+              <a:buNone/>
+            </a:pPr>
+            <a:r>
+              <a:rPr lang="en-US" sz="1700" dirty="0">
+                <a:solidFill>
+                  <a:srgbClr val="24313F"/>
+                </a:solidFill>
+                <a:latin typeface="Georgia" pitchFamily="34" charset="0"/>
+                <a:ea typeface="Georgia" pitchFamily="34" charset="-122"/>
+                <a:cs typeface="Georgia" pitchFamily="34" charset="-120"/>
+              </a:rPr>
+              <a:t>Distribute</a:t>
+            </a:r>
+            <a:endParaRPr lang="en-US" sz="1700" dirty="0"/>
+          </a:p>
+        </p:txBody>
+      </p:sp>
+      <p:sp>
+        <p:nvSpPr>
+          <p:cNvPr id="15" name="Text 13"/>
+          <p:cNvSpPr/>
+          <p:nvPr/>
+        </p:nvSpPr>
+        <p:spPr>
+          <a:xfrm>
+            <a:off x="4383024" y="3767328"/>
+            <a:ext cx="1665732" cy="457200"/>
+          </a:xfrm>
+          <a:prstGeom prst="rect">
+            <a:avLst/>
+          </a:prstGeom>
+          <a:noFill/>
+          <a:ln/>
+        </p:spPr>
+        <p:txBody>
+          <a:bodyPr wrap="square" lIns="0" tIns="0" rIns="0" bIns="0" rtlCol="0" anchor="ctr"/>
+          <a:lstStyle/>
+          <a:p>
+            <a:pPr algn="ctr" indent="0" marL="0">
+              <a:buNone/>
+            </a:pPr>
+            <a:r>
+              <a:rPr lang="en-US" sz="1050" i="1" dirty="0">
+                <a:solidFill>
+                  <a:srgbClr val="7A7F72"/>
+                </a:solidFill>
+                <a:latin typeface="Arial" pitchFamily="34" charset="0"/>
+                <a:ea typeface="Arial" pitchFamily="34" charset="-122"/>
+                <a:cs typeface="Arial" pitchFamily="34" charset="-120"/>
+              </a:rPr>
+              <a:t>who moves it</a:t>
+            </a:r>
+            <a:endParaRPr lang="en-US" sz="1050" dirty="0"/>
+          </a:p>
+        </p:txBody>
+      </p:sp>
+      <p:sp>
+        <p:nvSpPr>
+          <p:cNvPr id="16" name="Text 14"/>
+          <p:cNvSpPr/>
+          <p:nvPr/>
+        </p:nvSpPr>
+        <p:spPr>
+          <a:xfrm>
+            <a:off x="6717030" y="3127248"/>
+            <a:ext cx="512064" cy="512064"/>
+          </a:xfrm>
+          <a:prstGeom prst="ellipse">
+            <a:avLst/>
+          </a:prstGeom>
+          <a:solidFill>
+            <a:srgbClr val="4A6B5D"/>
+          </a:solidFill>
+          <a:ln/>
+        </p:spPr>
+        <p:txBody>
+          <a:bodyPr wrap="square" lIns="0" tIns="0" rIns="0" bIns="0" rtlCol="0" anchor="ctr"/>
+          <a:lstStyle/>
+          <a:p>
+            <a:pPr algn="ctr" indent="0" marL="0">
+              <a:buNone/>
+            </a:pPr>
+            <a:r>
+              <a:rPr lang="en-US" sz="1800" dirty="0">
+                <a:solidFill>
+                  <a:srgbClr val="FAF8F1"/>
+                </a:solidFill>
+                <a:latin typeface="Georgia" pitchFamily="34" charset="0"/>
+                <a:ea typeface="Georgia" pitchFamily="34" charset="-122"/>
+                <a:cs typeface="Georgia" pitchFamily="34" charset="-120"/>
+              </a:rPr>
+              <a:t>4</a:t>
+            </a:r>
+            <a:endParaRPr lang="en-US" sz="1800" dirty="0"/>
+          </a:p>
+        </p:txBody>
+      </p:sp>
+      <p:sp>
+        <p:nvSpPr>
+          <p:cNvPr id="17" name="Text 15"/>
+          <p:cNvSpPr/>
+          <p:nvPr/>
+        </p:nvSpPr>
+        <p:spPr>
+          <a:xfrm>
+            <a:off x="6140196" y="2468880"/>
+            <a:ext cx="1665732" cy="502920"/>
+          </a:xfrm>
+          <a:prstGeom prst="rect">
+            <a:avLst/>
+          </a:prstGeom>
+          <a:noFill/>
+          <a:ln/>
+        </p:spPr>
+        <p:txBody>
+          <a:bodyPr wrap="square" lIns="0" tIns="0" rIns="0" bIns="0" rtlCol="0" anchor="b"/>
+          <a:lstStyle/>
+          <a:p>
+            <a:pPr algn="ctr" indent="0" marL="0">
+              <a:buNone/>
+            </a:pPr>
+            <a:r>
+              <a:rPr lang="en-US" sz="1700" dirty="0">
+                <a:solidFill>
+                  <a:srgbClr val="24313F"/>
+                </a:solidFill>
+                <a:latin typeface="Georgia" pitchFamily="34" charset="0"/>
+                <a:ea typeface="Georgia" pitchFamily="34" charset="-122"/>
+                <a:cs typeface="Georgia" pitchFamily="34" charset="-120"/>
+              </a:rPr>
+              <a:t>Market</a:t>
+            </a:r>
+            <a:endParaRPr lang="en-US" sz="1700" dirty="0"/>
+          </a:p>
+        </p:txBody>
+      </p:sp>
+      <p:sp>
+        <p:nvSpPr>
+          <p:cNvPr id="18" name="Text 16"/>
+          <p:cNvSpPr/>
+          <p:nvPr/>
+        </p:nvSpPr>
+        <p:spPr>
+          <a:xfrm>
+            <a:off x="6140196" y="3767328"/>
+            <a:ext cx="1665732" cy="457200"/>
+          </a:xfrm>
+          <a:prstGeom prst="rect">
+            <a:avLst/>
+          </a:prstGeom>
+          <a:noFill/>
+          <a:ln/>
+        </p:spPr>
+        <p:txBody>
+          <a:bodyPr wrap="square" lIns="0" tIns="0" rIns="0" bIns="0" rtlCol="0" anchor="ctr"/>
+          <a:lstStyle/>
+          <a:p>
+            <a:pPr algn="ctr" indent="0" marL="0">
+              <a:buNone/>
+            </a:pPr>
+            <a:r>
+              <a:rPr lang="en-US" sz="1050" i="1" dirty="0">
+                <a:solidFill>
+                  <a:srgbClr val="7A7F72"/>
+                </a:solidFill>
+                <a:latin typeface="Arial" pitchFamily="34" charset="0"/>
+                <a:ea typeface="Arial" pitchFamily="34" charset="-122"/>
+                <a:cs typeface="Arial" pitchFamily="34" charset="-120"/>
+              </a:rPr>
+              <a:t>who sells it</a:t>
+            </a:r>
+            <a:endParaRPr lang="en-US" sz="1050" dirty="0"/>
+          </a:p>
+        </p:txBody>
+      </p:sp>
+      <p:sp>
+        <p:nvSpPr>
+          <p:cNvPr id="19" name="Text 17"/>
+          <p:cNvSpPr/>
+          <p:nvPr/>
+        </p:nvSpPr>
+        <p:spPr>
+          <a:xfrm>
+            <a:off x="8474202" y="3127248"/>
+            <a:ext cx="512064" cy="512064"/>
+          </a:xfrm>
+          <a:prstGeom prst="ellipse">
+            <a:avLst/>
+          </a:prstGeom>
+          <a:solidFill>
+            <a:srgbClr val="4A6B5D"/>
+          </a:solidFill>
+          <a:ln/>
+        </p:spPr>
+        <p:txBody>
+          <a:bodyPr wrap="square" lIns="0" tIns="0" rIns="0" bIns="0" rtlCol="0" anchor="ctr"/>
+          <a:lstStyle/>
+          <a:p>
+            <a:pPr algn="ctr" indent="0" marL="0">
+              <a:buNone/>
+            </a:pPr>
+            <a:r>
+              <a:rPr lang="en-US" sz="1800" dirty="0">
+                <a:solidFill>
+                  <a:srgbClr val="FAF8F1"/>
+                </a:solidFill>
+                <a:latin typeface="Georgia" pitchFamily="34" charset="0"/>
+                <a:ea typeface="Georgia" pitchFamily="34" charset="-122"/>
+                <a:cs typeface="Georgia" pitchFamily="34" charset="-120"/>
+              </a:rPr>
+              <a:t>5</a:t>
+            </a:r>
+            <a:endParaRPr lang="en-US" sz="1800" dirty="0"/>
+          </a:p>
+        </p:txBody>
+      </p:sp>
+      <p:sp>
+        <p:nvSpPr>
+          <p:cNvPr id="20" name="Text 18"/>
+          <p:cNvSpPr/>
+          <p:nvPr/>
+        </p:nvSpPr>
+        <p:spPr>
+          <a:xfrm>
+            <a:off x="7897368" y="2468880"/>
+            <a:ext cx="1665732" cy="502920"/>
+          </a:xfrm>
+          <a:prstGeom prst="rect">
+            <a:avLst/>
+          </a:prstGeom>
+          <a:noFill/>
+          <a:ln/>
+        </p:spPr>
+        <p:txBody>
+          <a:bodyPr wrap="square" lIns="0" tIns="0" rIns="0" bIns="0" rtlCol="0" anchor="b"/>
+          <a:lstStyle/>
+          <a:p>
+            <a:pPr algn="ctr" indent="0" marL="0">
+              <a:buNone/>
+            </a:pPr>
+            <a:r>
+              <a:rPr lang="en-US" sz="1700" dirty="0">
+                <a:solidFill>
+                  <a:srgbClr val="24313F"/>
+                </a:solidFill>
+                <a:latin typeface="Georgia" pitchFamily="34" charset="0"/>
+                <a:ea typeface="Georgia" pitchFamily="34" charset="-122"/>
+                <a:cs typeface="Georgia" pitchFamily="34" charset="-120"/>
+              </a:rPr>
+              <a:t>Meet</a:t>
+            </a:r>
+            <a:endParaRPr lang="en-US" sz="1700" dirty="0"/>
+          </a:p>
+        </p:txBody>
+      </p:sp>
+      <p:sp>
+        <p:nvSpPr>
+          <p:cNvPr id="21" name="Text 19"/>
+          <p:cNvSpPr/>
+          <p:nvPr/>
+        </p:nvSpPr>
+        <p:spPr>
+          <a:xfrm>
+            <a:off x="7897368" y="3767328"/>
+            <a:ext cx="1665732" cy="457200"/>
+          </a:xfrm>
+          <a:prstGeom prst="rect">
+            <a:avLst/>
+          </a:prstGeom>
+          <a:noFill/>
+          <a:ln/>
+        </p:spPr>
+        <p:txBody>
+          <a:bodyPr wrap="square" lIns="0" tIns="0" rIns="0" bIns="0" rtlCol="0" anchor="ctr"/>
+          <a:lstStyle/>
+          <a:p>
+            <a:pPr algn="ctr" indent="0" marL="0">
+              <a:buNone/>
+            </a:pPr>
+            <a:r>
+              <a:rPr lang="en-US" sz="1050" i="1" dirty="0">
+                <a:solidFill>
+                  <a:srgbClr val="7A7F72"/>
+                </a:solidFill>
+                <a:latin typeface="Arial" pitchFamily="34" charset="0"/>
+                <a:ea typeface="Arial" pitchFamily="34" charset="-122"/>
+                <a:cs typeface="Arial" pitchFamily="34" charset="-120"/>
+              </a:rPr>
+              <a:t>where you find it</a:t>
+            </a:r>
+            <a:endParaRPr lang="en-US" sz="1050" dirty="0"/>
+          </a:p>
+        </p:txBody>
+      </p:sp>
+      <p:sp>
+        <p:nvSpPr>
+          <p:cNvPr id="22" name="Text 20"/>
+          <p:cNvSpPr/>
+          <p:nvPr/>
+        </p:nvSpPr>
+        <p:spPr>
+          <a:xfrm>
+            <a:off x="10231374" y="3127248"/>
+            <a:ext cx="512064" cy="512064"/>
+          </a:xfrm>
+          <a:prstGeom prst="ellipse">
+            <a:avLst/>
+          </a:prstGeom>
+          <a:solidFill>
+            <a:srgbClr val="4A6B5D"/>
+          </a:solidFill>
+          <a:ln/>
+        </p:spPr>
+        <p:txBody>
+          <a:bodyPr wrap="square" lIns="0" tIns="0" rIns="0" bIns="0" rtlCol="0" anchor="ctr"/>
+          <a:lstStyle/>
+          <a:p>
+            <a:pPr algn="ctr" indent="0" marL="0">
+              <a:buNone/>
+            </a:pPr>
+            <a:r>
+              <a:rPr lang="en-US" sz="1800" dirty="0">
+                <a:solidFill>
+                  <a:srgbClr val="FAF8F1"/>
+                </a:solidFill>
+                <a:latin typeface="Georgia" pitchFamily="34" charset="0"/>
+                <a:ea typeface="Georgia" pitchFamily="34" charset="-122"/>
+                <a:cs typeface="Georgia" pitchFamily="34" charset="-120"/>
+              </a:rPr>
+              <a:t>6</a:t>
+            </a:r>
+            <a:endParaRPr lang="en-US" sz="1800" dirty="0"/>
+          </a:p>
+        </p:txBody>
+      </p:sp>
+      <p:sp>
+        <p:nvSpPr>
+          <p:cNvPr id="23" name="Text 21"/>
+          <p:cNvSpPr/>
+          <p:nvPr/>
+        </p:nvSpPr>
+        <p:spPr>
+          <a:xfrm>
+            <a:off x="9654540" y="2468880"/>
+            <a:ext cx="1665732" cy="502920"/>
+          </a:xfrm>
+          <a:prstGeom prst="rect">
+            <a:avLst/>
+          </a:prstGeom>
+          <a:noFill/>
+          <a:ln/>
+        </p:spPr>
+        <p:txBody>
+          <a:bodyPr wrap="square" lIns="0" tIns="0" rIns="0" bIns="0" rtlCol="0" anchor="b"/>
+          <a:lstStyle/>
+          <a:p>
+            <a:pPr algn="ctr" indent="0" marL="0">
+              <a:buNone/>
+            </a:pPr>
+            <a:r>
+              <a:rPr lang="en-US" sz="1700" dirty="0">
+                <a:solidFill>
+                  <a:srgbClr val="24313F"/>
+                </a:solidFill>
+                <a:latin typeface="Georgia" pitchFamily="34" charset="0"/>
+                <a:ea typeface="Georgia" pitchFamily="34" charset="-122"/>
+                <a:cs typeface="Georgia" pitchFamily="34" charset="-120"/>
+              </a:rPr>
+              <a:t>Revenue</a:t>
+            </a:r>
+            <a:endParaRPr lang="en-US" sz="1700" dirty="0"/>
+          </a:p>
+        </p:txBody>
+      </p:sp>
+      <p:sp>
+        <p:nvSpPr>
+          <p:cNvPr id="24" name="Text 22"/>
+          <p:cNvSpPr/>
+          <p:nvPr/>
+        </p:nvSpPr>
+        <p:spPr>
+          <a:xfrm>
+            <a:off x="9654540" y="3767328"/>
+            <a:ext cx="1665732" cy="457200"/>
+          </a:xfrm>
+          <a:prstGeom prst="rect">
+            <a:avLst/>
+          </a:prstGeom>
+          <a:noFill/>
+          <a:ln/>
+        </p:spPr>
+        <p:txBody>
+          <a:bodyPr wrap="square" lIns="0" tIns="0" rIns="0" bIns="0" rtlCol="0" anchor="ctr"/>
+          <a:lstStyle/>
+          <a:p>
+            <a:pPr algn="ctr" indent="0" marL="0">
+              <a:buNone/>
+            </a:pPr>
+            <a:r>
+              <a:rPr lang="en-US" sz="1050" i="1" dirty="0">
+                <a:solidFill>
+                  <a:srgbClr val="7A7F72"/>
+                </a:solidFill>
+                <a:latin typeface="Arial" pitchFamily="34" charset="0"/>
+                <a:ea typeface="Arial" pitchFamily="34" charset="-122"/>
+                <a:cs typeface="Arial" pitchFamily="34" charset="-120"/>
+              </a:rPr>
+              <a:t>who is paid</a:t>
+            </a:r>
+            <a:endParaRPr lang="en-US" sz="1050" dirty="0"/>
+          </a:p>
+        </p:txBody>
+      </p:sp>
+      <p:sp>
+        <p:nvSpPr>
+          <p:cNvPr id="25" name="Text 23"/>
+          <p:cNvSpPr/>
+          <p:nvPr/>
+        </p:nvSpPr>
+        <p:spPr>
+          <a:xfrm>
+            <a:off x="822960" y="5029200"/>
+            <a:ext cx="10543032" cy="457200"/>
+          </a:xfrm>
+          <a:prstGeom prst="rect">
+            <a:avLst/>
+          </a:prstGeom>
+          <a:noFill/>
+          <a:ln/>
+        </p:spPr>
+        <p:txBody>
+          <a:bodyPr wrap="square" lIns="0" tIns="0" rIns="0" bIns="0" rtlCol="0" anchor="ctr"/>
+          <a:lstStyle/>
+          <a:p>
+            <a:pPr indent="0" marL="0">
+              <a:buNone/>
+            </a:pPr>
+            <a:r>
+              <a:rPr lang="en-US" sz="1250" i="1" dirty="0">
+                <a:solidFill>
+                  <a:srgbClr val="7A7F72"/>
+                </a:solidFill>
+                <a:latin typeface="Arial" pitchFamily="34" charset="0"/>
+                <a:ea typeface="Arial" pitchFamily="34" charset="-122"/>
+                <a:cs typeface="Arial" pitchFamily="34" charset="-120"/>
+              </a:rPr>
+              <a:t>Each link annotated from the case-study documents, drawn as one chain on the board.</a:t>
+            </a:r>
+            <a:endParaRPr lang="en-US" sz="1250" dirty="0"/>
+          </a:p>
+        </p:txBody>
+      </p:sp>
+      <p:sp>
+        <p:nvSpPr>
+          <p:cNvPr id="26" name="Shape 24"/>
+          <p:cNvSpPr/>
+          <p:nvPr/>
+        </p:nvSpPr>
+        <p:spPr>
+          <a:xfrm>
+            <a:off x="822960" y="6382512"/>
+            <a:ext cx="10543032" cy="0"/>
           </a:xfrm>
           <a:prstGeom prst="line">
             <a:avLst/>
@@ -5363,62 +7562,14 @@
       </p:sp>
       <p:sp>
         <p:nvSpPr>
-          <p:cNvPr id="9" name="Shape 7"/>
-          <p:cNvSpPr/>
-          <p:nvPr/>
-        </p:nvSpPr>
-        <p:spPr>
-          <a:xfrm>
-            <a:off x="1097280" y="2999232"/>
-            <a:ext cx="4539996" cy="0"/>
-          </a:xfrm>
-          <a:prstGeom prst="line">
-            <a:avLst/>
-          </a:prstGeom>
-          <a:noFill/>
-          <a:ln w="9525">
-            <a:solidFill>
-              <a:srgbClr val="D9D4C4"/>
-            </a:solidFill>
-            <a:prstDash val="solid"/>
-          </a:ln>
-        </p:spPr>
-      </p:sp>
-      <p:sp>
-        <p:nvSpPr>
-          <p:cNvPr id="10" name="Shape 8"/>
-          <p:cNvSpPr/>
-          <p:nvPr/>
-        </p:nvSpPr>
-        <p:spPr>
-          <a:xfrm>
-            <a:off x="6277356" y="1828800"/>
-            <a:ext cx="5088636" cy="1783080"/>
-          </a:xfrm>
-          <a:prstGeom prst="rect">
-            <a:avLst/>
-          </a:prstGeom>
-          <a:solidFill>
-            <a:srgbClr val="FAF8F1"/>
-          </a:solidFill>
-          <a:ln w="12700">
-            <a:solidFill>
-              <a:srgbClr val="8AA394"/>
-            </a:solidFill>
-            <a:prstDash val="solid"/>
-          </a:ln>
-        </p:spPr>
-      </p:sp>
-      <p:sp>
-        <p:nvSpPr>
-          <p:cNvPr id="11" name="Text 9"/>
-          <p:cNvSpPr/>
-          <p:nvPr/>
-        </p:nvSpPr>
-        <p:spPr>
-          <a:xfrm>
-            <a:off x="6551676" y="2011680"/>
-            <a:ext cx="4539996" cy="457200"/>
+          <p:cNvPr id="27" name="Text 25"/>
+          <p:cNvSpPr/>
+          <p:nvPr/>
+        </p:nvSpPr>
+        <p:spPr>
+          <a:xfrm>
+            <a:off x="822960" y="6419088"/>
+            <a:ext cx="7315200" cy="274320"/>
           </a:xfrm>
           <a:prstGeom prst="rect">
             <a:avLst/>
@@ -5434,312 +7585,7 @@
               <a:buNone/>
             </a:pPr>
             <a:r>
-              <a:rPr lang="en-US" sz="2200" dirty="0">
-                <a:solidFill>
-                  <a:srgbClr val="4A6B5D"/>
-                </a:solidFill>
-                <a:latin typeface="Georgia" pitchFamily="34" charset="0"/>
-                <a:ea typeface="Georgia" pitchFamily="34" charset="-122"/>
-                <a:cs typeface="Georgia" pitchFamily="34" charset="-120"/>
-              </a:rPr>
-              <a:t>Symbolic</a:t>
-            </a:r>
-            <a:endParaRPr lang="en-US" sz="2200" dirty="0"/>
-          </a:p>
-        </p:txBody>
-      </p:sp>
-      <p:sp>
-        <p:nvSpPr>
-          <p:cNvPr id="12" name="Shape 10"/>
-          <p:cNvSpPr/>
-          <p:nvPr/>
-        </p:nvSpPr>
-        <p:spPr>
-          <a:xfrm>
-            <a:off x="6551676" y="2542032"/>
-            <a:ext cx="4539996" cy="0"/>
-          </a:xfrm>
-          <a:prstGeom prst="line">
-            <a:avLst/>
-          </a:prstGeom>
-          <a:noFill/>
-          <a:ln w="9525">
-            <a:solidFill>
-              <a:srgbClr val="D9D4C4"/>
-            </a:solidFill>
-            <a:prstDash val="solid"/>
-          </a:ln>
-        </p:spPr>
-      </p:sp>
-      <p:sp>
-        <p:nvSpPr>
-          <p:cNvPr id="13" name="Shape 11"/>
-          <p:cNvSpPr/>
-          <p:nvPr/>
-        </p:nvSpPr>
-        <p:spPr>
-          <a:xfrm>
-            <a:off x="6551676" y="2999232"/>
-            <a:ext cx="4539996" cy="0"/>
-          </a:xfrm>
-          <a:prstGeom prst="line">
-            <a:avLst/>
-          </a:prstGeom>
-          <a:noFill/>
-          <a:ln w="9525">
-            <a:solidFill>
-              <a:srgbClr val="D9D4C4"/>
-            </a:solidFill>
-            <a:prstDash val="solid"/>
-          </a:ln>
-        </p:spPr>
-      </p:sp>
-      <p:sp>
-        <p:nvSpPr>
-          <p:cNvPr id="14" name="Shape 12"/>
-          <p:cNvSpPr/>
-          <p:nvPr/>
-        </p:nvSpPr>
-        <p:spPr>
-          <a:xfrm>
-            <a:off x="822960" y="3886200"/>
-            <a:ext cx="5088636" cy="1783080"/>
-          </a:xfrm>
-          <a:prstGeom prst="rect">
-            <a:avLst/>
-          </a:prstGeom>
-          <a:solidFill>
-            <a:srgbClr val="FAF8F1"/>
-          </a:solidFill>
-          <a:ln w="12700">
-            <a:solidFill>
-              <a:srgbClr val="8AA394"/>
-            </a:solidFill>
-            <a:prstDash val="solid"/>
-          </a:ln>
-        </p:spPr>
-      </p:sp>
-      <p:sp>
-        <p:nvSpPr>
-          <p:cNvPr id="15" name="Text 13"/>
-          <p:cNvSpPr/>
-          <p:nvPr/>
-        </p:nvSpPr>
-        <p:spPr>
-          <a:xfrm>
-            <a:off x="1097280" y="4069080"/>
-            <a:ext cx="4539996" cy="457200"/>
-          </a:xfrm>
-          <a:prstGeom prst="rect">
-            <a:avLst/>
-          </a:prstGeom>
-          <a:noFill/>
-          <a:ln/>
-        </p:spPr>
-        <p:txBody>
-          <a:bodyPr wrap="square" lIns="0" tIns="0" rIns="0" bIns="0" rtlCol="0" anchor="ctr"/>
-          <a:lstStyle/>
-          <a:p>
-            <a:pPr indent="0" marL="0">
-              <a:buNone/>
-            </a:pPr>
-            <a:r>
-              <a:rPr lang="en-US" sz="2200" dirty="0">
-                <a:solidFill>
-                  <a:srgbClr val="4A6B5D"/>
-                </a:solidFill>
-                <a:latin typeface="Georgia" pitchFamily="34" charset="0"/>
-                <a:ea typeface="Georgia" pitchFamily="34" charset="-122"/>
-                <a:cs typeface="Georgia" pitchFamily="34" charset="-120"/>
-              </a:rPr>
-              <a:t>Written</a:t>
-            </a:r>
-            <a:endParaRPr lang="en-US" sz="2200" dirty="0"/>
-          </a:p>
-        </p:txBody>
-      </p:sp>
-      <p:sp>
-        <p:nvSpPr>
-          <p:cNvPr id="16" name="Shape 14"/>
-          <p:cNvSpPr/>
-          <p:nvPr/>
-        </p:nvSpPr>
-        <p:spPr>
-          <a:xfrm>
-            <a:off x="1097280" y="4599432"/>
-            <a:ext cx="4539996" cy="0"/>
-          </a:xfrm>
-          <a:prstGeom prst="line">
-            <a:avLst/>
-          </a:prstGeom>
-          <a:noFill/>
-          <a:ln w="9525">
-            <a:solidFill>
-              <a:srgbClr val="D9D4C4"/>
-            </a:solidFill>
-            <a:prstDash val="solid"/>
-          </a:ln>
-        </p:spPr>
-      </p:sp>
-      <p:sp>
-        <p:nvSpPr>
-          <p:cNvPr id="17" name="Shape 15"/>
-          <p:cNvSpPr/>
-          <p:nvPr/>
-        </p:nvSpPr>
-        <p:spPr>
-          <a:xfrm>
-            <a:off x="1097280" y="5056632"/>
-            <a:ext cx="4539996" cy="0"/>
-          </a:xfrm>
-          <a:prstGeom prst="line">
-            <a:avLst/>
-          </a:prstGeom>
-          <a:noFill/>
-          <a:ln w="9525">
-            <a:solidFill>
-              <a:srgbClr val="D9D4C4"/>
-            </a:solidFill>
-            <a:prstDash val="solid"/>
-          </a:ln>
-        </p:spPr>
-      </p:sp>
-      <p:sp>
-        <p:nvSpPr>
-          <p:cNvPr id="18" name="Shape 16"/>
-          <p:cNvSpPr/>
-          <p:nvPr/>
-        </p:nvSpPr>
-        <p:spPr>
-          <a:xfrm>
-            <a:off x="6277356" y="3886200"/>
-            <a:ext cx="5088636" cy="1783080"/>
-          </a:xfrm>
-          <a:prstGeom prst="rect">
-            <a:avLst/>
-          </a:prstGeom>
-          <a:solidFill>
-            <a:srgbClr val="FAF8F1"/>
-          </a:solidFill>
-          <a:ln w="12700">
-            <a:solidFill>
-              <a:srgbClr val="8AA394"/>
-            </a:solidFill>
-            <a:prstDash val="solid"/>
-          </a:ln>
-        </p:spPr>
-      </p:sp>
-      <p:sp>
-        <p:nvSpPr>
-          <p:cNvPr id="19" name="Text 17"/>
-          <p:cNvSpPr/>
-          <p:nvPr/>
-        </p:nvSpPr>
-        <p:spPr>
-          <a:xfrm>
-            <a:off x="6551676" y="4069080"/>
-            <a:ext cx="4539996" cy="457200"/>
-          </a:xfrm>
-          <a:prstGeom prst="rect">
-            <a:avLst/>
-          </a:prstGeom>
-          <a:noFill/>
-          <a:ln/>
-        </p:spPr>
-        <p:txBody>
-          <a:bodyPr wrap="square" lIns="0" tIns="0" rIns="0" bIns="0" rtlCol="0" anchor="ctr"/>
-          <a:lstStyle/>
-          <a:p>
-            <a:pPr indent="0" marL="0">
-              <a:buNone/>
-            </a:pPr>
-            <a:r>
-              <a:rPr lang="en-US" sz="2200" dirty="0">
-                <a:solidFill>
-                  <a:srgbClr val="4A6B5D"/>
-                </a:solidFill>
-                <a:latin typeface="Georgia" pitchFamily="34" charset="0"/>
-                <a:ea typeface="Georgia" pitchFamily="34" charset="-122"/>
-                <a:cs typeface="Georgia" pitchFamily="34" charset="-120"/>
-              </a:rPr>
-              <a:t>Audio</a:t>
-            </a:r>
-            <a:endParaRPr lang="en-US" sz="2200" dirty="0"/>
-          </a:p>
-        </p:txBody>
-      </p:sp>
-      <p:sp>
-        <p:nvSpPr>
-          <p:cNvPr id="20" name="Shape 18"/>
-          <p:cNvSpPr/>
-          <p:nvPr/>
-        </p:nvSpPr>
-        <p:spPr>
-          <a:xfrm>
-            <a:off x="6551676" y="4599432"/>
-            <a:ext cx="4539996" cy="0"/>
-          </a:xfrm>
-          <a:prstGeom prst="line">
-            <a:avLst/>
-          </a:prstGeom>
-          <a:noFill/>
-          <a:ln w="9525">
-            <a:solidFill>
-              <a:srgbClr val="D9D4C4"/>
-            </a:solidFill>
-            <a:prstDash val="solid"/>
-          </a:ln>
-        </p:spPr>
-      </p:sp>
-      <p:sp>
-        <p:nvSpPr>
-          <p:cNvPr id="21" name="Shape 19"/>
-          <p:cNvSpPr/>
-          <p:nvPr/>
-        </p:nvSpPr>
-        <p:spPr>
-          <a:xfrm>
-            <a:off x="6551676" y="5056632"/>
-            <a:ext cx="4539996" cy="0"/>
-          </a:xfrm>
-          <a:prstGeom prst="line">
-            <a:avLst/>
-          </a:prstGeom>
-          <a:noFill/>
-          <a:ln w="9525">
-            <a:solidFill>
-              <a:srgbClr val="D9D4C4"/>
-            </a:solidFill>
-            <a:prstDash val="solid"/>
-          </a:ln>
-        </p:spPr>
-      </p:sp>
-      <p:sp>
-        <p:nvSpPr>
-          <p:cNvPr id="22" name="Text 20"/>
-          <p:cNvSpPr/>
-          <p:nvPr/>
-        </p:nvSpPr>
-        <p:spPr>
-          <a:xfrm>
-            <a:off x="822960" y="5852160"/>
-            <a:ext cx="10543032" cy="365760"/>
-          </a:xfrm>
-          <a:prstGeom prst="rect">
-            <a:avLst/>
-          </a:prstGeom>
-          <a:noFill/>
-          <a:ln/>
-        </p:spPr>
-        <p:txBody>
-          <a:bodyPr wrap="square" lIns="0" tIns="0" rIns="0" bIns="0" rtlCol="0" anchor="ctr"/>
-          <a:lstStyle/>
-          <a:p>
-            <a:pPr indent="0" marL="0">
-              <a:buNone/>
-            </a:pPr>
-            <a:r>
-              <a:rPr lang="en-US" sz="1200" i="1" dirty="0">
+              <a:rPr lang="en-US" sz="900" spc="150" kern="0" dirty="0">
                 <a:solidFill>
                   <a:srgbClr val="7A7F72"/>
                 </a:solidFill>
@@ -5747,68 +7593,6 @@
                 <a:ea typeface="Arial" pitchFamily="34" charset="-122"/>
                 <a:cs typeface="Arial" pitchFamily="34" charset="-120"/>
               </a:rPr>
-              <a:t>Two 90-second drills first: notes into the grid, pens down. The grid is the discipline the viewing window needs.</a:t>
-            </a:r>
-            <a:endParaRPr lang="en-US" sz="1200" dirty="0"/>
-          </a:p>
-        </p:txBody>
-      </p:sp>
-      <p:sp>
-        <p:nvSpPr>
-          <p:cNvPr id="23" name="Shape 21"/>
-          <p:cNvSpPr/>
-          <p:nvPr/>
-        </p:nvSpPr>
-        <p:spPr>
-          <a:xfrm>
-            <a:off x="822960" y="6382512"/>
-            <a:ext cx="10543032" cy="0"/>
-          </a:xfrm>
-          <a:prstGeom prst="line">
-            <a:avLst/>
-          </a:prstGeom>
-          <a:noFill/>
-          <a:ln w="9525">
-            <a:solidFill>
-              <a:srgbClr val="D9D4C4"/>
-            </a:solidFill>
-            <a:prstDash val="solid"/>
-          </a:ln>
-        </p:spPr>
-      </p:sp>
-      <p:sp>
-        <p:nvSpPr>
-          <p:cNvPr id="24" name="Text 22"/>
-          <p:cNvSpPr/>
-          <p:nvPr/>
-        </p:nvSpPr>
-        <p:spPr>
-          <a:xfrm>
-            <a:off x="822960" y="6419088"/>
-            <a:ext cx="7315200" cy="274320"/>
-          </a:xfrm>
-          <a:prstGeom prst="rect">
-            <a:avLst/>
-          </a:prstGeom>
-          <a:noFill/>
-          <a:ln/>
-        </p:spPr>
-        <p:txBody>
-          <a:bodyPr wrap="square" lIns="0" tIns="0" rIns="0" bIns="0" rtlCol="0" anchor="ctr"/>
-          <a:lstStyle/>
-          <a:p>
-            <a:pPr indent="0" marL="0">
-              <a:buNone/>
-            </a:pPr>
-            <a:r>
-              <a:rPr lang="en-US" sz="900" spc="150" kern="0" dirty="0">
-                <a:solidFill>
-                  <a:srgbClr val="7A7F72"/>
-                </a:solidFill>
-                <a:latin typeface="Arial" pitchFamily="34" charset="0"/>
-                <a:ea typeface="Arial" pitchFamily="34" charset="-122"/>
-                <a:cs typeface="Arial" pitchFamily="34" charset="-120"/>
-              </a:rPr>
               <a:t>MEDIA STUDIES 9607 · SEMESTER I</a:t>
             </a:r>
             <a:endParaRPr lang="en-US" sz="900" dirty="0"/>
@@ -5817,7 +7601,7 @@
       </p:sp>
       <p:sp>
         <p:nvSpPr>
-          <p:cNvPr id="25" name="Text 23"/>
+          <p:cNvPr id="28" name="Text 26"/>
           <p:cNvSpPr/>
           <p:nvPr/>
         </p:nvSpPr>
@@ -5919,7 +7703,7 @@
                 <a:ea typeface="Arial" pitchFamily="34" charset="-122"/>
                 <a:cs typeface="Arial" pitchFamily="34" charset="-120"/>
               </a:rPr>
-              <a:t>REGULATION, THE FOURTH CONTEXT</a:t>
+              <a:t>THE AUTHENTIC FORMAT</a:t>
             </a:r>
             <a:endParaRPr lang="en-US" sz="1100" dirty="0"/>
           </a:p>
@@ -5958,7 +7742,7 @@
                 <a:ea typeface="Arial" pitchFamily="34" charset="-122"/>
                 <a:cs typeface="Arial" pitchFamily="34" charset="-120"/>
               </a:rPr>
-              <a:t>WHILE THE SIT IS FRESH</a:t>
+              <a:t>IN THE PAPER'S OWN TYPOGRAPHY</a:t>
             </a:r>
             <a:endParaRPr lang="en-US" sz="1100" dirty="0"/>
           </a:p>
@@ -5995,8 +7779,8 @@
         </p:nvSpPr>
         <p:spPr>
           <a:xfrm>
-            <a:off x="822960" y="1188720"/>
-            <a:ext cx="10543032" cy="822960"/>
+            <a:off x="822960" y="960120"/>
+            <a:ext cx="10543032" cy="640080"/>
           </a:xfrm>
           <a:prstGeom prst="rect">
             <a:avLst/>
@@ -6012,7 +7796,7 @@
               <a:buNone/>
             </a:pPr>
             <a:r>
-              <a:rPr lang="en-US" sz="3400" dirty="0">
+              <a:rPr lang="en-US" sz="3000" dirty="0">
                 <a:solidFill>
                   <a:srgbClr val="24313F"/>
                 </a:solidFill>
@@ -6020,9 +7804,9 @@
                 <a:ea typeface="Georgia" pitchFamily="34" charset="-122"/>
                 <a:cs typeface="Georgia" pitchFamily="34" charset="-120"/>
               </a:rPr>
-              <a:t>The chain, one link longer</a:t>
-            </a:r>
-            <a:endParaRPr lang="en-US" sz="3400" dirty="0"/>
+              <a:t>Thirty minutes of notes. Forty-five of writing.</a:t>
+            </a:r>
+            <a:endParaRPr lang="en-US" sz="3000" dirty="0"/>
           </a:p>
         </p:txBody>
       </p:sp>
@@ -6034,114 +7818,15 @@
         </p:nvSpPr>
         <p:spPr>
           <a:xfrm>
-            <a:off x="822960" y="2194560"/>
-            <a:ext cx="10543032" cy="868680"/>
+            <a:off x="822960" y="1783080"/>
+            <a:ext cx="10543032" cy="3749040"/>
           </a:xfrm>
           <a:prstGeom prst="rect">
             <a:avLst/>
           </a:prstGeom>
           <a:solidFill>
-            <a:srgbClr val="E8EFE7"/>
+            <a:srgbClr val="FAF8F1"/>
           </a:solidFill>
-          <a:ln/>
-        </p:spPr>
-      </p:sp>
-      <p:sp>
-        <p:nvSpPr>
-          <p:cNvPr id="7" name="Text 5"/>
-          <p:cNvSpPr/>
-          <p:nvPr/>
-        </p:nvSpPr>
-        <p:spPr>
-          <a:xfrm>
-            <a:off x="1097280" y="2194560"/>
-            <a:ext cx="9994392" cy="868680"/>
-          </a:xfrm>
-          <a:prstGeom prst="rect">
-            <a:avLst/>
-          </a:prstGeom>
-          <a:noFill/>
-          <a:ln/>
-        </p:spPr>
-        <p:txBody>
-          <a:bodyPr wrap="square" lIns="0" tIns="0" rIns="0" bIns="0" rtlCol="0" anchor="ctr"/>
-          <a:lstStyle/>
-          <a:p>
-            <a:pPr indent="0" marL="0">
-              <a:buNone/>
-            </a:pPr>
-            <a:r>
-              <a:rPr lang="en-US" sz="2400" dirty="0">
-                <a:solidFill>
-                  <a:srgbClr val="4A6B5D"/>
-                </a:solidFill>
-                <a:latin typeface="Georgia" pitchFamily="34" charset="0"/>
-                <a:ea typeface="Georgia" pitchFamily="34" charset="-122"/>
-                <a:cs typeface="Georgia" pitchFamily="34" charset="-120"/>
-              </a:rPr>
-              <a:t>decision  ←  incentive  ←  payer  ←  REGULATOR</a:t>
-            </a:r>
-            <a:endParaRPr lang="en-US" sz="2400" dirty="0"/>
-          </a:p>
-        </p:txBody>
-      </p:sp>
-      <p:sp>
-        <p:nvSpPr>
-          <p:cNvPr id="8" name="Text 6"/>
-          <p:cNvSpPr/>
-          <p:nvPr/>
-        </p:nvSpPr>
-        <p:spPr>
-          <a:xfrm>
-            <a:off x="822960" y="3383280"/>
-            <a:ext cx="9875520" cy="1828800"/>
-          </a:xfrm>
-          <a:prstGeom prst="rect">
-            <a:avLst/>
-          </a:prstGeom>
-          <a:noFill/>
-          <a:ln/>
-        </p:spPr>
-        <p:txBody>
-          <a:bodyPr wrap="square" lIns="0" tIns="0" rIns="0" bIns="0" rtlCol="0" anchor="t"/>
-          <a:lstStyle/>
-          <a:p>
-            <a:pPr indent="0" marL="0">
-              <a:lnSpc>
-                <a:spcPts val="2700"/>
-              </a:lnSpc>
-              <a:buNone/>
-            </a:pPr>
-            <a:r>
-              <a:rPr lang="en-US" sz="1900" dirty="0">
-                <a:solidFill>
-                  <a:srgbClr val="24313F"/>
-                </a:solidFill>
-                <a:latin typeface="Georgia" pitchFamily="34" charset="0"/>
-                <a:ea typeface="Georgia" pitchFamily="34" charset="-122"/>
-                <a:cs typeface="Georgia" pitchFamily="34" charset="-120"/>
-              </a:rPr>
-              <a:t>Who regulates the case-study institution (Ofcom, the FCC, platform self-regulation, per its home market), with what powers, and what that visibly changes: scheduling, cuts, ratings, and above all what never gets made. Add the regulation row to the document, and date it.</a:t>
-            </a:r>
-            <a:endParaRPr lang="en-US" sz="1900" dirty="0"/>
-          </a:p>
-        </p:txBody>
-      </p:sp>
-      <p:sp>
-        <p:nvSpPr>
-          <p:cNvPr id="9" name="Shape 7"/>
-          <p:cNvSpPr/>
-          <p:nvPr/>
-        </p:nvSpPr>
-        <p:spPr>
-          <a:xfrm>
-            <a:off x="822960" y="6382512"/>
-            <a:ext cx="10543032" cy="0"/>
-          </a:xfrm>
-          <a:prstGeom prst="line">
-            <a:avLst/>
-          </a:prstGeom>
-          <a:noFill/>
           <a:ln w="9525">
             <a:solidFill>
               <a:srgbClr val="D9D4C4"/>
@@ -6150,32 +7835,59 @@
           </a:ln>
         </p:spPr>
       </p:sp>
-      <p:sp>
-        <p:nvSpPr>
-          <p:cNvPr id="10" name="Text 8"/>
-          <p:cNvSpPr/>
-          <p:nvPr/>
-        </p:nvSpPr>
-        <p:spPr>
-          <a:xfrm>
-            <a:off x="822960" y="6419088"/>
-            <a:ext cx="7315200" cy="274320"/>
-          </a:xfrm>
-          <a:prstGeom prst="rect">
-            <a:avLst/>
-          </a:prstGeom>
-          <a:noFill/>
-          <a:ln/>
-        </p:spPr>
-        <p:txBody>
-          <a:bodyPr wrap="square" lIns="0" tIns="0" rIns="0" bIns="0" rtlCol="0" anchor="ctr"/>
-          <a:lstStyle/>
-          <a:p>
-            <a:pPr indent="0" marL="0">
-              <a:buNone/>
-            </a:pPr>
-            <a:r>
-              <a:rPr lang="en-US" sz="900" spc="150" kern="0" dirty="0">
+      <p:pic>
+        <p:nvPicPr>
+          <p:cNvPr id="7" name="Image 0" descr="/Users/dogan/Documents/Vaults/Courses/wiki/classes/media-studies/decks/_build/img/qp21-stem.jpg">    </p:cNvPr>
+          <p:cNvPicPr>
+            <a:picLocks noChangeAspect="1"/>
+          </p:cNvPicPr>
+          <p:nvPr/>
+        </p:nvPicPr>
+        <p:blipFill>
+          <a:blip r:embed="rId1"/>
+          <a:stretch>
+            <a:fillRect/>
+          </a:stretch>
+        </p:blipFill>
+        <p:spPr>
+          <a:xfrm>
+            <a:off x="3442849" y="1911096"/>
+            <a:ext cx="5303253" cy="3493008"/>
+          </a:xfrm>
+          <a:prstGeom prst="rect">
+            <a:avLst/>
+          </a:prstGeom>
+        </p:spPr>
+      </p:pic>
+      <p:sp>
+        <p:nvSpPr>
+          <p:cNvPr id="8" name="Text 5"/>
+          <p:cNvSpPr/>
+          <p:nvPr/>
+        </p:nvSpPr>
+        <p:spPr>
+          <a:xfrm>
+            <a:off x="822960" y="5623560"/>
+            <a:ext cx="10543032" cy="548640"/>
+          </a:xfrm>
+          <a:prstGeom prst="rect">
+            <a:avLst/>
+          </a:prstGeom>
+          <a:noFill/>
+          <a:ln/>
+        </p:spPr>
+        <p:txBody>
+          <a:bodyPr wrap="square" lIns="0" tIns="0" rIns="0" bIns="0" rtlCol="0" anchor="t"/>
+          <a:lstStyle/>
+          <a:p>
+            <a:pPr algn="ctr" indent="0" marL="0">
+              <a:lnSpc>
+                <a:spcPts val="1500"/>
+              </a:lnSpc>
+              <a:buNone/>
+            </a:pPr>
+            <a:r>
+              <a:rPr lang="en-US" sz="1150" dirty="0">
                 <a:solidFill>
                   <a:srgbClr val="7A7F72"/>
                 </a:solidFill>
@@ -6183,6 +7895,68 @@
                 <a:ea typeface="Arial" pitchFamily="34" charset="-122"/>
                 <a:cs typeface="Arial" pitchFamily="34" charset="-120"/>
               </a:rPr>
+              <a:t>June 2024 Paper 2/21: the rubric, the screenings, and the frozen stem. A different skill from A1's single hour: the viewing window is for structured notes, not a transcript.</a:t>
+            </a:r>
+            <a:endParaRPr lang="en-US" sz="1150" dirty="0"/>
+          </a:p>
+        </p:txBody>
+      </p:sp>
+      <p:sp>
+        <p:nvSpPr>
+          <p:cNvPr id="9" name="Shape 6"/>
+          <p:cNvSpPr/>
+          <p:nvPr/>
+        </p:nvSpPr>
+        <p:spPr>
+          <a:xfrm>
+            <a:off x="822960" y="6382512"/>
+            <a:ext cx="10543032" cy="0"/>
+          </a:xfrm>
+          <a:prstGeom prst="line">
+            <a:avLst/>
+          </a:prstGeom>
+          <a:noFill/>
+          <a:ln w="9525">
+            <a:solidFill>
+              <a:srgbClr val="D9D4C4"/>
+            </a:solidFill>
+            <a:prstDash val="solid"/>
+          </a:ln>
+        </p:spPr>
+      </p:sp>
+      <p:sp>
+        <p:nvSpPr>
+          <p:cNvPr id="10" name="Text 7"/>
+          <p:cNvSpPr/>
+          <p:nvPr/>
+        </p:nvSpPr>
+        <p:spPr>
+          <a:xfrm>
+            <a:off x="822960" y="6419088"/>
+            <a:ext cx="7315200" cy="274320"/>
+          </a:xfrm>
+          <a:prstGeom prst="rect">
+            <a:avLst/>
+          </a:prstGeom>
+          <a:noFill/>
+          <a:ln/>
+        </p:spPr>
+        <p:txBody>
+          <a:bodyPr wrap="square" lIns="0" tIns="0" rIns="0" bIns="0" rtlCol="0" anchor="ctr"/>
+          <a:lstStyle/>
+          <a:p>
+            <a:pPr indent="0" marL="0">
+              <a:buNone/>
+            </a:pPr>
+            <a:r>
+              <a:rPr lang="en-US" sz="900" spc="150" kern="0" dirty="0">
+                <a:solidFill>
+                  <a:srgbClr val="7A7F72"/>
+                </a:solidFill>
+                <a:latin typeface="Arial" pitchFamily="34" charset="0"/>
+                <a:ea typeface="Arial" pitchFamily="34" charset="-122"/>
+                <a:cs typeface="Arial" pitchFamily="34" charset="-120"/>
+              </a:rPr>
               <a:t>MEDIA STUDIES 9607 · SEMESTER I</a:t>
             </a:r>
             <a:endParaRPr lang="en-US" sz="900" dirty="0"/>
@@ -6191,7 +7965,7 @@
       </p:sp>
       <p:sp>
         <p:nvSpPr>
-          <p:cNvPr id="11" name="Text 9"/>
+          <p:cNvPr id="11" name="Text 8"/>
           <p:cNvSpPr/>
           <p:nvPr/>
         </p:nvSpPr>

--- a/content/decks/media-studies/media-studies-s1-lesson-16-a4-section-a-in-authentic-format.pptx
+++ b/content/decks/media-studies/media-studies-s1-lesson-16-a4-section-a-in-authentic-format.pptx
@@ -2894,23 +2894,26 @@
         <p:spPr>
           <a:xfrm>
             <a:off x="822960" y="5852160"/>
-            <a:ext cx="10543032" cy="365760"/>
-          </a:xfrm>
-          <a:prstGeom prst="rect">
-            <a:avLst/>
-          </a:prstGeom>
-          <a:noFill/>
-          <a:ln/>
-        </p:spPr>
-        <p:txBody>
-          <a:bodyPr wrap="square" lIns="0" tIns="0" rIns="0" bIns="0" rtlCol="0" anchor="ctr"/>
+            <a:ext cx="10543032" cy="320040"/>
+          </a:xfrm>
+          <a:prstGeom prst="rect">
+            <a:avLst/>
+          </a:prstGeom>
+          <a:noFill/>
+          <a:ln/>
+        </p:spPr>
+        <p:txBody>
+          <a:bodyPr wrap="square" lIns="0" tIns="0" rIns="0" bIns="0" rtlCol="0" anchor="t"/>
           <a:lstStyle/>
           <a:p>
             <a:pPr indent="0" marL="0">
-              <a:buNone/>
-            </a:pPr>
-            <a:r>
-              <a:rPr lang="en-US" sz="1200" i="1" dirty="0">
+              <a:lnSpc>
+                <a:spcPts val="1600"/>
+              </a:lnSpc>
+              <a:buNone/>
+            </a:pPr>
+            <a:r>
+              <a:rPr lang="en-US" sz="1000" b="1" spc="100" kern="0" dirty="0">
                 <a:solidFill>
                   <a:srgbClr val="7A7F72"/>
                 </a:solidFill>
@@ -2918,9 +2921,26 @@
                 <a:ea typeface="Arial" pitchFamily="34" charset="-122"/>
                 <a:cs typeface="Arial" pitchFamily="34" charset="-120"/>
               </a:rPr>
-              <a:t>Two 90-second drills first: notes into the grid, pens down. The grid is the discipline the viewing window needs.</a:t>
-            </a:r>
-            <a:endParaRPr lang="en-US" sz="1200" dirty="0"/>
+              <a:t>DRILL   </a:t>
+            </a:r>
+            <a:pPr indent="0" marL="0">
+              <a:lnSpc>
+                <a:spcPts val="1600"/>
+              </a:lnSpc>
+              <a:buNone/>
+            </a:pPr>
+            <a:r>
+              <a:rPr lang="en-US" sz="1200" dirty="0">
+                <a:solidFill>
+                  <a:srgbClr val="7A7F72"/>
+                </a:solidFill>
+                <a:latin typeface="Georgia" pitchFamily="34" charset="0"/>
+                <a:ea typeface="Georgia" pitchFamily="34" charset="-122"/>
+                <a:cs typeface="Georgia" pitchFamily="34" charset="-120"/>
+              </a:rPr>
+              <a:t>Two 90-second drills: notes straight into the grid, then pens down. Capture, do not compose.</a:t>
+            </a:r>
+            <a:endParaRPr lang="en-US" sz="1000" dirty="0"/>
           </a:p>
         </p:txBody>
       </p:sp>
@@ -3336,26 +3356,34 @@
               <a:buNone/>
             </a:pPr>
             <a:r>
-              <a:rPr lang="en-US" sz="1500" dirty="0">
-                <a:solidFill>
-                  <a:srgbClr val="24313F"/>
-                </a:solidFill>
-                <a:latin typeface="Georgia" pitchFamily="34" charset="0"/>
-                <a:ea typeface="Georgia" pitchFamily="34" charset="-122"/>
-                <a:cs typeface="Georgia" pitchFamily="34" charset="-120"/>
-              </a:rPr>
-              <a:t>The examiner's margin says it plainly: the remainder of the answer is just narration. A transcript of what happened on screen, with no technique named and no meaning claimed, scores a five. The candidate watched carefully and wrote fluently, and it did not matter.</a:t>
-            </a:r>
-            <a:endParaRPr lang="en-US" sz="1500" dirty="0"/>
-          </a:p>
-          <a:p>
+              <a:rPr lang="en-US" sz="1300" b="1" spc="100" kern="0" dirty="0">
+                <a:solidFill>
+                  <a:srgbClr val="4A6B5D"/>
+                </a:solidFill>
+                <a:latin typeface="Arial" pitchFamily="34" charset="0"/>
+                <a:ea typeface="Arial" pitchFamily="34" charset="-122"/>
+                <a:cs typeface="Arial" pitchFamily="34" charset="-120"/>
+              </a:rPr>
+              <a:t>THE MARGIN NOTE   </a:t>
+            </a:r>
             <a:pPr indent="0" marL="0">
               <a:lnSpc>
                 <a:spcPts val="2100"/>
               </a:lnSpc>
               <a:buNone/>
             </a:pPr>
-            <a:endParaRPr lang="en-US" sz="1500" dirty="0"/>
+            <a:r>
+              <a:rPr lang="en-US" sz="1500" dirty="0">
+                <a:solidFill>
+                  <a:srgbClr val="24313F"/>
+                </a:solidFill>
+                <a:latin typeface="Georgia" pitchFamily="34" charset="0"/>
+                <a:ea typeface="Georgia" pitchFamily="34" charset="-122"/>
+                <a:cs typeface="Georgia" pitchFamily="34" charset="-120"/>
+              </a:rPr>
+              <a:t>“The remainder of the answer is just narration.”</a:t>
+            </a:r>
+            <a:endParaRPr lang="en-US" sz="1300" dirty="0"/>
           </a:p>
           <a:p>
             <a:pPr indent="0" marL="0">
@@ -3365,6 +3393,23 @@
               <a:buNone/>
             </a:pPr>
             <a:r>
+              <a:rPr lang="en-US" sz="1300" b="1" spc="100" kern="0" dirty="0">
+                <a:solidFill>
+                  <a:srgbClr val="4A6B5D"/>
+                </a:solidFill>
+                <a:latin typeface="Arial" pitchFamily="34" charset="0"/>
+                <a:ea typeface="Arial" pitchFamily="34" charset="-122"/>
+                <a:cs typeface="Arial" pitchFamily="34" charset="-120"/>
+              </a:rPr>
+              <a:t>WHY IT FAILED   </a:t>
+            </a:r>
+            <a:pPr indent="0" marL="0">
+              <a:lnSpc>
+                <a:spcPts val="2100"/>
+              </a:lnSpc>
+              <a:buNone/>
+            </a:pPr>
+            <a:r>
               <a:rPr lang="en-US" sz="1500" dirty="0">
                 <a:solidFill>
                   <a:srgbClr val="24313F"/>
@@ -3373,9 +3418,46 @@
                 <a:ea typeface="Georgia" pitchFamily="34" charset="-122"/>
                 <a:cs typeface="Georgia" pitchFamily="34" charset="-120"/>
               </a:rPr>
-              <a:t>Band a paragraph of it in pairs against the five criteria; the awarded level is revealed after. Then reread your CS12 for the same defect.</a:t>
-            </a:r>
-            <a:endParaRPr lang="en-US" sz="1500" dirty="0"/>
+              <a:t>A transcript of the screen. No technique named, no meaning claimed. Careful watching, fluent writing: five marks.</a:t>
+            </a:r>
+            <a:endParaRPr lang="en-US" sz="1300" dirty="0"/>
+          </a:p>
+          <a:p>
+            <a:pPr indent="0" marL="0">
+              <a:lnSpc>
+                <a:spcPts val="2100"/>
+              </a:lnSpc>
+              <a:buNone/>
+            </a:pPr>
+            <a:r>
+              <a:rPr lang="en-US" sz="1300" b="1" spc="100" kern="0" dirty="0">
+                <a:solidFill>
+                  <a:srgbClr val="4A6B5D"/>
+                </a:solidFill>
+                <a:latin typeface="Arial" pitchFamily="34" charset="0"/>
+                <a:ea typeface="Arial" pitchFamily="34" charset="-122"/>
+                <a:cs typeface="Arial" pitchFamily="34" charset="-120"/>
+              </a:rPr>
+              <a:t>TASK   </a:t>
+            </a:r>
+            <a:pPr indent="0" marL="0">
+              <a:lnSpc>
+                <a:spcPts val="2100"/>
+              </a:lnSpc>
+              <a:buNone/>
+            </a:pPr>
+            <a:r>
+              <a:rPr lang="en-US" sz="1500" dirty="0">
+                <a:solidFill>
+                  <a:srgbClr val="24313F"/>
+                </a:solidFill>
+                <a:latin typeface="Georgia" pitchFamily="34" charset="0"/>
+                <a:ea typeface="Georgia" pitchFamily="34" charset="-122"/>
+                <a:cs typeface="Georgia" pitchFamily="34" charset="-120"/>
+              </a:rPr>
+              <a:t>Band one paragraph of it in pairs. Then reread your own CS12 for the same defect.</a:t>
+            </a:r>
+            <a:endParaRPr lang="en-US" sz="1300" dirty="0"/>
           </a:p>
         </p:txBody>
       </p:sp>
@@ -3734,12 +3816,29 @@
           <a:p>
             <a:pPr indent="0" marL="0">
               <a:lnSpc>
-                <a:spcPts val="2400"/>
+                <a:spcPts val="2300"/>
               </a:lnSpc>
               <a:buNone/>
             </a:pPr>
             <a:r>
-              <a:rPr lang="en-US" sz="1650" dirty="0">
+              <a:rPr lang="en-US" sz="1400" b="1" spc="100" kern="0" dirty="0">
+                <a:solidFill>
+                  <a:srgbClr val="4A6B5D"/>
+                </a:solidFill>
+                <a:latin typeface="Arial" pitchFamily="34" charset="0"/>
+                <a:ea typeface="Arial" pitchFamily="34" charset="-122"/>
+                <a:cs typeface="Arial" pitchFamily="34" charset="-120"/>
+              </a:rPr>
+              <a:t>ASK   </a:t>
+            </a:r>
+            <a:pPr indent="0" marL="0">
+              <a:lnSpc>
+                <a:spcPts val="2300"/>
+              </a:lnSpc>
+              <a:buNone/>
+            </a:pPr>
+            <a:r>
+              <a:rPr lang="en-US" sz="1600" dirty="0">
                 <a:solidFill>
                   <a:srgbClr val="24313F"/>
                 </a:solidFill>
@@ -3747,9 +3846,83 @@
                 <a:ea typeface="Georgia" pitchFamily="34" charset="-122"/>
                 <a:cs typeface="Georgia" pitchFamily="34" charset="-120"/>
               </a:rPr>
-              <a:t>Who regulates the case-study institution (Ofcom, the FCC, platform self-regulation, per its home market), with what powers, and what that visibly changes: scheduling, cuts, ratings, and above all what never gets made. Add the regulation row to the document, and date it.</a:t>
-            </a:r>
-            <a:endParaRPr lang="en-US" sz="1650" dirty="0"/>
+              <a:t>Who regulates your case-study institution? With what powers?</a:t>
+            </a:r>
+            <a:endParaRPr lang="en-US" sz="1400" dirty="0"/>
+          </a:p>
+          <a:p>
+            <a:pPr indent="0" marL="0">
+              <a:lnSpc>
+                <a:spcPts val="2300"/>
+              </a:lnSpc>
+              <a:buNone/>
+            </a:pPr>
+            <a:r>
+              <a:rPr lang="en-US" sz="1400" b="1" spc="100" kern="0" dirty="0">
+                <a:solidFill>
+                  <a:srgbClr val="4A6B5D"/>
+                </a:solidFill>
+                <a:latin typeface="Arial" pitchFamily="34" charset="0"/>
+                <a:ea typeface="Arial" pitchFamily="34" charset="-122"/>
+                <a:cs typeface="Arial" pitchFamily="34" charset="-120"/>
+              </a:rPr>
+              <a:t>LOOK FOR   </a:t>
+            </a:r>
+            <a:pPr indent="0" marL="0">
+              <a:lnSpc>
+                <a:spcPts val="2300"/>
+              </a:lnSpc>
+              <a:buNone/>
+            </a:pPr>
+            <a:r>
+              <a:rPr lang="en-US" sz="1600" dirty="0">
+                <a:solidFill>
+                  <a:srgbClr val="24313F"/>
+                </a:solidFill>
+                <a:latin typeface="Georgia" pitchFamily="34" charset="0"/>
+                <a:ea typeface="Georgia" pitchFamily="34" charset="-122"/>
+                <a:cs typeface="Georgia" pitchFamily="34" charset="-120"/>
+              </a:rPr>
+              <a:t>What regulation visibly changes: scheduling, cuts, age ratings, and what never gets made at all.</a:t>
+            </a:r>
+            <a:endParaRPr lang="en-US" sz="1400" dirty="0"/>
+          </a:p>
+          <a:p>
+            <a:pPr indent="0" marL="0">
+              <a:lnSpc>
+                <a:spcPts val="2300"/>
+              </a:lnSpc>
+              <a:buNone/>
+            </a:pPr>
+            <a:r>
+              <a:rPr lang="en-US" sz="1400" b="1" spc="100" kern="0" dirty="0">
+                <a:solidFill>
+                  <a:srgbClr val="4A6B5D"/>
+                </a:solidFill>
+                <a:latin typeface="Arial" pitchFamily="34" charset="0"/>
+                <a:ea typeface="Arial" pitchFamily="34" charset="-122"/>
+                <a:cs typeface="Arial" pitchFamily="34" charset="-120"/>
+              </a:rPr>
+              <a:t>TASK   </a:t>
+            </a:r>
+            <a:pPr indent="0" marL="0">
+              <a:lnSpc>
+                <a:spcPts val="2300"/>
+              </a:lnSpc>
+              <a:buNone/>
+            </a:pPr>
+            <a:r>
+              <a:rPr lang="en-US" sz="1600" dirty="0">
+                <a:solidFill>
+                  <a:srgbClr val="24313F"/>
+                </a:solidFill>
+                <a:latin typeface="Georgia" pitchFamily="34" charset="0"/>
+                <a:ea typeface="Georgia" pitchFamily="34" charset="-122"/>
+                <a:cs typeface="Georgia" pitchFamily="34" charset="-120"/>
+              </a:rPr>
+              <a:t>Add the regulation row to your document, and date it.</a:t>
+            </a:r>
+            <a:endParaRPr lang="en-US" sz="1400" dirty="0"/>
           </a:p>
         </p:txBody>
       </p:sp>
@@ -4165,6 +4338,23 @@
               <a:buNone/>
             </a:pPr>
             <a:r>
+              <a:rPr lang="en-US" sz="1450" b="1" spc="100" kern="0" dirty="0">
+                <a:solidFill>
+                  <a:srgbClr val="4A6B5D"/>
+                </a:solidFill>
+                <a:latin typeface="Arial" pitchFamily="34" charset="0"/>
+                <a:ea typeface="Arial" pitchFamily="34" charset="-122"/>
+                <a:cs typeface="Arial" pitchFamily="34" charset="-120"/>
+              </a:rPr>
+              <a:t>FORMAT   </a:t>
+            </a:r>
+            <a:pPr indent="0" marL="0">
+              <a:lnSpc>
+                <a:spcPts val="2400"/>
+              </a:lnSpc>
+              <a:buNone/>
+            </a:pPr>
+            <a:r>
               <a:rPr lang="en-US" sz="1650" dirty="0">
                 <a:solidFill>
                   <a:srgbClr val="24313F"/>
@@ -4173,9 +4363,83 @@
                 <a:ea typeface="Georgia" pitchFamily="34" charset="-122"/>
                 <a:cs typeface="Georgia" pitchFamily="34" charset="-120"/>
               </a:rPr>
-              <a:t>Component 2 Section A in authentic format: an unseen TV-drama extract, thirty minutes of viewing and structured notes, then forty-five of writing, to the paper's own screening protocol. Marked to the CIE band descriptors, per-criterion, with AO splits recorded per script for the L17 review. No debrief on the day, by design: the format is the lesson, and it ends the way the real one does.</a:t>
-            </a:r>
-            <a:endParaRPr lang="en-US" sz="1650" dirty="0"/>
+              <a:t>An unseen TV-drama extract. Thirty minutes of viewing and structured notes, then forty-five minutes of writing.</a:t>
+            </a:r>
+            <a:endParaRPr lang="en-US" sz="1450" dirty="0"/>
+          </a:p>
+          <a:p>
+            <a:pPr indent="0" marL="0">
+              <a:lnSpc>
+                <a:spcPts val="2400"/>
+              </a:lnSpc>
+              <a:buNone/>
+            </a:pPr>
+            <a:r>
+              <a:rPr lang="en-US" sz="1450" b="1" spc="100" kern="0" dirty="0">
+                <a:solidFill>
+                  <a:srgbClr val="4A6B5D"/>
+                </a:solidFill>
+                <a:latin typeface="Arial" pitchFamily="34" charset="0"/>
+                <a:ea typeface="Arial" pitchFamily="34" charset="-122"/>
+                <a:cs typeface="Arial" pitchFamily="34" charset="-120"/>
+              </a:rPr>
+              <a:t>MARKED   </a:t>
+            </a:r>
+            <a:pPr indent="0" marL="0">
+              <a:lnSpc>
+                <a:spcPts val="2400"/>
+              </a:lnSpc>
+              <a:buNone/>
+            </a:pPr>
+            <a:r>
+              <a:rPr lang="en-US" sz="1650" dirty="0">
+                <a:solidFill>
+                  <a:srgbClr val="24313F"/>
+                </a:solidFill>
+                <a:latin typeface="Georgia" pitchFamily="34" charset="0"/>
+                <a:ea typeface="Georgia" pitchFamily="34" charset="-122"/>
+                <a:cs typeface="Georgia" pitchFamily="34" charset="-120"/>
+              </a:rPr>
+              <a:t>To the official band descriptors, criterion by criterion. AO splits recorded for the L17 review.</a:t>
+            </a:r>
+            <a:endParaRPr lang="en-US" sz="1450" dirty="0"/>
+          </a:p>
+          <a:p>
+            <a:pPr indent="0" marL="0">
+              <a:lnSpc>
+                <a:spcPts val="2400"/>
+              </a:lnSpc>
+              <a:buNone/>
+            </a:pPr>
+            <a:r>
+              <a:rPr lang="en-US" sz="1450" b="1" spc="100" kern="0" dirty="0">
+                <a:solidFill>
+                  <a:srgbClr val="4A6B5D"/>
+                </a:solidFill>
+                <a:latin typeface="Arial" pitchFamily="34" charset="0"/>
+                <a:ea typeface="Arial" pitchFamily="34" charset="-122"/>
+                <a:cs typeface="Arial" pitchFamily="34" charset="-120"/>
+              </a:rPr>
+              <a:t>ON THE DAY   </a:t>
+            </a:r>
+            <a:pPr indent="0" marL="0">
+              <a:lnSpc>
+                <a:spcPts val="2400"/>
+              </a:lnSpc>
+              <a:buNone/>
+            </a:pPr>
+            <a:r>
+              <a:rPr lang="en-US" sz="1650" dirty="0">
+                <a:solidFill>
+                  <a:srgbClr val="24313F"/>
+                </a:solidFill>
+                <a:latin typeface="Georgia" pitchFamily="34" charset="0"/>
+                <a:ea typeface="Georgia" pitchFamily="34" charset="-122"/>
+                <a:cs typeface="Georgia" pitchFamily="34" charset="-120"/>
+              </a:rPr>
+              <a:t>No debrief, by design. The sit ends the way the real exam ends.</a:t>
+            </a:r>
+            <a:endParaRPr lang="en-US" sz="1450" dirty="0"/>
           </a:p>
         </p:txBody>
       </p:sp>
@@ -5129,7 +5393,7 @@
                 <a:ea typeface="Georgia" pitchFamily="34" charset="-122"/>
                 <a:cs typeface="Georgia" pitchFamily="34" charset="-120"/>
               </a:rPr>
-              <a:t>Owning the stages (vertical) or the neighbors (horizontal). One company holds more of the chain.</a:t>
+              <a:t>One company owns more of the chain: the stages (vertical) or the rivals beside it (horizontal).</a:t>
             </a:r>
             <a:endParaRPr lang="en-US" sz="1600" dirty="0"/>
           </a:p>
@@ -6163,12 +6427,12 @@
           <a:p>
             <a:pPr indent="0" marL="0">
               <a:lnSpc>
-                <a:spcPts val="2600"/>
+                <a:spcPts val="2400"/>
               </a:lnSpc>
               <a:buNone/>
             </a:pPr>
             <a:r>
-              <a:rPr lang="en-US" sz="1800" dirty="0">
+              <a:rPr lang="en-US" sz="1700" dirty="0">
                 <a:solidFill>
                   <a:srgbClr val="24313F"/>
                 </a:solidFill>
@@ -6176,9 +6440,46 @@
                 <a:ea typeface="Georgia" pitchFamily="34" charset="-122"/>
                 <a:cs typeface="Georgia" pitchFamily="34" charset="-120"/>
               </a:rPr>
-              <a:t>One man crosses an ocean, and every channel of the era sells the same story to itself: newsreels, press syndicates, radio, records, endorsements. The media event, the synergy, the convergence: all of it seventy years before the internet gave them names.</a:t>
-            </a:r>
-            <a:endParaRPr lang="en-US" sz="1800" dirty="0"/>
+              <a:t>One man flies across the ocean. Every channel of 1927 sells the same story: newsreels, newspapers, radio, records, endorsements.</a:t>
+            </a:r>
+            <a:endParaRPr lang="en-US" sz="1700" dirty="0"/>
+          </a:p>
+          <a:p>
+            <a:pPr indent="0" marL="0">
+              <a:lnSpc>
+                <a:spcPts val="2400"/>
+              </a:lnSpc>
+              <a:buNone/>
+            </a:pPr>
+            <a:r>
+              <a:rPr lang="en-US" sz="1500" b="1" spc="100" kern="0" dirty="0">
+                <a:solidFill>
+                  <a:srgbClr val="4A6B5D"/>
+                </a:solidFill>
+                <a:latin typeface="Arial" pitchFamily="34" charset="0"/>
+                <a:ea typeface="Arial" pitchFamily="34" charset="-122"/>
+                <a:cs typeface="Arial" pitchFamily="34" charset="-120"/>
+              </a:rPr>
+              <a:t>KEY POINT   </a:t>
+            </a:r>
+            <a:pPr indent="0" marL="0">
+              <a:lnSpc>
+                <a:spcPts val="2400"/>
+              </a:lnSpc>
+              <a:buNone/>
+            </a:pPr>
+            <a:r>
+              <a:rPr lang="en-US" sz="1700" dirty="0">
+                <a:solidFill>
+                  <a:srgbClr val="24313F"/>
+                </a:solidFill>
+                <a:latin typeface="Georgia" pitchFamily="34" charset="0"/>
+                <a:ea typeface="Georgia" pitchFamily="34" charset="-122"/>
+                <a:cs typeface="Georgia" pitchFamily="34" charset="-120"/>
+              </a:rPr>
+              <a:t>Media events, synergy, convergence: all of it existed seventy years before the internet named it.</a:t>
+            </a:r>
+            <a:endParaRPr lang="en-US" sz="1700" dirty="0"/>
           </a:p>
         </p:txBody>
       </p:sp>
@@ -6357,6 +6658,65 @@
           </a:p>
         </p:txBody>
       </p:sp>
+      <p:sp>
+        <p:nvSpPr>
+          <p:cNvPr id="6" name="Text 4"/>
+          <p:cNvSpPr/>
+          <p:nvPr/>
+        </p:nvSpPr>
+        <p:spPr>
+          <a:xfrm>
+            <a:off x="822960" y="5806440"/>
+            <a:ext cx="10424160" cy="640080"/>
+          </a:xfrm>
+          <a:prstGeom prst="rect">
+            <a:avLst/>
+          </a:prstGeom>
+          <a:noFill/>
+          <a:ln/>
+        </p:spPr>
+        <p:txBody>
+          <a:bodyPr wrap="square" lIns="0" tIns="0" rIns="0" bIns="0" rtlCol="0" anchor="t"/>
+          <a:lstStyle/>
+          <a:p>
+            <a:pPr indent="0" marL="0">
+              <a:lnSpc>
+                <a:spcPts val="1900"/>
+              </a:lnSpc>
+              <a:buNone/>
+            </a:pPr>
+            <a:r>
+              <a:rPr lang="en-US" sz="1200" b="1" spc="100" kern="0" dirty="0">
+                <a:solidFill>
+                  <a:srgbClr val="7A7F72"/>
+                </a:solidFill>
+                <a:latin typeface="Arial" pitchFamily="34" charset="0"/>
+                <a:ea typeface="Arial" pitchFamily="34" charset="-122"/>
+                <a:cs typeface="Arial" pitchFamily="34" charset="-120"/>
+              </a:rPr>
+              <a:t>IN PLAIN WORDS   </a:t>
+            </a:r>
+            <a:pPr indent="0" marL="0">
+              <a:lnSpc>
+                <a:spcPts val="1900"/>
+              </a:lnSpc>
+              <a:buNone/>
+            </a:pPr>
+            <a:r>
+              <a:rPr lang="en-US" sz="1400" i="1" dirty="0">
+                <a:solidFill>
+                  <a:srgbClr val="4A6B5D"/>
+                </a:solidFill>
+                <a:latin typeface="Georgia" pitchFamily="34" charset="0"/>
+                <a:ea typeface="Georgia" pitchFamily="34" charset="-122"/>
+                <a:cs typeface="Georgia" pitchFamily="34" charset="-120"/>
+              </a:rPr>
+              <a:t>A pseudo-event does not just happen. Someone staged it so it would be reported.</a:t>
+            </a:r>
+            <a:endParaRPr lang="en-US" sz="1200" dirty="0"/>
+          </a:p>
+        </p:txBody>
+      </p:sp>
     </p:spTree>
   </p:cSld>
   <p:clrMapOvr>
@@ -7507,23 +7867,26 @@
         <p:spPr>
           <a:xfrm>
             <a:off x="822960" y="5029200"/>
-            <a:ext cx="10543032" cy="457200"/>
-          </a:xfrm>
-          <a:prstGeom prst="rect">
-            <a:avLst/>
-          </a:prstGeom>
-          <a:noFill/>
-          <a:ln/>
-        </p:spPr>
-        <p:txBody>
-          <a:bodyPr wrap="square" lIns="0" tIns="0" rIns="0" bIns="0" rtlCol="0" anchor="ctr"/>
+            <a:ext cx="10543032" cy="320040"/>
+          </a:xfrm>
+          <a:prstGeom prst="rect">
+            <a:avLst/>
+          </a:prstGeom>
+          <a:noFill/>
+          <a:ln/>
+        </p:spPr>
+        <p:txBody>
+          <a:bodyPr wrap="square" lIns="0" tIns="0" rIns="0" bIns="0" rtlCol="0" anchor="t"/>
           <a:lstStyle/>
           <a:p>
             <a:pPr indent="0" marL="0">
-              <a:buNone/>
-            </a:pPr>
-            <a:r>
-              <a:rPr lang="en-US" sz="1250" i="1" dirty="0">
+              <a:lnSpc>
+                <a:spcPts val="1700"/>
+              </a:lnSpc>
+              <a:buNone/>
+            </a:pPr>
+            <a:r>
+              <a:rPr lang="en-US" sz="1050" b="1" spc="100" kern="0" dirty="0">
                 <a:solidFill>
                   <a:srgbClr val="7A7F72"/>
                 </a:solidFill>
@@ -7531,9 +7894,26 @@
                 <a:ea typeface="Arial" pitchFamily="34" charset="-122"/>
                 <a:cs typeface="Arial" pitchFamily="34" charset="-120"/>
               </a:rPr>
-              <a:t>Each link annotated from the case-study documents, drawn as one chain on the board.</a:t>
-            </a:r>
-            <a:endParaRPr lang="en-US" sz="1250" dirty="0"/>
+              <a:t>TASK   </a:t>
+            </a:r>
+            <a:pPr indent="0" marL="0">
+              <a:lnSpc>
+                <a:spcPts val="1700"/>
+              </a:lnSpc>
+              <a:buNone/>
+            </a:pPr>
+            <a:r>
+              <a:rPr lang="en-US" sz="1250" dirty="0">
+                <a:solidFill>
+                  <a:srgbClr val="7A7F72"/>
+                </a:solidFill>
+                <a:latin typeface="Georgia" pitchFamily="34" charset="0"/>
+                <a:ea typeface="Georgia" pitchFamily="34" charset="-122"/>
+                <a:cs typeface="Georgia" pitchFamily="34" charset="-120"/>
+              </a:rPr>
+              <a:t>Annotate each link from your case-study document. Draw the whole chain on the board.</a:t>
+            </a:r>
+            <a:endParaRPr lang="en-US" sz="1050" dirty="0"/>
           </a:p>
         </p:txBody>
       </p:sp>
